--- a/spec/InformationStructure/diagrams/InformationStructure.pptx
+++ b/spec/InformationStructure/diagrams/InformationStructure.pptx
@@ -205,7 +205,7 @@
           <a:p>
             <a:fld id="{37CCF725-7468-4D3D-9E24-A16745BBBA77}" type="datetimeFigureOut">
               <a:rPr lang="de-DE" smtClean="0"/>
-              <a:t>12.05.2025</a:t>
+              <a:t>13.05.2025</a:t>
             </a:fld>
             <a:endParaRPr lang="de-DE"/>
           </a:p>
@@ -603,7 +603,7 @@
           <a:p>
             <a:fld id="{9A2764DB-E7DF-4EA7-A1AF-05A77C280FCA}" type="datetimeFigureOut">
               <a:rPr lang="de-DE" smtClean="0"/>
-              <a:t>12.05.2025</a:t>
+              <a:t>13.05.2025</a:t>
             </a:fld>
             <a:endParaRPr lang="de-DE"/>
           </a:p>
@@ -773,7 +773,7 @@
           <a:p>
             <a:fld id="{9A2764DB-E7DF-4EA7-A1AF-05A77C280FCA}" type="datetimeFigureOut">
               <a:rPr lang="de-DE" smtClean="0"/>
-              <a:t>12.05.2025</a:t>
+              <a:t>13.05.2025</a:t>
             </a:fld>
             <a:endParaRPr lang="de-DE"/>
           </a:p>
@@ -953,7 +953,7 @@
           <a:p>
             <a:fld id="{9A2764DB-E7DF-4EA7-A1AF-05A77C280FCA}" type="datetimeFigureOut">
               <a:rPr lang="de-DE" smtClean="0"/>
-              <a:t>12.05.2025</a:t>
+              <a:t>13.05.2025</a:t>
             </a:fld>
             <a:endParaRPr lang="de-DE"/>
           </a:p>
@@ -1123,7 +1123,7 @@
           <a:p>
             <a:fld id="{9A2764DB-E7DF-4EA7-A1AF-05A77C280FCA}" type="datetimeFigureOut">
               <a:rPr lang="de-DE" smtClean="0"/>
-              <a:t>12.05.2025</a:t>
+              <a:t>13.05.2025</a:t>
             </a:fld>
             <a:endParaRPr lang="de-DE"/>
           </a:p>
@@ -1369,7 +1369,7 @@
           <a:p>
             <a:fld id="{9A2764DB-E7DF-4EA7-A1AF-05A77C280FCA}" type="datetimeFigureOut">
               <a:rPr lang="de-DE" smtClean="0"/>
-              <a:t>12.05.2025</a:t>
+              <a:t>13.05.2025</a:t>
             </a:fld>
             <a:endParaRPr lang="de-DE"/>
           </a:p>
@@ -1601,7 +1601,7 @@
           <a:p>
             <a:fld id="{9A2764DB-E7DF-4EA7-A1AF-05A77C280FCA}" type="datetimeFigureOut">
               <a:rPr lang="de-DE" smtClean="0"/>
-              <a:t>12.05.2025</a:t>
+              <a:t>13.05.2025</a:t>
             </a:fld>
             <a:endParaRPr lang="de-DE"/>
           </a:p>
@@ -1968,7 +1968,7 @@
           <a:p>
             <a:fld id="{9A2764DB-E7DF-4EA7-A1AF-05A77C280FCA}" type="datetimeFigureOut">
               <a:rPr lang="de-DE" smtClean="0"/>
-              <a:t>12.05.2025</a:t>
+              <a:t>13.05.2025</a:t>
             </a:fld>
             <a:endParaRPr lang="de-DE"/>
           </a:p>
@@ -2086,7 +2086,7 @@
           <a:p>
             <a:fld id="{9A2764DB-E7DF-4EA7-A1AF-05A77C280FCA}" type="datetimeFigureOut">
               <a:rPr lang="de-DE" smtClean="0"/>
-              <a:t>12.05.2025</a:t>
+              <a:t>13.05.2025</a:t>
             </a:fld>
             <a:endParaRPr lang="de-DE"/>
           </a:p>
@@ -2181,7 +2181,7 @@
           <a:p>
             <a:fld id="{9A2764DB-E7DF-4EA7-A1AF-05A77C280FCA}" type="datetimeFigureOut">
               <a:rPr lang="de-DE" smtClean="0"/>
-              <a:t>12.05.2025</a:t>
+              <a:t>13.05.2025</a:t>
             </a:fld>
             <a:endParaRPr lang="de-DE"/>
           </a:p>
@@ -2458,7 +2458,7 @@
           <a:p>
             <a:fld id="{9A2764DB-E7DF-4EA7-A1AF-05A77C280FCA}" type="datetimeFigureOut">
               <a:rPr lang="de-DE" smtClean="0"/>
-              <a:t>12.05.2025</a:t>
+              <a:t>13.05.2025</a:t>
             </a:fld>
             <a:endParaRPr lang="de-DE"/>
           </a:p>
@@ -2715,7 +2715,7 @@
           <a:p>
             <a:fld id="{9A2764DB-E7DF-4EA7-A1AF-05A77C280FCA}" type="datetimeFigureOut">
               <a:rPr lang="de-DE" smtClean="0"/>
-              <a:t>12.05.2025</a:t>
+              <a:t>13.05.2025</a:t>
             </a:fld>
             <a:endParaRPr lang="de-DE"/>
           </a:p>
@@ -2928,7 +2928,7 @@
           <a:p>
             <a:fld id="{9A2764DB-E7DF-4EA7-A1AF-05A77C280FCA}" type="datetimeFigureOut">
               <a:rPr lang="de-DE" smtClean="0"/>
-              <a:t>12.05.2025</a:t>
+              <a:t>13.05.2025</a:t>
             </a:fld>
             <a:endParaRPr lang="de-DE"/>
           </a:p>
@@ -9168,7 +9168,7 @@
         </p:nvSpPr>
         <p:spPr>
           <a:xfrm>
-            <a:off x="10728176" y="1132869"/>
+            <a:off x="11886682" y="316790"/>
             <a:ext cx="537299" cy="445572"/>
           </a:xfrm>
           <a:prstGeom prst="roundRect">
@@ -9268,15 +9268,15 @@
           </p:cNvPr>
           <p:cNvCxnSpPr>
             <a:cxnSpLocks/>
-            <a:stCxn id="191" idx="2"/>
-            <a:endCxn id="192" idx="0"/>
+            <a:stCxn id="191" idx="3"/>
+            <a:endCxn id="192" idx="1"/>
           </p:cNvCxnSpPr>
           <p:nvPr/>
         </p:nvCxnSpPr>
         <p:spPr>
-          <a:xfrm flipH="1">
-            <a:off x="10996826" y="762526"/>
-            <a:ext cx="1433" cy="370343"/>
+          <a:xfrm flipV="1">
+            <a:off x="11266908" y="539576"/>
+            <a:ext cx="619774" cy="164"/>
           </a:xfrm>
           <a:prstGeom prst="straightConnector1">
             <a:avLst/>
@@ -10619,8 +10619,8 @@
         </p:nvSpPr>
         <p:spPr>
           <a:xfrm>
-            <a:off x="6991939" y="358769"/>
-            <a:ext cx="722507" cy="424727"/>
+            <a:off x="6991939" y="358770"/>
+            <a:ext cx="722507" cy="356322"/>
           </a:xfrm>
           <a:prstGeom prst="rect">
             <a:avLst/>
@@ -10662,18 +10662,6 @@
                 <a:latin typeface="Calibri" panose="020F0502020204030204"/>
               </a:rPr>
               <a:t>parameter</a:t>
-            </a:r>
-          </a:p>
-          <a:p>
-            <a:pPr defTabSz="914400"/>
-            <a:r>
-              <a:rPr lang="de-DE" sz="800" kern="0">
-                <a:solidFill>
-                  <a:prstClr val="black"/>
-                </a:solidFill>
-                <a:latin typeface="Calibri" panose="020F0502020204030204"/>
-              </a:rPr>
-              <a:t>…</a:t>
             </a:r>
           </a:p>
         </p:txBody>
@@ -10695,9 +10683,9 @@
           <p:nvPr/>
         </p:nvCxnSpPr>
         <p:spPr>
-          <a:xfrm flipH="1">
-            <a:off x="7714446" y="540148"/>
-            <a:ext cx="711743" cy="30985"/>
+          <a:xfrm flipH="1" flipV="1">
+            <a:off x="7714446" y="536931"/>
+            <a:ext cx="711743" cy="3217"/>
           </a:xfrm>
           <a:prstGeom prst="straightConnector1">
             <a:avLst/>
@@ -10822,7 +10810,7 @@
         </p:nvSpPr>
         <p:spPr>
           <a:xfrm>
-            <a:off x="12041452" y="780829"/>
+            <a:off x="13210830" y="223697"/>
             <a:ext cx="1003929" cy="822137"/>
           </a:xfrm>
           <a:prstGeom prst="rect">
@@ -10924,6 +10912,510 @@
               <a:latin typeface="Calibri" panose="020F0502020204030204"/>
             </a:endParaRPr>
           </a:p>
+        </p:txBody>
+      </p:sp>
+      <p:cxnSp>
+        <p:nvCxnSpPr>
+          <p:cNvPr id="207" name="Gerade Verbindung mit Pfeil 206">
+            <a:extLst>
+              <a:ext uri="{FF2B5EF4-FFF2-40B4-BE49-F238E27FC236}">
+                <a16:creationId xmlns:a16="http://schemas.microsoft.com/office/drawing/2014/main" id="{42F3670C-06B4-695C-203E-C5D050ACA051}"/>
+              </a:ext>
+            </a:extLst>
+          </p:cNvPr>
+          <p:cNvCxnSpPr>
+            <a:cxnSpLocks/>
+            <a:stCxn id="192" idx="3"/>
+            <a:endCxn id="206" idx="1"/>
+          </p:cNvCxnSpPr>
+          <p:nvPr/>
+        </p:nvCxnSpPr>
+        <p:spPr>
+          <a:xfrm>
+            <a:off x="12423981" y="539576"/>
+            <a:ext cx="786849" cy="95190"/>
+          </a:xfrm>
+          <a:prstGeom prst="straightConnector1">
+            <a:avLst/>
+          </a:prstGeom>
+          <a:noFill/>
+          <a:ln w="6350" cap="flat" cmpd="sng" algn="ctr">
+            <a:solidFill>
+              <a:srgbClr val="5B9BD5"/>
+            </a:solidFill>
+            <a:prstDash val="solid"/>
+            <a:miter lim="800000"/>
+            <a:tailEnd type="triangle"/>
+          </a:ln>
+          <a:effectLst/>
+        </p:spPr>
+      </p:cxnSp>
+      <p:sp>
+        <p:nvSpPr>
+          <p:cNvPr id="12" name="Ellipse 11">
+            <a:extLst>
+              <a:ext uri="{FF2B5EF4-FFF2-40B4-BE49-F238E27FC236}">
+                <a16:creationId xmlns:a16="http://schemas.microsoft.com/office/drawing/2014/main" id="{054B287C-B95D-A84E-8945-073DB25F09A6}"/>
+              </a:ext>
+            </a:extLst>
+          </p:cNvPr>
+          <p:cNvSpPr/>
+          <p:nvPr/>
+        </p:nvSpPr>
+        <p:spPr>
+          <a:xfrm>
+            <a:off x="22058420" y="7371053"/>
+            <a:ext cx="45719" cy="45719"/>
+          </a:xfrm>
+          <a:prstGeom prst="ellipse">
+            <a:avLst/>
+          </a:prstGeom>
+          <a:solidFill>
+            <a:schemeClr val="bg1">
+              <a:lumMod val="65000"/>
+            </a:schemeClr>
+          </a:solidFill>
+          <a:ln w="12700" cap="flat" cmpd="sng" algn="ctr">
+            <a:noFill/>
+            <a:prstDash val="solid"/>
+            <a:miter lim="800000"/>
+          </a:ln>
+          <a:effectLst/>
+        </p:spPr>
+        <p:txBody>
+          <a:bodyPr rtlCol="0" anchor="ctr"/>
+          <a:lstStyle/>
+          <a:p>
+            <a:pPr algn="ctr" defTabSz="914400"/>
+            <a:endParaRPr lang="de-DE" sz="1050" kern="0">
+              <a:solidFill>
+                <a:prstClr val="white"/>
+              </a:solidFill>
+              <a:latin typeface="Calibri" panose="020F0502020204030204"/>
+            </a:endParaRPr>
+          </a:p>
+        </p:txBody>
+      </p:sp>
+      <p:sp>
+        <p:nvSpPr>
+          <p:cNvPr id="13" name="Ellipse 12">
+            <a:extLst>
+              <a:ext uri="{FF2B5EF4-FFF2-40B4-BE49-F238E27FC236}">
+                <a16:creationId xmlns:a16="http://schemas.microsoft.com/office/drawing/2014/main" id="{45E39724-A608-38DA-DBAC-1925AE0B6527}"/>
+              </a:ext>
+            </a:extLst>
+          </p:cNvPr>
+          <p:cNvSpPr/>
+          <p:nvPr/>
+        </p:nvSpPr>
+        <p:spPr>
+          <a:xfrm>
+            <a:off x="1112090" y="7370806"/>
+            <a:ext cx="45719" cy="45719"/>
+          </a:xfrm>
+          <a:prstGeom prst="ellipse">
+            <a:avLst/>
+          </a:prstGeom>
+          <a:solidFill>
+            <a:schemeClr val="bg1">
+              <a:lumMod val="65000"/>
+            </a:schemeClr>
+          </a:solidFill>
+          <a:ln w="12700" cap="flat" cmpd="sng" algn="ctr">
+            <a:noFill/>
+            <a:prstDash val="solid"/>
+            <a:miter lim="800000"/>
+          </a:ln>
+          <a:effectLst/>
+        </p:spPr>
+        <p:txBody>
+          <a:bodyPr rtlCol="0" anchor="ctr"/>
+          <a:lstStyle/>
+          <a:p>
+            <a:pPr algn="ctr" defTabSz="914400"/>
+            <a:endParaRPr lang="de-DE" sz="1050" kern="0">
+              <a:solidFill>
+                <a:prstClr val="white"/>
+              </a:solidFill>
+              <a:latin typeface="Calibri" panose="020F0502020204030204"/>
+            </a:endParaRPr>
+          </a:p>
+        </p:txBody>
+      </p:sp>
+      <p:sp>
+        <p:nvSpPr>
+          <p:cNvPr id="34" name="Abgerundetes Rechteck 1">
+            <a:extLst>
+              <a:ext uri="{FF2B5EF4-FFF2-40B4-BE49-F238E27FC236}">
+                <a16:creationId xmlns:a16="http://schemas.microsoft.com/office/drawing/2014/main" id="{187D5938-35E1-F691-BF8D-43A48ECF89C8}"/>
+              </a:ext>
+            </a:extLst>
+          </p:cNvPr>
+          <p:cNvSpPr/>
+          <p:nvPr/>
+        </p:nvSpPr>
+        <p:spPr>
+          <a:xfrm>
+            <a:off x="8426322" y="1102850"/>
+            <a:ext cx="541487" cy="445572"/>
+          </a:xfrm>
+          <a:prstGeom prst="roundRect">
+            <a:avLst/>
+          </a:prstGeom>
+          <a:solidFill>
+            <a:sysClr val="window" lastClr="FFFFFF">
+              <a:lumMod val="65000"/>
+            </a:sysClr>
+          </a:solidFill>
+          <a:ln w="12700" cap="flat" cmpd="sng" algn="ctr">
+            <a:solidFill>
+              <a:sysClr val="window" lastClr="FFFFFF">
+                <a:lumMod val="50000"/>
+              </a:sysClr>
+            </a:solidFill>
+            <a:prstDash val="solid"/>
+            <a:miter lim="800000"/>
+          </a:ln>
+          <a:effectLst>
+            <a:outerShdw blurRad="50800" dist="38100" dir="2700000" algn="tl" rotWithShape="0">
+              <a:prstClr val="black">
+                <a:alpha val="40000"/>
+              </a:prstClr>
+            </a:outerShdw>
+          </a:effectLst>
+        </p:spPr>
+        <p:txBody>
+          <a:bodyPr rtlCol="0" anchor="ctr"/>
+          <a:lstStyle/>
+          <a:p>
+            <a:pPr algn="ctr" defTabSz="914400">
+              <a:defRPr/>
+            </a:pPr>
+            <a:r>
+              <a:rPr lang="de-DE" sz="1050" kern="0">
+                <a:solidFill>
+                  <a:prstClr val="white"/>
+                </a:solidFill>
+                <a:latin typeface="Calibri" panose="020F0502020204030204"/>
+              </a:rPr>
+              <a:t>VS</a:t>
+            </a:r>
+            <a:endParaRPr lang="de-DE" sz="1050" kern="0" dirty="0">
+              <a:solidFill>
+                <a:prstClr val="white"/>
+              </a:solidFill>
+              <a:latin typeface="Calibri" panose="020F0502020204030204"/>
+            </a:endParaRPr>
+          </a:p>
+        </p:txBody>
+      </p:sp>
+      <p:cxnSp>
+        <p:nvCxnSpPr>
+          <p:cNvPr id="39" name="Gerade Verbindung mit Pfeil 38">
+            <a:extLst>
+              <a:ext uri="{FF2B5EF4-FFF2-40B4-BE49-F238E27FC236}">
+                <a16:creationId xmlns:a16="http://schemas.microsoft.com/office/drawing/2014/main" id="{944A4472-3879-87AB-B603-C9DDA630BD25}"/>
+              </a:ext>
+            </a:extLst>
+          </p:cNvPr>
+          <p:cNvCxnSpPr>
+            <a:cxnSpLocks/>
+            <a:stCxn id="175" idx="2"/>
+            <a:endCxn id="34" idx="3"/>
+          </p:cNvCxnSpPr>
+          <p:nvPr/>
+        </p:nvCxnSpPr>
+        <p:spPr>
+          <a:xfrm flipH="1">
+            <a:off x="8967809" y="762267"/>
+            <a:ext cx="881155" cy="563369"/>
+          </a:xfrm>
+          <a:prstGeom prst="straightConnector1">
+            <a:avLst/>
+          </a:prstGeom>
+          <a:noFill/>
+          <a:ln w="6350" cap="flat" cmpd="sng" algn="ctr">
+            <a:solidFill>
+              <a:srgbClr val="5B9BD5"/>
+            </a:solidFill>
+            <a:prstDash val="solid"/>
+            <a:miter lim="800000"/>
+            <a:tailEnd type="triangle"/>
+          </a:ln>
+          <a:effectLst/>
+        </p:spPr>
+      </p:cxnSp>
+      <p:sp>
+        <p:nvSpPr>
+          <p:cNvPr id="40" name="Abgerundetes Rechteck 1">
+            <a:extLst>
+              <a:ext uri="{FF2B5EF4-FFF2-40B4-BE49-F238E27FC236}">
+                <a16:creationId xmlns:a16="http://schemas.microsoft.com/office/drawing/2014/main" id="{E6590A41-7C3D-FCAA-BD80-0D84788A5795}"/>
+              </a:ext>
+            </a:extLst>
+          </p:cNvPr>
+          <p:cNvSpPr/>
+          <p:nvPr/>
+        </p:nvSpPr>
+        <p:spPr>
+          <a:xfrm>
+            <a:off x="10729167" y="1102850"/>
+            <a:ext cx="537299" cy="445572"/>
+          </a:xfrm>
+          <a:prstGeom prst="roundRect">
+            <a:avLst/>
+          </a:prstGeom>
+          <a:solidFill>
+            <a:sysClr val="window" lastClr="FFFFFF">
+              <a:lumMod val="65000"/>
+            </a:sysClr>
+          </a:solidFill>
+          <a:ln w="12700" cap="flat" cmpd="sng" algn="ctr">
+            <a:solidFill>
+              <a:sysClr val="window" lastClr="FFFFFF">
+                <a:lumMod val="50000"/>
+              </a:sysClr>
+            </a:solidFill>
+            <a:prstDash val="solid"/>
+            <a:miter lim="800000"/>
+          </a:ln>
+          <a:effectLst>
+            <a:outerShdw blurRad="50800" dist="38100" dir="2700000" algn="tl" rotWithShape="0">
+              <a:prstClr val="black">
+                <a:alpha val="40000"/>
+              </a:prstClr>
+            </a:outerShdw>
+          </a:effectLst>
+        </p:spPr>
+        <p:txBody>
+          <a:bodyPr rtlCol="0" anchor="ctr"/>
+          <a:lstStyle/>
+          <a:p>
+            <a:pPr algn="ctr" defTabSz="914400">
+              <a:defRPr/>
+            </a:pPr>
+            <a:r>
+              <a:rPr lang="de-DE" sz="1050" kern="0">
+                <a:solidFill>
+                  <a:prstClr val="white"/>
+                </a:solidFill>
+                <a:latin typeface="Calibri" panose="020F0502020204030204"/>
+              </a:rPr>
+              <a:t>EC</a:t>
+            </a:r>
+            <a:endParaRPr lang="de-DE" sz="1050" kern="0" dirty="0">
+              <a:solidFill>
+                <a:prstClr val="white"/>
+              </a:solidFill>
+              <a:latin typeface="Calibri" panose="020F0502020204030204"/>
+            </a:endParaRPr>
+          </a:p>
+        </p:txBody>
+      </p:sp>
+      <p:cxnSp>
+        <p:nvCxnSpPr>
+          <p:cNvPr id="42" name="Gerade Verbindung mit Pfeil 41">
+            <a:extLst>
+              <a:ext uri="{FF2B5EF4-FFF2-40B4-BE49-F238E27FC236}">
+                <a16:creationId xmlns:a16="http://schemas.microsoft.com/office/drawing/2014/main" id="{A551AFAD-6773-3541-CCCE-F6AA0B12A8EC}"/>
+              </a:ext>
+            </a:extLst>
+          </p:cNvPr>
+          <p:cNvCxnSpPr>
+            <a:cxnSpLocks/>
+            <a:stCxn id="175" idx="2"/>
+            <a:endCxn id="40" idx="1"/>
+          </p:cNvCxnSpPr>
+          <p:nvPr/>
+        </p:nvCxnSpPr>
+        <p:spPr>
+          <a:xfrm>
+            <a:off x="9848964" y="762267"/>
+            <a:ext cx="880203" cy="563369"/>
+          </a:xfrm>
+          <a:prstGeom prst="straightConnector1">
+            <a:avLst/>
+          </a:prstGeom>
+          <a:noFill/>
+          <a:ln w="6350" cap="flat" cmpd="sng" algn="ctr">
+            <a:solidFill>
+              <a:srgbClr val="5B9BD5"/>
+            </a:solidFill>
+            <a:prstDash val="solid"/>
+            <a:miter lim="800000"/>
+            <a:tailEnd type="triangle"/>
+          </a:ln>
+          <a:effectLst/>
+        </p:spPr>
+      </p:cxnSp>
+      <p:sp>
+        <p:nvSpPr>
+          <p:cNvPr id="43" name="Rechteck 42">
+            <a:extLst>
+              <a:ext uri="{FF2B5EF4-FFF2-40B4-BE49-F238E27FC236}">
+                <a16:creationId xmlns:a16="http://schemas.microsoft.com/office/drawing/2014/main" id="{EF6C6A8D-BB5F-B017-CC71-6AE166744ED5}"/>
+              </a:ext>
+            </a:extLst>
+          </p:cNvPr>
+          <p:cNvSpPr/>
+          <p:nvPr/>
+        </p:nvSpPr>
+        <p:spPr>
+          <a:xfrm>
+            <a:off x="6839829" y="1166723"/>
+            <a:ext cx="874180" cy="336074"/>
+          </a:xfrm>
+          <a:prstGeom prst="rect">
+            <a:avLst/>
+          </a:prstGeom>
+          <a:solidFill>
+            <a:sysClr val="window" lastClr="FFFFFF"/>
+          </a:solidFill>
+          <a:ln w="12700" cap="flat" cmpd="sng" algn="ctr">
+            <a:solidFill>
+              <a:srgbClr val="A5A5A5"/>
+            </a:solidFill>
+            <a:prstDash val="solid"/>
+            <a:miter lim="800000"/>
+          </a:ln>
+          <a:effectLst/>
+        </p:spPr>
+        <p:txBody>
+          <a:bodyPr lIns="36000" tIns="36000" rIns="36000" bIns="36000" rtlCol="0" anchor="t"/>
+          <a:lstStyle/>
+          <a:p>
+            <a:pPr defTabSz="914400"/>
+            <a:r>
+              <a:rPr lang="de-DE" sz="800" kern="0">
+                <a:solidFill>
+                  <a:prstClr val="black"/>
+                </a:solidFill>
+                <a:latin typeface="Calibri" panose="020F0502020204030204"/>
+              </a:rPr>
+              <a:t>_trigger-function</a:t>
+            </a:r>
+          </a:p>
+          <a:p>
+            <a:pPr defTabSz="914400"/>
+            <a:r>
+              <a:rPr lang="de-DE" sz="800" kern="0">
+                <a:solidFill>
+                  <a:prstClr val="black"/>
+                </a:solidFill>
+                <a:latin typeface="Calibri" panose="020F0502020204030204"/>
+              </a:rPr>
+              <a:t>sequence</a:t>
+            </a:r>
+          </a:p>
+        </p:txBody>
+      </p:sp>
+      <p:cxnSp>
+        <p:nvCxnSpPr>
+          <p:cNvPr id="51" name="Gerade Verbindung mit Pfeil 50">
+            <a:extLst>
+              <a:ext uri="{FF2B5EF4-FFF2-40B4-BE49-F238E27FC236}">
+                <a16:creationId xmlns:a16="http://schemas.microsoft.com/office/drawing/2014/main" id="{93F2889A-8AC8-9CD3-6029-630851D60631}"/>
+              </a:ext>
+            </a:extLst>
+          </p:cNvPr>
+          <p:cNvCxnSpPr>
+            <a:cxnSpLocks/>
+            <a:stCxn id="34" idx="1"/>
+            <a:endCxn id="43" idx="3"/>
+          </p:cNvCxnSpPr>
+          <p:nvPr/>
+        </p:nvCxnSpPr>
+        <p:spPr>
+          <a:xfrm flipH="1">
+            <a:off x="7714009" y="1325636"/>
+            <a:ext cx="712313" cy="9124"/>
+          </a:xfrm>
+          <a:prstGeom prst="straightConnector1">
+            <a:avLst/>
+          </a:prstGeom>
+          <a:noFill/>
+          <a:ln w="6350" cap="flat" cmpd="sng" algn="ctr">
+            <a:solidFill>
+              <a:srgbClr val="5B9BD5"/>
+            </a:solidFill>
+            <a:prstDash val="solid"/>
+            <a:miter lim="800000"/>
+            <a:tailEnd type="triangle"/>
+          </a:ln>
+          <a:effectLst/>
+        </p:spPr>
+      </p:cxnSp>
+      <p:sp>
+        <p:nvSpPr>
+          <p:cNvPr id="52" name="Rechteck 51">
+            <a:extLst>
+              <a:ext uri="{FF2B5EF4-FFF2-40B4-BE49-F238E27FC236}">
+                <a16:creationId xmlns:a16="http://schemas.microsoft.com/office/drawing/2014/main" id="{73728BB6-D891-98D5-2987-6556EE219455}"/>
+              </a:ext>
+            </a:extLst>
+          </p:cNvPr>
+          <p:cNvSpPr/>
+          <p:nvPr/>
+        </p:nvSpPr>
+        <p:spPr>
+          <a:xfrm>
+            <a:off x="11878467" y="1102800"/>
+            <a:ext cx="1225837" cy="445571"/>
+          </a:xfrm>
+          <a:prstGeom prst="rect">
+            <a:avLst/>
+          </a:prstGeom>
+          <a:solidFill>
+            <a:sysClr val="window" lastClr="FFFFFF"/>
+          </a:solidFill>
+          <a:ln w="12700" cap="flat" cmpd="sng" algn="ctr">
+            <a:solidFill>
+              <a:srgbClr val="A5A5A5"/>
+            </a:solidFill>
+            <a:prstDash val="solid"/>
+            <a:miter lim="800000"/>
+          </a:ln>
+          <a:effectLst/>
+        </p:spPr>
+        <p:txBody>
+          <a:bodyPr lIns="36000" tIns="36000" rIns="36000" bIns="36000" rtlCol="0" anchor="t"/>
+          <a:lstStyle/>
+          <a:p>
+            <a:pPr defTabSz="914400"/>
+            <a:r>
+              <a:rPr lang="de-DE" sz="800" kern="0">
+                <a:solidFill>
+                  <a:prstClr val="black"/>
+                </a:solidFill>
+                <a:latin typeface="Calibri" panose="020F0502020204030204"/>
+              </a:rPr>
+              <a:t>error-code</a:t>
+            </a:r>
+          </a:p>
+          <a:p>
+            <a:pPr defTabSz="914400"/>
+            <a:r>
+              <a:rPr lang="de-DE" sz="800" kern="0">
+                <a:solidFill>
+                  <a:prstClr val="black"/>
+                </a:solidFill>
+                <a:latin typeface="Calibri" panose="020F0502020204030204"/>
+              </a:rPr>
+              <a:t>description</a:t>
+            </a:r>
+          </a:p>
+          <a:p>
+            <a:pPr defTabSz="914400"/>
+            <a:r>
+              <a:rPr lang="de-DE" sz="800" kern="0">
+                <a:solidFill>
+                  <a:prstClr val="black"/>
+                </a:solidFill>
+                <a:latin typeface="Calibri" panose="020F0502020204030204"/>
+              </a:rPr>
+              <a:t>_implementation-function</a:t>
+            </a:r>
+          </a:p>
           <a:p>
             <a:pPr defTabSz="914400"/>
             <a:endParaRPr lang="de-DE" sz="800" kern="0">
@@ -10937,24 +11429,24 @@
       </p:sp>
       <p:cxnSp>
         <p:nvCxnSpPr>
-          <p:cNvPr id="207" name="Gerade Verbindung mit Pfeil 206">
-            <a:extLst>
-              <a:ext uri="{FF2B5EF4-FFF2-40B4-BE49-F238E27FC236}">
-                <a16:creationId xmlns:a16="http://schemas.microsoft.com/office/drawing/2014/main" id="{42F3670C-06B4-695C-203E-C5D050ACA051}"/>
+          <p:cNvPr id="57" name="Gerade Verbindung mit Pfeil 56">
+            <a:extLst>
+              <a:ext uri="{FF2B5EF4-FFF2-40B4-BE49-F238E27FC236}">
+                <a16:creationId xmlns:a16="http://schemas.microsoft.com/office/drawing/2014/main" id="{AF0C0267-C3EF-DA30-22F2-2577EF80B05C}"/>
               </a:ext>
             </a:extLst>
           </p:cNvPr>
           <p:cNvCxnSpPr>
             <a:cxnSpLocks/>
-            <a:stCxn id="192" idx="3"/>
-            <a:endCxn id="206" idx="1"/>
+            <a:stCxn id="40" idx="3"/>
+            <a:endCxn id="52" idx="1"/>
           </p:cNvCxnSpPr>
           <p:nvPr/>
         </p:nvCxnSpPr>
         <p:spPr>
           <a:xfrm flipV="1">
-            <a:off x="11265475" y="1191898"/>
-            <a:ext cx="775977" cy="163757"/>
+            <a:off x="11266466" y="1325586"/>
+            <a:ext cx="612001" cy="50"/>
           </a:xfrm>
           <a:prstGeom prst="straightConnector1">
             <a:avLst/>
@@ -10971,98 +11463,6 @@
           <a:effectLst/>
         </p:spPr>
       </p:cxnSp>
-      <p:sp>
-        <p:nvSpPr>
-          <p:cNvPr id="12" name="Ellipse 11">
-            <a:extLst>
-              <a:ext uri="{FF2B5EF4-FFF2-40B4-BE49-F238E27FC236}">
-                <a16:creationId xmlns:a16="http://schemas.microsoft.com/office/drawing/2014/main" id="{054B287C-B95D-A84E-8945-073DB25F09A6}"/>
-              </a:ext>
-            </a:extLst>
-          </p:cNvPr>
-          <p:cNvSpPr/>
-          <p:nvPr/>
-        </p:nvSpPr>
-        <p:spPr>
-          <a:xfrm>
-            <a:off x="22058420" y="7371053"/>
-            <a:ext cx="45719" cy="45719"/>
-          </a:xfrm>
-          <a:prstGeom prst="ellipse">
-            <a:avLst/>
-          </a:prstGeom>
-          <a:solidFill>
-            <a:schemeClr val="bg1">
-              <a:lumMod val="65000"/>
-            </a:schemeClr>
-          </a:solidFill>
-          <a:ln w="12700" cap="flat" cmpd="sng" algn="ctr">
-            <a:noFill/>
-            <a:prstDash val="solid"/>
-            <a:miter lim="800000"/>
-          </a:ln>
-          <a:effectLst/>
-        </p:spPr>
-        <p:txBody>
-          <a:bodyPr rtlCol="0" anchor="ctr"/>
-          <a:lstStyle/>
-          <a:p>
-            <a:pPr algn="ctr" defTabSz="914400"/>
-            <a:endParaRPr lang="de-DE" sz="1050" kern="0">
-              <a:solidFill>
-                <a:prstClr val="white"/>
-              </a:solidFill>
-              <a:latin typeface="Calibri" panose="020F0502020204030204"/>
-            </a:endParaRPr>
-          </a:p>
-        </p:txBody>
-      </p:sp>
-      <p:sp>
-        <p:nvSpPr>
-          <p:cNvPr id="13" name="Ellipse 12">
-            <a:extLst>
-              <a:ext uri="{FF2B5EF4-FFF2-40B4-BE49-F238E27FC236}">
-                <a16:creationId xmlns:a16="http://schemas.microsoft.com/office/drawing/2014/main" id="{45E39724-A608-38DA-DBAC-1925AE0B6527}"/>
-              </a:ext>
-            </a:extLst>
-          </p:cNvPr>
-          <p:cNvSpPr/>
-          <p:nvPr/>
-        </p:nvSpPr>
-        <p:spPr>
-          <a:xfrm>
-            <a:off x="1112090" y="7370806"/>
-            <a:ext cx="45719" cy="45719"/>
-          </a:xfrm>
-          <a:prstGeom prst="ellipse">
-            <a:avLst/>
-          </a:prstGeom>
-          <a:solidFill>
-            <a:schemeClr val="bg1">
-              <a:lumMod val="65000"/>
-            </a:schemeClr>
-          </a:solidFill>
-          <a:ln w="12700" cap="flat" cmpd="sng" algn="ctr">
-            <a:noFill/>
-            <a:prstDash val="solid"/>
-            <a:miter lim="800000"/>
-          </a:ln>
-          <a:effectLst/>
-        </p:spPr>
-        <p:txBody>
-          <a:bodyPr rtlCol="0" anchor="ctr"/>
-          <a:lstStyle/>
-          <a:p>
-            <a:pPr algn="ctr" defTabSz="914400"/>
-            <a:endParaRPr lang="de-DE" sz="1050" kern="0">
-              <a:solidFill>
-                <a:prstClr val="white"/>
-              </a:solidFill>
-              <a:latin typeface="Calibri" panose="020F0502020204030204"/>
-            </a:endParaRPr>
-          </a:p>
-        </p:txBody>
-      </p:sp>
     </p:spTree>
     <p:extLst>
       <p:ext uri="{BB962C8B-B14F-4D97-AF65-F5344CB8AC3E}">

--- a/spec/InformationStructure/diagrams/InformationStructure.pptx
+++ b/spec/InformationStructure/diagrams/InformationStructure.pptx
@@ -209,7 +209,7 @@
           <a:p>
             <a:fld id="{37CCF725-7468-4D3D-9E24-A16745BBBA77}" type="datetimeFigureOut">
               <a:rPr lang="de-DE" smtClean="0"/>
-              <a:t>16.05.2025</a:t>
+              <a:t>26.06.2025</a:t>
             </a:fld>
             <a:endParaRPr lang="de-DE"/>
           </a:p>
@@ -607,7 +607,7 @@
           <a:p>
             <a:fld id="{9A2764DB-E7DF-4EA7-A1AF-05A77C280FCA}" type="datetimeFigureOut">
               <a:rPr lang="de-DE" smtClean="0"/>
-              <a:t>16.05.2025</a:t>
+              <a:t>26.06.2025</a:t>
             </a:fld>
             <a:endParaRPr lang="de-DE"/>
           </a:p>
@@ -777,7 +777,7 @@
           <a:p>
             <a:fld id="{9A2764DB-E7DF-4EA7-A1AF-05A77C280FCA}" type="datetimeFigureOut">
               <a:rPr lang="de-DE" smtClean="0"/>
-              <a:t>16.05.2025</a:t>
+              <a:t>26.06.2025</a:t>
             </a:fld>
             <a:endParaRPr lang="de-DE"/>
           </a:p>
@@ -957,7 +957,7 @@
           <a:p>
             <a:fld id="{9A2764DB-E7DF-4EA7-A1AF-05A77C280FCA}" type="datetimeFigureOut">
               <a:rPr lang="de-DE" smtClean="0"/>
-              <a:t>16.05.2025</a:t>
+              <a:t>26.06.2025</a:t>
             </a:fld>
             <a:endParaRPr lang="de-DE"/>
           </a:p>
@@ -1127,7 +1127,7 @@
           <a:p>
             <a:fld id="{9A2764DB-E7DF-4EA7-A1AF-05A77C280FCA}" type="datetimeFigureOut">
               <a:rPr lang="de-DE" smtClean="0"/>
-              <a:t>16.05.2025</a:t>
+              <a:t>26.06.2025</a:t>
             </a:fld>
             <a:endParaRPr lang="de-DE"/>
           </a:p>
@@ -1373,7 +1373,7 @@
           <a:p>
             <a:fld id="{9A2764DB-E7DF-4EA7-A1AF-05A77C280FCA}" type="datetimeFigureOut">
               <a:rPr lang="de-DE" smtClean="0"/>
-              <a:t>16.05.2025</a:t>
+              <a:t>26.06.2025</a:t>
             </a:fld>
             <a:endParaRPr lang="de-DE"/>
           </a:p>
@@ -1605,7 +1605,7 @@
           <a:p>
             <a:fld id="{9A2764DB-E7DF-4EA7-A1AF-05A77C280FCA}" type="datetimeFigureOut">
               <a:rPr lang="de-DE" smtClean="0"/>
-              <a:t>16.05.2025</a:t>
+              <a:t>26.06.2025</a:t>
             </a:fld>
             <a:endParaRPr lang="de-DE"/>
           </a:p>
@@ -1972,7 +1972,7 @@
           <a:p>
             <a:fld id="{9A2764DB-E7DF-4EA7-A1AF-05A77C280FCA}" type="datetimeFigureOut">
               <a:rPr lang="de-DE" smtClean="0"/>
-              <a:t>16.05.2025</a:t>
+              <a:t>26.06.2025</a:t>
             </a:fld>
             <a:endParaRPr lang="de-DE"/>
           </a:p>
@@ -2090,7 +2090,7 @@
           <a:p>
             <a:fld id="{9A2764DB-E7DF-4EA7-A1AF-05A77C280FCA}" type="datetimeFigureOut">
               <a:rPr lang="de-DE" smtClean="0"/>
-              <a:t>16.05.2025</a:t>
+              <a:t>26.06.2025</a:t>
             </a:fld>
             <a:endParaRPr lang="de-DE"/>
           </a:p>
@@ -2185,7 +2185,7 @@
           <a:p>
             <a:fld id="{9A2764DB-E7DF-4EA7-A1AF-05A77C280FCA}" type="datetimeFigureOut">
               <a:rPr lang="de-DE" smtClean="0"/>
-              <a:t>16.05.2025</a:t>
+              <a:t>26.06.2025</a:t>
             </a:fld>
             <a:endParaRPr lang="de-DE"/>
           </a:p>
@@ -2462,7 +2462,7 @@
           <a:p>
             <a:fld id="{9A2764DB-E7DF-4EA7-A1AF-05A77C280FCA}" type="datetimeFigureOut">
               <a:rPr lang="de-DE" smtClean="0"/>
-              <a:t>16.05.2025</a:t>
+              <a:t>26.06.2025</a:t>
             </a:fld>
             <a:endParaRPr lang="de-DE"/>
           </a:p>
@@ -2719,7 +2719,7 @@
           <a:p>
             <a:fld id="{9A2764DB-E7DF-4EA7-A1AF-05A77C280FCA}" type="datetimeFigureOut">
               <a:rPr lang="de-DE" smtClean="0"/>
-              <a:t>16.05.2025</a:t>
+              <a:t>26.06.2025</a:t>
             </a:fld>
             <a:endParaRPr lang="de-DE"/>
           </a:p>
@@ -2932,7 +2932,7 @@
           <a:p>
             <a:fld id="{9A2764DB-E7DF-4EA7-A1AF-05A77C280FCA}" type="datetimeFigureOut">
               <a:rPr lang="de-DE" smtClean="0"/>
-              <a:t>16.05.2025</a:t>
+              <a:t>26.06.2025</a:t>
             </a:fld>
             <a:endParaRPr lang="de-DE"/>
           </a:p>
@@ -4118,37 +4118,52 @@
               <a:defRPr/>
             </a:pPr>
             <a:r>
-              <a:rPr lang="de-DE" sz="800" kern="0">
+              <a:rPr lang="de-DE" sz="800" kern="0" dirty="0" err="1">
                 <a:solidFill>
                   <a:prstClr val="black"/>
                 </a:solidFill>
                 <a:latin typeface="Calibri" panose="020F0502020204030204"/>
               </a:rPr>
-              <a:t>local-id=tcpClient</a:t>
+              <a:t>local-id</a:t>
+            </a:r>
+            <a:r>
+              <a:rPr lang="de-DE" sz="800" kern="0" dirty="0">
+                <a:solidFill>
+                  <a:prstClr val="black"/>
+                </a:solidFill>
+                <a:latin typeface="Calibri" panose="020F0502020204030204"/>
+              </a:rPr>
+              <a:t>=</a:t>
+            </a:r>
+            <a:r>
+              <a:rPr lang="de-DE" sz="800" kern="0" dirty="0" err="1">
+                <a:solidFill>
+                  <a:prstClr val="black"/>
+                </a:solidFill>
+                <a:latin typeface="Calibri" panose="020F0502020204030204"/>
+              </a:rPr>
+              <a:t>tcp</a:t>
+            </a:r>
+            <a:r>
+              <a:rPr lang="de-DE" sz="800" kern="0" dirty="0">
+                <a:solidFill>
+                  <a:prstClr val="black"/>
+                </a:solidFill>
+                <a:latin typeface="Calibri" panose="020F0502020204030204"/>
+              </a:rPr>
+              <a:t>-client</a:t>
             </a:r>
           </a:p>
           <a:p>
             <a:pPr defTabSz="914400"/>
             <a:r>
-              <a:rPr lang="de-DE" sz="800" kern="0">
+              <a:rPr lang="de-DE" sz="800" kern="0" dirty="0" err="1">
                 <a:solidFill>
                   <a:prstClr val="black"/>
                 </a:solidFill>
                 <a:latin typeface="Calibri" panose="020F0502020204030204"/>
               </a:rPr>
               <a:t>remoteIpAddress</a:t>
-            </a:r>
-          </a:p>
-          <a:p>
-            <a:pPr defTabSz="914400"/>
-            <a:r>
-              <a:rPr lang="de-DE" sz="800" kern="0">
-                <a:solidFill>
-                  <a:prstClr val="black"/>
-                </a:solidFill>
-                <a:latin typeface="Calibri" panose="020F0502020204030204"/>
-              </a:rPr>
-              <a:t>remotePort</a:t>
             </a:r>
             <a:endParaRPr lang="de-DE" sz="800" kern="0" dirty="0">
               <a:solidFill>
@@ -4157,6 +4172,24 @@
               <a:latin typeface="Calibri" panose="020F0502020204030204"/>
             </a:endParaRPr>
           </a:p>
+          <a:p>
+            <a:pPr defTabSz="914400"/>
+            <a:r>
+              <a:rPr lang="de-DE" sz="800" kern="0" dirty="0" err="1">
+                <a:solidFill>
+                  <a:prstClr val="black"/>
+                </a:solidFill>
+                <a:latin typeface="Calibri" panose="020F0502020204030204"/>
+              </a:rPr>
+              <a:t>remotePort</a:t>
+            </a:r>
+            <a:endParaRPr lang="de-DE" sz="800" kern="0" dirty="0">
+              <a:solidFill>
+                <a:prstClr val="black"/>
+              </a:solidFill>
+              <a:latin typeface="Calibri" panose="020F0502020204030204"/>
+            </a:endParaRPr>
+          </a:p>
         </p:txBody>
       </p:sp>
       <p:sp>
@@ -4199,13 +4232,40 @@
               <a:defRPr/>
             </a:pPr>
             <a:r>
-              <a:rPr lang="de-DE" sz="800" kern="0">
+              <a:rPr lang="de-DE" sz="800" kern="0" dirty="0" err="1">
                 <a:solidFill>
                   <a:prstClr val="black"/>
                 </a:solidFill>
                 <a:latin typeface="Calibri" panose="020F0502020204030204"/>
               </a:rPr>
-              <a:t>local-id=netconfClient</a:t>
+              <a:t>local-id</a:t>
+            </a:r>
+            <a:r>
+              <a:rPr lang="de-DE" sz="800" kern="0" dirty="0">
+                <a:solidFill>
+                  <a:prstClr val="black"/>
+                </a:solidFill>
+                <a:latin typeface="Calibri" panose="020F0502020204030204"/>
+              </a:rPr>
+              <a:t>=</a:t>
+            </a:r>
+            <a:r>
+              <a:rPr lang="de-DE" sz="800" kern="0" dirty="0" err="1">
+                <a:solidFill>
+                  <a:prstClr val="black"/>
+                </a:solidFill>
+                <a:latin typeface="Calibri" panose="020F0502020204030204"/>
+              </a:rPr>
+              <a:t>netconf</a:t>
+            </a:r>
+            <a:r>
+              <a:rPr lang="de-DE" sz="800" kern="0" dirty="0">
+                <a:solidFill>
+                  <a:prstClr val="black"/>
+                </a:solidFill>
+                <a:latin typeface="Calibri" panose="020F0502020204030204"/>
+              </a:rPr>
+              <a:t>-client</a:t>
             </a:r>
           </a:p>
         </p:txBody>
@@ -4446,19 +4506,46 @@
               <a:defRPr/>
             </a:pPr>
             <a:r>
-              <a:rPr lang="de-DE" sz="800" kern="0">
+              <a:rPr lang="de-DE" sz="800" kern="0" dirty="0" err="1">
                 <a:solidFill>
                   <a:prstClr val="black"/>
                 </a:solidFill>
                 <a:latin typeface="Calibri" panose="020F0502020204030204"/>
               </a:rPr>
-              <a:t>local-id=tcpClient</a:t>
+              <a:t>local-id</a:t>
+            </a:r>
+            <a:r>
+              <a:rPr lang="de-DE" sz="800" kern="0" dirty="0">
+                <a:solidFill>
+                  <a:prstClr val="black"/>
+                </a:solidFill>
+                <a:latin typeface="Calibri" panose="020F0502020204030204"/>
+              </a:rPr>
+              <a:t>=</a:t>
+            </a:r>
+            <a:r>
+              <a:rPr lang="de-DE" sz="800" kern="0" dirty="0" err="1">
+                <a:solidFill>
+                  <a:prstClr val="black"/>
+                </a:solidFill>
+                <a:latin typeface="Calibri" panose="020F0502020204030204"/>
+              </a:rPr>
+              <a:t>tcp</a:t>
+            </a:r>
+            <a:r>
+              <a:rPr lang="de-DE" sz="800" kern="0" dirty="0">
+                <a:solidFill>
+                  <a:prstClr val="black"/>
+                </a:solidFill>
+                <a:latin typeface="Calibri" panose="020F0502020204030204"/>
+              </a:rPr>
+              <a:t>-client</a:t>
             </a:r>
           </a:p>
           <a:p>
             <a:pPr defTabSz="914400"/>
             <a:r>
-              <a:rPr lang="de-DE" sz="800" kern="0">
+              <a:rPr lang="de-DE" sz="800" kern="0" dirty="0" err="1">
                 <a:solidFill>
                   <a:prstClr val="black"/>
                 </a:solidFill>
@@ -4466,11 +4553,17 @@
               </a:rPr>
               <a:t>remoteIpAddress</a:t>
             </a:r>
+            <a:endParaRPr lang="de-DE" sz="800" kern="0" dirty="0">
+              <a:solidFill>
+                <a:prstClr val="black"/>
+              </a:solidFill>
+              <a:latin typeface="Calibri" panose="020F0502020204030204"/>
+            </a:endParaRPr>
           </a:p>
           <a:p>
             <a:pPr defTabSz="914400"/>
             <a:r>
-              <a:rPr lang="de-DE" sz="800" kern="0">
+              <a:rPr lang="de-DE" sz="800" kern="0" dirty="0" err="1">
                 <a:solidFill>
                   <a:prstClr val="black"/>
                 </a:solidFill>
@@ -4649,37 +4742,52 @@
           <a:p>
             <a:pPr defTabSz="914400"/>
             <a:r>
-              <a:rPr lang="de-DE" sz="800" kern="0">
+              <a:rPr lang="de-DE" sz="800" kern="0" dirty="0" err="1">
                 <a:solidFill>
                   <a:prstClr val="black"/>
                 </a:solidFill>
                 <a:latin typeface="Calibri" panose="020F0502020204030204"/>
               </a:rPr>
-              <a:t>local-id=tcpServer</a:t>
+              <a:t>local-id</a:t>
+            </a:r>
+            <a:r>
+              <a:rPr lang="de-DE" sz="800" kern="0" dirty="0">
+                <a:solidFill>
+                  <a:prstClr val="black"/>
+                </a:solidFill>
+                <a:latin typeface="Calibri" panose="020F0502020204030204"/>
+              </a:rPr>
+              <a:t>=</a:t>
+            </a:r>
+            <a:r>
+              <a:rPr lang="de-DE" sz="800" kern="0" dirty="0" err="1">
+                <a:solidFill>
+                  <a:prstClr val="black"/>
+                </a:solidFill>
+                <a:latin typeface="Calibri" panose="020F0502020204030204"/>
+              </a:rPr>
+              <a:t>tcp</a:t>
+            </a:r>
+            <a:r>
+              <a:rPr lang="de-DE" sz="800" kern="0" dirty="0">
+                <a:solidFill>
+                  <a:prstClr val="black"/>
+                </a:solidFill>
+                <a:latin typeface="Calibri" panose="020F0502020204030204"/>
+              </a:rPr>
+              <a:t>-server</a:t>
             </a:r>
           </a:p>
           <a:p>
             <a:pPr defTabSz="914400"/>
             <a:r>
-              <a:rPr lang="de-DE" sz="800" kern="0">
+              <a:rPr lang="de-DE" sz="800" kern="0" dirty="0" err="1">
                 <a:solidFill>
                   <a:prstClr val="black"/>
                 </a:solidFill>
                 <a:latin typeface="Calibri" panose="020F0502020204030204"/>
               </a:rPr>
               <a:t>localIpAddress</a:t>
-            </a:r>
-          </a:p>
-          <a:p>
-            <a:pPr defTabSz="914400"/>
-            <a:r>
-              <a:rPr lang="de-DE" sz="800" kern="0">
-                <a:solidFill>
-                  <a:prstClr val="black"/>
-                </a:solidFill>
-                <a:latin typeface="Calibri" panose="020F0502020204030204"/>
-              </a:rPr>
-              <a:t>localPort</a:t>
             </a:r>
             <a:endParaRPr lang="de-DE" sz="800" kern="0" dirty="0">
               <a:solidFill>
@@ -4688,6 +4796,24 @@
               <a:latin typeface="Calibri" panose="020F0502020204030204"/>
             </a:endParaRPr>
           </a:p>
+          <a:p>
+            <a:pPr defTabSz="914400"/>
+            <a:r>
+              <a:rPr lang="de-DE" sz="800" kern="0" dirty="0" err="1">
+                <a:solidFill>
+                  <a:prstClr val="black"/>
+                </a:solidFill>
+                <a:latin typeface="Calibri" panose="020F0502020204030204"/>
+              </a:rPr>
+              <a:t>localPort</a:t>
+            </a:r>
+            <a:endParaRPr lang="de-DE" sz="800" kern="0" dirty="0">
+              <a:solidFill>
+                <a:prstClr val="black"/>
+              </a:solidFill>
+              <a:latin typeface="Calibri" panose="020F0502020204030204"/>
+            </a:endParaRPr>
+          </a:p>
         </p:txBody>
       </p:sp>
       <p:cxnSp>
@@ -4764,13 +4890,40 @@
           <a:p>
             <a:pPr defTabSz="914400"/>
             <a:r>
-              <a:rPr lang="de-DE" sz="800" kern="0">
+              <a:rPr lang="de-DE" sz="800" kern="0" dirty="0" err="1">
                 <a:solidFill>
                   <a:prstClr val="black"/>
                 </a:solidFill>
                 <a:latin typeface="Calibri" panose="020F0502020204030204"/>
               </a:rPr>
-              <a:t>local-id=netconfServer</a:t>
+              <a:t>local-id</a:t>
+            </a:r>
+            <a:r>
+              <a:rPr lang="de-DE" sz="800" kern="0" dirty="0">
+                <a:solidFill>
+                  <a:prstClr val="black"/>
+                </a:solidFill>
+                <a:latin typeface="Calibri" panose="020F0502020204030204"/>
+              </a:rPr>
+              <a:t>=</a:t>
+            </a:r>
+            <a:r>
+              <a:rPr lang="de-DE" sz="800" kern="0" dirty="0" err="1">
+                <a:solidFill>
+                  <a:prstClr val="black"/>
+                </a:solidFill>
+                <a:latin typeface="Calibri" panose="020F0502020204030204"/>
+              </a:rPr>
+              <a:t>netconf</a:t>
+            </a:r>
+            <a:r>
+              <a:rPr lang="de-DE" sz="800" kern="0" dirty="0">
+                <a:solidFill>
+                  <a:prstClr val="black"/>
+                </a:solidFill>
+                <a:latin typeface="Calibri" panose="020F0502020204030204"/>
+              </a:rPr>
+              <a:t>-server</a:t>
             </a:r>
           </a:p>
         </p:txBody>
@@ -4849,19 +5002,46 @@
           <a:p>
             <a:pPr defTabSz="914400"/>
             <a:r>
-              <a:rPr lang="de-DE" sz="800" kern="0">
+              <a:rPr lang="de-DE" sz="800" kern="0" dirty="0" err="1">
                 <a:solidFill>
                   <a:prstClr val="black"/>
                 </a:solidFill>
                 <a:latin typeface="Calibri" panose="020F0502020204030204"/>
               </a:rPr>
-              <a:t>local-id=snmpClient</a:t>
+              <a:t>local-id</a:t>
+            </a:r>
+            <a:r>
+              <a:rPr lang="de-DE" sz="800" kern="0" dirty="0">
+                <a:solidFill>
+                  <a:prstClr val="black"/>
+                </a:solidFill>
+                <a:latin typeface="Calibri" panose="020F0502020204030204"/>
+              </a:rPr>
+              <a:t>=</a:t>
+            </a:r>
+            <a:r>
+              <a:rPr lang="de-DE" sz="800" kern="0" dirty="0" err="1">
+                <a:solidFill>
+                  <a:prstClr val="black"/>
+                </a:solidFill>
+                <a:latin typeface="Calibri" panose="020F0502020204030204"/>
+              </a:rPr>
+              <a:t>snmp</a:t>
+            </a:r>
+            <a:r>
+              <a:rPr lang="de-DE" sz="800" kern="0" dirty="0">
+                <a:solidFill>
+                  <a:prstClr val="black"/>
+                </a:solidFill>
+                <a:latin typeface="Calibri" panose="020F0502020204030204"/>
+              </a:rPr>
+              <a:t>-client</a:t>
             </a:r>
           </a:p>
           <a:p>
             <a:pPr defTabSz="914400"/>
             <a:r>
-              <a:rPr lang="de-DE" sz="800" kern="0">
+              <a:rPr lang="de-DE" sz="800" kern="0" dirty="0" err="1">
                 <a:solidFill>
                   <a:prstClr val="black"/>
                 </a:solidFill>
@@ -4869,11 +5049,17 @@
               </a:rPr>
               <a:t>mediatorUserName</a:t>
             </a:r>
+            <a:endParaRPr lang="de-DE" sz="800" kern="0" dirty="0">
+              <a:solidFill>
+                <a:prstClr val="black"/>
+              </a:solidFill>
+              <a:latin typeface="Calibri" panose="020F0502020204030204"/>
+            </a:endParaRPr>
           </a:p>
           <a:p>
             <a:pPr defTabSz="914400"/>
             <a:r>
-              <a:rPr lang="de-DE" sz="800" kern="0">
+              <a:rPr lang="de-DE" sz="800" kern="0" dirty="0" err="1">
                 <a:solidFill>
                   <a:prstClr val="black"/>
                 </a:solidFill>
@@ -4881,10 +5067,16 @@
               </a:rPr>
               <a:t>mediatorUserPassword</a:t>
             </a:r>
+            <a:endParaRPr lang="de-DE" sz="800" kern="0" dirty="0">
+              <a:solidFill>
+                <a:prstClr val="black"/>
+              </a:solidFill>
+              <a:latin typeface="Calibri" panose="020F0502020204030204"/>
+            </a:endParaRPr>
           </a:p>
           <a:p>
             <a:pPr defTabSz="914400"/>
-            <a:endParaRPr lang="de-DE" sz="800" kern="0">
+            <a:endParaRPr lang="de-DE" sz="800" kern="0" dirty="0">
               <a:solidFill>
                 <a:prstClr val="black"/>
               </a:solidFill>
@@ -5214,86 +5406,13 @@
           <a:p>
             <a:pPr defTabSz="914400"/>
             <a:r>
-              <a:rPr lang="de-DE" sz="800" kern="0">
+              <a:rPr lang="de-DE" sz="800" kern="0" dirty="0" err="1">
                 <a:solidFill>
                   <a:prstClr val="black"/>
                 </a:solidFill>
                 <a:latin typeface="Calibri" panose="020F0502020204030204"/>
               </a:rPr>
-              <a:t>local-id=mimOperationServer[N]</a:t>
-            </a:r>
-          </a:p>
-          <a:p>
-            <a:pPr defTabSz="914400"/>
-            <a:r>
-              <a:rPr lang="de-DE" sz="800" kern="0">
-                <a:solidFill>
-                  <a:prstClr val="black"/>
-                </a:solidFill>
-                <a:latin typeface="Calibri" panose="020F0502020204030204"/>
-              </a:rPr>
-              <a:t>operationName</a:t>
-            </a:r>
-          </a:p>
-        </p:txBody>
-      </p:sp>
-      <p:sp>
-        <p:nvSpPr>
-          <p:cNvPr id="154" name="Rechteck 153">
-            <a:extLst>
-              <a:ext uri="{FF2B5EF4-FFF2-40B4-BE49-F238E27FC236}">
-                <a16:creationId xmlns:a16="http://schemas.microsoft.com/office/drawing/2014/main" id="{603038BB-B38F-04CB-CE97-EB1D3BC5A2ED}"/>
-              </a:ext>
-            </a:extLst>
-          </p:cNvPr>
-          <p:cNvSpPr/>
-          <p:nvPr/>
-        </p:nvSpPr>
-        <p:spPr>
-          <a:xfrm>
-            <a:off x="6851185" y="10590534"/>
-            <a:ext cx="1815783" cy="445572"/>
-          </a:xfrm>
-          <a:prstGeom prst="rect">
-            <a:avLst/>
-          </a:prstGeom>
-          <a:solidFill>
-            <a:sysClr val="window" lastClr="FFFFFF"/>
-          </a:solidFill>
-          <a:ln w="12700" cap="flat" cmpd="sng" algn="ctr">
-            <a:solidFill>
-              <a:srgbClr val="A5A5A5"/>
-            </a:solidFill>
-            <a:prstDash val="solid"/>
-            <a:miter lim="800000"/>
-          </a:ln>
-          <a:effectLst/>
-        </p:spPr>
-        <p:txBody>
-          <a:bodyPr lIns="36000" tIns="36000" rIns="36000" bIns="36000" rtlCol="0" anchor="t"/>
-          <a:lstStyle/>
-          <a:p>
-            <a:pPr defTabSz="914400"/>
-            <a:r>
-              <a:rPr lang="de-DE" sz="800" kern="0">
-                <a:solidFill>
-                  <a:prstClr val="black"/>
-                </a:solidFill>
-                <a:latin typeface="Calibri" panose="020F0502020204030204"/>
-              </a:rPr>
-              <a:t>local-id=mimTcpServer</a:t>
-            </a:r>
-          </a:p>
-          <a:p>
-            <a:pPr defTabSz="914400"/>
-            <a:r>
-              <a:rPr lang="de-DE" sz="800" kern="0">
-                <a:solidFill>
-                  <a:prstClr val="black"/>
-                </a:solidFill>
-                <a:latin typeface="Calibri" panose="020F0502020204030204"/>
-              </a:rPr>
-              <a:t>localIpAddress</a:t>
+              <a:t>local-id</a:t>
             </a:r>
             <a:endParaRPr lang="de-DE" sz="800" kern="0" dirty="0">
               <a:solidFill>
@@ -5305,13 +5424,13 @@
           <a:p>
             <a:pPr defTabSz="914400"/>
             <a:r>
-              <a:rPr lang="de-DE" sz="800" kern="0">
+              <a:rPr lang="de-DE" sz="800" kern="0" dirty="0" err="1">
                 <a:solidFill>
                   <a:prstClr val="black"/>
                 </a:solidFill>
                 <a:latin typeface="Calibri" panose="020F0502020204030204"/>
               </a:rPr>
-              <a:t>localPort</a:t>
+              <a:t>operationName</a:t>
             </a:r>
             <a:endParaRPr lang="de-DE" sz="800" kern="0" dirty="0">
               <a:solidFill>
@@ -5322,6 +5441,118 @@
           </a:p>
         </p:txBody>
       </p:sp>
+      <p:sp>
+        <p:nvSpPr>
+          <p:cNvPr id="154" name="Rechteck 153">
+            <a:extLst>
+              <a:ext uri="{FF2B5EF4-FFF2-40B4-BE49-F238E27FC236}">
+                <a16:creationId xmlns:a16="http://schemas.microsoft.com/office/drawing/2014/main" id="{603038BB-B38F-04CB-CE97-EB1D3BC5A2ED}"/>
+              </a:ext>
+            </a:extLst>
+          </p:cNvPr>
+          <p:cNvSpPr/>
+          <p:nvPr/>
+        </p:nvSpPr>
+        <p:spPr>
+          <a:xfrm>
+            <a:off x="6851185" y="10590534"/>
+            <a:ext cx="1815783" cy="445572"/>
+          </a:xfrm>
+          <a:prstGeom prst="rect">
+            <a:avLst/>
+          </a:prstGeom>
+          <a:solidFill>
+            <a:sysClr val="window" lastClr="FFFFFF"/>
+          </a:solidFill>
+          <a:ln w="12700" cap="flat" cmpd="sng" algn="ctr">
+            <a:solidFill>
+              <a:srgbClr val="A5A5A5"/>
+            </a:solidFill>
+            <a:prstDash val="solid"/>
+            <a:miter lim="800000"/>
+          </a:ln>
+          <a:effectLst/>
+        </p:spPr>
+        <p:txBody>
+          <a:bodyPr lIns="36000" tIns="36000" rIns="36000" bIns="36000" rtlCol="0" anchor="t"/>
+          <a:lstStyle/>
+          <a:p>
+            <a:pPr defTabSz="914400"/>
+            <a:r>
+              <a:rPr lang="de-DE" sz="800" kern="0" dirty="0" err="1">
+                <a:solidFill>
+                  <a:prstClr val="black"/>
+                </a:solidFill>
+                <a:latin typeface="Calibri" panose="020F0502020204030204"/>
+              </a:rPr>
+              <a:t>local-id</a:t>
+            </a:r>
+            <a:r>
+              <a:rPr lang="de-DE" sz="800" kern="0" dirty="0">
+                <a:solidFill>
+                  <a:prstClr val="black"/>
+                </a:solidFill>
+                <a:latin typeface="Calibri" panose="020F0502020204030204"/>
+              </a:rPr>
+              <a:t>=</a:t>
+            </a:r>
+            <a:r>
+              <a:rPr lang="de-DE" sz="800" kern="0" dirty="0" err="1">
+                <a:solidFill>
+                  <a:prstClr val="black"/>
+                </a:solidFill>
+                <a:latin typeface="Calibri" panose="020F0502020204030204"/>
+              </a:rPr>
+              <a:t>tcp</a:t>
+            </a:r>
+            <a:r>
+              <a:rPr lang="de-DE" sz="800" kern="0" dirty="0">
+                <a:solidFill>
+                  <a:prstClr val="black"/>
+                </a:solidFill>
+                <a:latin typeface="Calibri" panose="020F0502020204030204"/>
+              </a:rPr>
+              <a:t>-server</a:t>
+            </a:r>
+          </a:p>
+          <a:p>
+            <a:pPr defTabSz="914400"/>
+            <a:r>
+              <a:rPr lang="de-DE" sz="800" kern="0" dirty="0" err="1">
+                <a:solidFill>
+                  <a:prstClr val="black"/>
+                </a:solidFill>
+                <a:latin typeface="Calibri" panose="020F0502020204030204"/>
+              </a:rPr>
+              <a:t>localIpAddress</a:t>
+            </a:r>
+            <a:endParaRPr lang="de-DE" sz="800" kern="0" dirty="0">
+              <a:solidFill>
+                <a:prstClr val="black"/>
+              </a:solidFill>
+              <a:latin typeface="Calibri" panose="020F0502020204030204"/>
+            </a:endParaRPr>
+          </a:p>
+          <a:p>
+            <a:pPr defTabSz="914400"/>
+            <a:r>
+              <a:rPr lang="de-DE" sz="800" kern="0" dirty="0" err="1">
+                <a:solidFill>
+                  <a:prstClr val="black"/>
+                </a:solidFill>
+                <a:latin typeface="Calibri" panose="020F0502020204030204"/>
+              </a:rPr>
+              <a:t>localPort</a:t>
+            </a:r>
+            <a:endParaRPr lang="de-DE" sz="800" kern="0" dirty="0">
+              <a:solidFill>
+                <a:prstClr val="black"/>
+              </a:solidFill>
+              <a:latin typeface="Calibri" panose="020F0502020204030204"/>
+            </a:endParaRPr>
+          </a:p>
+        </p:txBody>
+      </p:sp>
       <p:cxnSp>
         <p:nvCxnSpPr>
           <p:cNvPr id="155" name="Gerade Verbindung mit Pfeil 154">
@@ -5396,19 +5627,28 @@
           <a:p>
             <a:pPr defTabSz="914400"/>
             <a:r>
-              <a:rPr lang="de-DE" sz="800" kern="0">
+              <a:rPr lang="de-DE" sz="800" kern="0" dirty="0" err="1">
                 <a:solidFill>
                   <a:prstClr val="black"/>
                 </a:solidFill>
                 <a:latin typeface="Calibri" panose="020F0502020204030204"/>
               </a:rPr>
-              <a:t>local-id=mimHttpServer</a:t>
+              <a:t>local-id</a:t>
+            </a:r>
+            <a:r>
+              <a:rPr lang="de-DE" sz="800" kern="0" dirty="0">
+                <a:solidFill>
+                  <a:prstClr val="black"/>
+                </a:solidFill>
+                <a:latin typeface="Calibri" panose="020F0502020204030204"/>
+              </a:rPr>
+              <a:t>=http-server</a:t>
             </a:r>
           </a:p>
           <a:p>
             <a:pPr defTabSz="914400"/>
             <a:r>
-              <a:rPr lang="de-DE" sz="800" kern="0">
+              <a:rPr lang="de-DE" sz="800" kern="0" dirty="0" err="1">
                 <a:solidFill>
                   <a:prstClr val="black"/>
                 </a:solidFill>
@@ -5416,11 +5656,17 @@
               </a:rPr>
               <a:t>mediatorUserName</a:t>
             </a:r>
+            <a:endParaRPr lang="de-DE" sz="800" kern="0" dirty="0">
+              <a:solidFill>
+                <a:prstClr val="black"/>
+              </a:solidFill>
+              <a:latin typeface="Calibri" panose="020F0502020204030204"/>
+            </a:endParaRPr>
           </a:p>
           <a:p>
             <a:pPr defTabSz="914400"/>
             <a:r>
-              <a:rPr lang="de-DE" sz="800" kern="0">
+              <a:rPr lang="de-DE" sz="800" kern="0" dirty="0" err="1">
                 <a:solidFill>
                   <a:prstClr val="black"/>
                 </a:solidFill>
@@ -5428,6 +5674,12 @@
               </a:rPr>
               <a:t>mediatorUserPassword</a:t>
             </a:r>
+            <a:endParaRPr lang="de-DE" sz="800" kern="0" dirty="0">
+              <a:solidFill>
+                <a:prstClr val="black"/>
+              </a:solidFill>
+              <a:latin typeface="Calibri" panose="020F0502020204030204"/>
+            </a:endParaRPr>
           </a:p>
         </p:txBody>
       </p:sp>
@@ -5541,42 +5793,117 @@
           <a:p>
             <a:pPr defTabSz="914400"/>
             <a:r>
-              <a:rPr lang="de-DE" sz="800" kern="0">
+              <a:rPr lang="de-DE" sz="800" kern="0" dirty="0">
                 <a:solidFill>
                   <a:prstClr val="black"/>
                 </a:solidFill>
                 <a:latin typeface="Calibri" panose="020F0502020204030204"/>
               </a:rPr>
-              <a:t>local-id=[mediatorVmName]</a:t>
+              <a:t>element-name=[</a:t>
+            </a:r>
+            <a:r>
+              <a:rPr lang="de-DE" sz="800" kern="0" dirty="0" err="1">
+                <a:solidFill>
+                  <a:prstClr val="black"/>
+                </a:solidFill>
+                <a:latin typeface="Calibri" panose="020F0502020204030204"/>
+              </a:rPr>
+              <a:t>mediatorVmName</a:t>
+            </a:r>
+            <a:r>
+              <a:rPr lang="de-DE" sz="800" kern="0" dirty="0">
+                <a:solidFill>
+                  <a:prstClr val="black"/>
+                </a:solidFill>
+                <a:latin typeface="Calibri" panose="020F0502020204030204"/>
+              </a:rPr>
+              <a:t>]</a:t>
             </a:r>
           </a:p>
           <a:p>
             <a:pPr defTabSz="914400"/>
             <a:r>
-              <a:rPr lang="de-DE" sz="800" kern="0">
+              <a:rPr lang="de-DE" sz="800" kern="0" dirty="0" err="1">
                 <a:solidFill>
                   <a:prstClr val="black"/>
                 </a:solidFill>
                 <a:latin typeface="Calibri" panose="020F0502020204030204"/>
               </a:rPr>
-              <a:t>category=mediatorVm</a:t>
-            </a:r>
+              <a:t>category</a:t>
+            </a:r>
+            <a:r>
+              <a:rPr lang="de-DE" sz="800" kern="0" dirty="0">
+                <a:solidFill>
+                  <a:prstClr val="black"/>
+                </a:solidFill>
+                <a:latin typeface="Calibri" panose="020F0502020204030204"/>
+              </a:rPr>
+              <a:t>=</a:t>
+            </a:r>
+            <a:r>
+              <a:rPr lang="de-DE" sz="800" kern="0" dirty="0" err="1">
+                <a:solidFill>
+                  <a:prstClr val="black"/>
+                </a:solidFill>
+                <a:latin typeface="Calibri" panose="020F0502020204030204"/>
+              </a:rPr>
+              <a:t>mediatorVm</a:t>
+            </a:r>
+            <a:endParaRPr lang="de-DE" sz="800" kern="0" dirty="0">
+              <a:solidFill>
+                <a:prstClr val="black"/>
+              </a:solidFill>
+              <a:latin typeface="Calibri" panose="020F0502020204030204"/>
+            </a:endParaRPr>
           </a:p>
           <a:p>
             <a:pPr defTabSz="914400"/>
             <a:r>
-              <a:rPr lang="de-DE" sz="800" kern="0">
+              <a:rPr lang="de-DE" sz="800" kern="0" dirty="0">
                 <a:solidFill>
                   <a:prstClr val="black"/>
                 </a:solidFill>
                 <a:latin typeface="Calibri" panose="020F0502020204030204"/>
               </a:rPr>
-              <a:t>_template= mediatorVmTemplateName</a:t>
-            </a:r>
+              <a:t>_</a:t>
+            </a:r>
+            <a:r>
+              <a:rPr lang="de-DE" sz="800" kern="0" dirty="0" err="1">
+                <a:solidFill>
+                  <a:prstClr val="black"/>
+                </a:solidFill>
+                <a:latin typeface="Calibri" panose="020F0502020204030204"/>
+              </a:rPr>
+              <a:t>template</a:t>
+            </a:r>
+            <a:r>
+              <a:rPr lang="de-DE" sz="800" kern="0" dirty="0">
+                <a:solidFill>
+                  <a:prstClr val="black"/>
+                </a:solidFill>
+                <a:latin typeface="Calibri" panose="020F0502020204030204"/>
+              </a:rPr>
+              <a:t>= </a:t>
+            </a:r>
+            <a:r>
+              <a:rPr lang="de-DE" sz="800" kern="0" dirty="0" err="1">
+                <a:solidFill>
+                  <a:prstClr val="black"/>
+                </a:solidFill>
+                <a:latin typeface="Calibri" panose="020F0502020204030204"/>
+              </a:rPr>
+              <a:t>mediatorVmTemplateName</a:t>
+            </a:r>
+            <a:endParaRPr lang="de-DE" sz="800" kern="0" dirty="0">
+              <a:solidFill>
+                <a:prstClr val="black"/>
+              </a:solidFill>
+              <a:latin typeface="Calibri" panose="020F0502020204030204"/>
+            </a:endParaRPr>
           </a:p>
           <a:p>
             <a:pPr defTabSz="914400"/>
-            <a:endParaRPr lang="de-DE" sz="800" kern="0">
+            <a:endParaRPr lang="de-DE" sz="800" kern="0" dirty="0">
               <a:solidFill>
                 <a:prstClr val="black"/>
               </a:solidFill>
@@ -5880,37 +6207,52 @@
           <a:p>
             <a:pPr defTabSz="914400"/>
             <a:r>
-              <a:rPr lang="de-DE" sz="800" kern="0">
+              <a:rPr lang="de-DE" sz="800" kern="0" dirty="0" err="1">
                 <a:solidFill>
                   <a:prstClr val="black"/>
                 </a:solidFill>
                 <a:latin typeface="Calibri" panose="020F0502020204030204"/>
               </a:rPr>
-              <a:t>local-id=tcpServer</a:t>
+              <a:t>local-id</a:t>
+            </a:r>
+            <a:r>
+              <a:rPr lang="de-DE" sz="800" kern="0" dirty="0">
+                <a:solidFill>
+                  <a:prstClr val="black"/>
+                </a:solidFill>
+                <a:latin typeface="Calibri" panose="020F0502020204030204"/>
+              </a:rPr>
+              <a:t>=</a:t>
+            </a:r>
+            <a:r>
+              <a:rPr lang="de-DE" sz="800" kern="0" dirty="0" err="1">
+                <a:solidFill>
+                  <a:prstClr val="black"/>
+                </a:solidFill>
+                <a:latin typeface="Calibri" panose="020F0502020204030204"/>
+              </a:rPr>
+              <a:t>tcp</a:t>
+            </a:r>
+            <a:r>
+              <a:rPr lang="de-DE" sz="800" kern="0" dirty="0">
+                <a:solidFill>
+                  <a:prstClr val="black"/>
+                </a:solidFill>
+                <a:latin typeface="Calibri" panose="020F0502020204030204"/>
+              </a:rPr>
+              <a:t>-server</a:t>
             </a:r>
           </a:p>
           <a:p>
             <a:pPr defTabSz="914400"/>
             <a:r>
-              <a:rPr lang="de-DE" sz="800" kern="0">
+              <a:rPr lang="de-DE" sz="800" kern="0" dirty="0" err="1">
                 <a:solidFill>
                   <a:prstClr val="black"/>
                 </a:solidFill>
                 <a:latin typeface="Calibri" panose="020F0502020204030204"/>
               </a:rPr>
               <a:t>localIpAddress</a:t>
-            </a:r>
-          </a:p>
-          <a:p>
-            <a:pPr defTabSz="914400"/>
-            <a:r>
-              <a:rPr lang="de-DE" sz="800" kern="0">
-                <a:solidFill>
-                  <a:prstClr val="black"/>
-                </a:solidFill>
-                <a:latin typeface="Calibri" panose="020F0502020204030204"/>
-              </a:rPr>
-              <a:t>localPort</a:t>
             </a:r>
             <a:endParaRPr lang="de-DE" sz="800" kern="0" dirty="0">
               <a:solidFill>
@@ -5919,115 +6261,16 @@
               <a:latin typeface="Calibri" panose="020F0502020204030204"/>
             </a:endParaRPr>
           </a:p>
-        </p:txBody>
-      </p:sp>
-      <p:cxnSp>
-        <p:nvCxnSpPr>
-          <p:cNvPr id="231" name="Gerade Verbindung mit Pfeil 230">
-            <a:extLst>
-              <a:ext uri="{FF2B5EF4-FFF2-40B4-BE49-F238E27FC236}">
-                <a16:creationId xmlns:a16="http://schemas.microsoft.com/office/drawing/2014/main" id="{E2AA1378-2624-C82E-46F5-DAE3598C92F9}"/>
-              </a:ext>
-            </a:extLst>
-          </p:cNvPr>
-          <p:cNvCxnSpPr>
-            <a:cxnSpLocks/>
-            <a:stCxn id="222" idx="1"/>
-            <a:endCxn id="230" idx="3"/>
-          </p:cNvCxnSpPr>
-          <p:nvPr/>
-        </p:nvCxnSpPr>
-        <p:spPr>
-          <a:xfrm flipH="1">
-            <a:off x="18992101" y="13711746"/>
-            <a:ext cx="573605" cy="9241"/>
-          </a:xfrm>
-          <a:prstGeom prst="straightConnector1">
-            <a:avLst/>
-          </a:prstGeom>
-          <a:noFill/>
-          <a:ln w="6350" cap="flat" cmpd="sng" algn="ctr">
-            <a:solidFill>
-              <a:srgbClr val="5B9BD5"/>
-            </a:solidFill>
-            <a:prstDash val="solid"/>
-            <a:miter lim="800000"/>
-            <a:tailEnd type="triangle"/>
-          </a:ln>
-          <a:effectLst/>
-        </p:spPr>
-      </p:cxnSp>
-      <p:sp>
-        <p:nvSpPr>
-          <p:cNvPr id="232" name="Rechteck 231">
-            <a:extLst>
-              <a:ext uri="{FF2B5EF4-FFF2-40B4-BE49-F238E27FC236}">
-                <a16:creationId xmlns:a16="http://schemas.microsoft.com/office/drawing/2014/main" id="{D24AFCEE-3415-2633-C02F-42F690432881}"/>
-              </a:ext>
-            </a:extLst>
-          </p:cNvPr>
-          <p:cNvSpPr/>
-          <p:nvPr/>
-        </p:nvSpPr>
-        <p:spPr>
-          <a:xfrm>
-            <a:off x="17566269" y="12736077"/>
-            <a:ext cx="1425832" cy="479569"/>
-          </a:xfrm>
-          <a:prstGeom prst="rect">
-            <a:avLst/>
-          </a:prstGeom>
-          <a:solidFill>
-            <a:sysClr val="window" lastClr="FFFFFF"/>
-          </a:solidFill>
-          <a:ln w="12700" cap="flat" cmpd="sng" algn="ctr">
-            <a:solidFill>
-              <a:srgbClr val="A5A5A5"/>
-            </a:solidFill>
-            <a:prstDash val="solid"/>
-            <a:miter lim="800000"/>
-          </a:ln>
-          <a:effectLst/>
-        </p:spPr>
-        <p:txBody>
-          <a:bodyPr lIns="36000" tIns="36000" rIns="36000" bIns="36000" rtlCol="0" anchor="t"/>
-          <a:lstStyle/>
-          <a:p>
-            <a:pPr defTabSz="914400">
-              <a:defRPr/>
-            </a:pPr>
-            <a:r>
-              <a:rPr lang="de-DE" sz="800" kern="0">
+          <a:p>
+            <a:pPr defTabSz="914400"/>
+            <a:r>
+              <a:rPr lang="de-DE" sz="800" kern="0" dirty="0" err="1">
                 <a:solidFill>
                   <a:prstClr val="black"/>
                 </a:solidFill>
                 <a:latin typeface="Calibri" panose="020F0502020204030204"/>
               </a:rPr>
-              <a:t>local-id=[mediatorUserName]</a:t>
-            </a:r>
-          </a:p>
-          <a:p>
-            <a:pPr defTabSz="914400"/>
-            <a:r>
-              <a:rPr lang="de-DE" sz="800" kern="0">
-                <a:solidFill>
-                  <a:prstClr val="black"/>
-                </a:solidFill>
-                <a:latin typeface="Calibri" panose="020F0502020204030204"/>
-              </a:rPr>
-              <a:t>mediatorUserName</a:t>
-            </a:r>
-          </a:p>
-          <a:p>
-            <a:pPr defTabSz="914400"/>
-            <a:r>
-              <a:rPr lang="de-DE" sz="800" kern="0">
-                <a:solidFill>
-                  <a:prstClr val="black"/>
-                </a:solidFill>
-                <a:latin typeface="Calibri" panose="020F0502020204030204"/>
-              </a:rPr>
-              <a:t>mediatorUserPassword</a:t>
+              <a:t>localPort</a:t>
             </a:r>
             <a:endParaRPr lang="de-DE" sz="800" kern="0" dirty="0">
               <a:solidFill>
@@ -6040,6 +6283,123 @@
       </p:sp>
       <p:cxnSp>
         <p:nvCxnSpPr>
+          <p:cNvPr id="231" name="Gerade Verbindung mit Pfeil 230">
+            <a:extLst>
+              <a:ext uri="{FF2B5EF4-FFF2-40B4-BE49-F238E27FC236}">
+                <a16:creationId xmlns:a16="http://schemas.microsoft.com/office/drawing/2014/main" id="{E2AA1378-2624-C82E-46F5-DAE3598C92F9}"/>
+              </a:ext>
+            </a:extLst>
+          </p:cNvPr>
+          <p:cNvCxnSpPr>
+            <a:cxnSpLocks/>
+            <a:stCxn id="222" idx="1"/>
+            <a:endCxn id="230" idx="3"/>
+          </p:cNvCxnSpPr>
+          <p:nvPr/>
+        </p:nvCxnSpPr>
+        <p:spPr>
+          <a:xfrm flipH="1">
+            <a:off x="18992101" y="13711746"/>
+            <a:ext cx="573605" cy="9241"/>
+          </a:xfrm>
+          <a:prstGeom prst="straightConnector1">
+            <a:avLst/>
+          </a:prstGeom>
+          <a:noFill/>
+          <a:ln w="6350" cap="flat" cmpd="sng" algn="ctr">
+            <a:solidFill>
+              <a:srgbClr val="5B9BD5"/>
+            </a:solidFill>
+            <a:prstDash val="solid"/>
+            <a:miter lim="800000"/>
+            <a:tailEnd type="triangle"/>
+          </a:ln>
+          <a:effectLst/>
+        </p:spPr>
+      </p:cxnSp>
+      <p:sp>
+        <p:nvSpPr>
+          <p:cNvPr id="232" name="Rechteck 231">
+            <a:extLst>
+              <a:ext uri="{FF2B5EF4-FFF2-40B4-BE49-F238E27FC236}">
+                <a16:creationId xmlns:a16="http://schemas.microsoft.com/office/drawing/2014/main" id="{D24AFCEE-3415-2633-C02F-42F690432881}"/>
+              </a:ext>
+            </a:extLst>
+          </p:cNvPr>
+          <p:cNvSpPr/>
+          <p:nvPr/>
+        </p:nvSpPr>
+        <p:spPr>
+          <a:xfrm>
+            <a:off x="17566269" y="12736077"/>
+            <a:ext cx="1425832" cy="479569"/>
+          </a:xfrm>
+          <a:prstGeom prst="rect">
+            <a:avLst/>
+          </a:prstGeom>
+          <a:solidFill>
+            <a:sysClr val="window" lastClr="FFFFFF"/>
+          </a:solidFill>
+          <a:ln w="12700" cap="flat" cmpd="sng" algn="ctr">
+            <a:solidFill>
+              <a:srgbClr val="A5A5A5"/>
+            </a:solidFill>
+            <a:prstDash val="solid"/>
+            <a:miter lim="800000"/>
+          </a:ln>
+          <a:effectLst/>
+        </p:spPr>
+        <p:txBody>
+          <a:bodyPr lIns="36000" tIns="36000" rIns="36000" bIns="36000" rtlCol="0" anchor="t"/>
+          <a:lstStyle/>
+          <a:p>
+            <a:pPr defTabSz="914400">
+              <a:defRPr/>
+            </a:pPr>
+            <a:r>
+              <a:rPr lang="de-DE" sz="800" kern="0">
+                <a:solidFill>
+                  <a:prstClr val="black"/>
+                </a:solidFill>
+                <a:latin typeface="Calibri" panose="020F0502020204030204"/>
+              </a:rPr>
+              <a:t>local-id=[mediatorUserName]</a:t>
+            </a:r>
+          </a:p>
+          <a:p>
+            <a:pPr defTabSz="914400"/>
+            <a:r>
+              <a:rPr lang="de-DE" sz="800" kern="0">
+                <a:solidFill>
+                  <a:prstClr val="black"/>
+                </a:solidFill>
+                <a:latin typeface="Calibri" panose="020F0502020204030204"/>
+              </a:rPr>
+              <a:t>mediatorUserName</a:t>
+            </a:r>
+          </a:p>
+          <a:p>
+            <a:pPr defTabSz="914400"/>
+            <a:r>
+              <a:rPr lang="de-DE" sz="800" kern="0">
+                <a:solidFill>
+                  <a:prstClr val="black"/>
+                </a:solidFill>
+                <a:latin typeface="Calibri" panose="020F0502020204030204"/>
+              </a:rPr>
+              <a:t>mediatorUserPassword</a:t>
+            </a:r>
+            <a:endParaRPr lang="de-DE" sz="800" kern="0" dirty="0">
+              <a:solidFill>
+                <a:prstClr val="black"/>
+              </a:solidFill>
+              <a:latin typeface="Calibri" panose="020F0502020204030204"/>
+            </a:endParaRPr>
+          </a:p>
+        </p:txBody>
+      </p:sp>
+      <p:cxnSp>
+        <p:nvCxnSpPr>
           <p:cNvPr id="235" name="Gerade Verbindung mit Pfeil 234">
             <a:extLst>
               <a:ext uri="{FF2B5EF4-FFF2-40B4-BE49-F238E27FC236}">
@@ -6112,42 +6472,63 @@
           <a:p>
             <a:pPr defTabSz="914400"/>
             <a:r>
-              <a:rPr lang="de-DE" sz="800" kern="0">
+              <a:rPr lang="de-DE" sz="800" kern="0" dirty="0">
                 <a:solidFill>
                   <a:prstClr val="black"/>
                 </a:solidFill>
                 <a:latin typeface="Calibri" panose="020F0502020204030204"/>
               </a:rPr>
-              <a:t>local-id=[deviceName]</a:t>
+              <a:t>element-name=[</a:t>
+            </a:r>
+            <a:r>
+              <a:rPr lang="de-DE" sz="800" kern="0" dirty="0" err="1">
+                <a:solidFill>
+                  <a:prstClr val="black"/>
+                </a:solidFill>
+                <a:latin typeface="Calibri" panose="020F0502020204030204"/>
+              </a:rPr>
+              <a:t>deviceName</a:t>
+            </a:r>
+            <a:r>
+              <a:rPr lang="de-DE" sz="800" kern="0" dirty="0">
+                <a:solidFill>
+                  <a:prstClr val="black"/>
+                </a:solidFill>
+                <a:latin typeface="Calibri" panose="020F0502020204030204"/>
+              </a:rPr>
+              <a:t>]</a:t>
             </a:r>
           </a:p>
           <a:p>
             <a:pPr defTabSz="914400"/>
             <a:r>
-              <a:rPr lang="de-DE" sz="800" kern="0">
+              <a:rPr lang="de-DE" sz="800" kern="0" dirty="0" err="1">
                 <a:solidFill>
                   <a:prstClr val="black"/>
                 </a:solidFill>
                 <a:latin typeface="Calibri" panose="020F0502020204030204"/>
               </a:rPr>
-              <a:t>category=device</a:t>
-            </a:r>
-          </a:p>
-          <a:p>
-            <a:pPr defTabSz="914400"/>
-            <a:r>
-              <a:rPr lang="de-DE" sz="800" kern="0">
+              <a:t>category</a:t>
+            </a:r>
+            <a:r>
+              <a:rPr lang="de-DE" sz="800" kern="0" dirty="0">
                 <a:solidFill>
                   <a:prstClr val="black"/>
                 </a:solidFill>
                 <a:latin typeface="Calibri" panose="020F0502020204030204"/>
               </a:rPr>
-              <a:t>_template=deviceTemplateName</a:t>
-            </a:r>
-          </a:p>
-          <a:p>
-            <a:pPr defTabSz="914400"/>
-            <a:endParaRPr lang="de-DE" sz="800" kern="0">
+              <a:t>=</a:t>
+            </a:r>
+            <a:r>
+              <a:rPr lang="de-DE" sz="800" kern="0" dirty="0" err="1">
+                <a:solidFill>
+                  <a:prstClr val="black"/>
+                </a:solidFill>
+                <a:latin typeface="Calibri" panose="020F0502020204030204"/>
+              </a:rPr>
+              <a:t>device</a:t>
+            </a:r>
+            <a:endParaRPr lang="de-DE" sz="800" kern="0" dirty="0">
               <a:solidFill>
                 <a:prstClr val="black"/>
               </a:solidFill>
@@ -6156,7 +6537,61 @@
           </a:p>
           <a:p>
             <a:pPr defTabSz="914400"/>
-            <a:endParaRPr lang="de-DE" sz="800" kern="0">
+            <a:r>
+              <a:rPr lang="de-DE" sz="800" kern="0" dirty="0">
+                <a:solidFill>
+                  <a:prstClr val="black"/>
+                </a:solidFill>
+                <a:latin typeface="Calibri" panose="020F0502020204030204"/>
+              </a:rPr>
+              <a:t>_</a:t>
+            </a:r>
+            <a:r>
+              <a:rPr lang="de-DE" sz="800" kern="0" dirty="0" err="1">
+                <a:solidFill>
+                  <a:prstClr val="black"/>
+                </a:solidFill>
+                <a:latin typeface="Calibri" panose="020F0502020204030204"/>
+              </a:rPr>
+              <a:t>template</a:t>
+            </a:r>
+            <a:r>
+              <a:rPr lang="de-DE" sz="800" kern="0" dirty="0">
+                <a:solidFill>
+                  <a:prstClr val="black"/>
+                </a:solidFill>
+                <a:latin typeface="Calibri" panose="020F0502020204030204"/>
+              </a:rPr>
+              <a:t>=</a:t>
+            </a:r>
+            <a:r>
+              <a:rPr lang="de-DE" sz="800" kern="0" dirty="0" err="1">
+                <a:solidFill>
+                  <a:prstClr val="black"/>
+                </a:solidFill>
+                <a:latin typeface="Calibri" panose="020F0502020204030204"/>
+              </a:rPr>
+              <a:t>deviceTemplateName</a:t>
+            </a:r>
+            <a:endParaRPr lang="de-DE" sz="800" kern="0" dirty="0">
+              <a:solidFill>
+                <a:prstClr val="black"/>
+              </a:solidFill>
+              <a:latin typeface="Calibri" panose="020F0502020204030204"/>
+            </a:endParaRPr>
+          </a:p>
+          <a:p>
+            <a:pPr defTabSz="914400"/>
+            <a:endParaRPr lang="de-DE" sz="800" kern="0" dirty="0">
+              <a:solidFill>
+                <a:prstClr val="black"/>
+              </a:solidFill>
+              <a:latin typeface="Calibri" panose="020F0502020204030204"/>
+            </a:endParaRPr>
+          </a:p>
+          <a:p>
+            <a:pPr defTabSz="914400"/>
+            <a:endParaRPr lang="de-DE" sz="800" kern="0" dirty="0">
               <a:solidFill>
                 <a:prstClr val="black"/>
               </a:solidFill>
@@ -7440,8 +7875,8 @@
         </p:nvSpPr>
         <p:spPr>
           <a:xfrm>
-            <a:off x="12358907" y="5854380"/>
-            <a:ext cx="1703846" cy="310594"/>
+            <a:off x="12387482" y="5844855"/>
+            <a:ext cx="2528668" cy="310594"/>
           </a:xfrm>
           <a:prstGeom prst="rect">
             <a:avLst/>
@@ -7464,13 +7899,58 @@
           <a:p>
             <a:pPr defTabSz="914400"/>
             <a:r>
-              <a:rPr lang="de-DE" sz="800" kern="0">
+              <a:rPr lang="de-DE" sz="800" kern="0" dirty="0" err="1">
                 <a:solidFill>
                   <a:prstClr val="black"/>
                 </a:solidFill>
                 <a:latin typeface="Calibri" panose="020F0502020204030204"/>
               </a:rPr>
-              <a:t>local-id=[deviceName]</a:t>
+              <a:t>forwarding</a:t>
+            </a:r>
+            <a:r>
+              <a:rPr lang="de-DE" sz="800" kern="0" dirty="0">
+                <a:solidFill>
+                  <a:prstClr val="black"/>
+                </a:solidFill>
+                <a:latin typeface="Calibri" panose="020F0502020204030204"/>
+              </a:rPr>
+              <a:t>-</a:t>
+            </a:r>
+            <a:r>
+              <a:rPr lang="de-DE" sz="800" kern="0" dirty="0" err="1">
+                <a:solidFill>
+                  <a:prstClr val="black"/>
+                </a:solidFill>
+                <a:latin typeface="Calibri" panose="020F0502020204030204"/>
+              </a:rPr>
+              <a:t>construct</a:t>
+            </a:r>
+            <a:r>
+              <a:rPr lang="de-DE" sz="800" kern="0" dirty="0">
+                <a:solidFill>
+                  <a:prstClr val="black"/>
+                </a:solidFill>
+                <a:latin typeface="Calibri" panose="020F0502020204030204"/>
+              </a:rPr>
+              <a:t>-name =[</a:t>
+            </a:r>
+            <a:r>
+              <a:rPr lang="de-DE" sz="800" kern="0" dirty="0" err="1">
+                <a:solidFill>
+                  <a:prstClr val="black"/>
+                </a:solidFill>
+                <a:latin typeface="Calibri" panose="020F0502020204030204"/>
+              </a:rPr>
+              <a:t>deviceName</a:t>
+            </a:r>
+            <a:r>
+              <a:rPr lang="de-DE" sz="800" kern="0" dirty="0">
+                <a:solidFill>
+                  <a:prstClr val="black"/>
+                </a:solidFill>
+                <a:latin typeface="Calibri" panose="020F0502020204030204"/>
+              </a:rPr>
+              <a:t>]</a:t>
             </a:r>
           </a:p>
         </p:txBody>
@@ -7494,7 +7974,7 @@
         <p:spPr>
           <a:xfrm>
             <a:off x="11382119" y="5794854"/>
-            <a:ext cx="976788" cy="214823"/>
+            <a:ext cx="1005363" cy="205298"/>
           </a:xfrm>
           <a:prstGeom prst="straightConnector1">
             <a:avLst/>
@@ -7526,7 +8006,7 @@
         <p:spPr>
           <a:xfrm>
             <a:off x="12354266" y="4728077"/>
-            <a:ext cx="1713783" cy="336074"/>
+            <a:ext cx="2561884" cy="336074"/>
           </a:xfrm>
           <a:prstGeom prst="rect">
             <a:avLst/>
@@ -7549,13 +8029,22 @@
           <a:p>
             <a:pPr defTabSz="914400"/>
             <a:r>
-              <a:rPr lang="de-DE" sz="800" kern="0">
+              <a:rPr lang="de-DE" sz="800" kern="0" dirty="0" err="1">
                 <a:solidFill>
                   <a:prstClr val="black"/>
                 </a:solidFill>
                 <a:latin typeface="Calibri" panose="020F0502020204030204"/>
               </a:rPr>
-              <a:t>local-id=management-plane-transport</a:t>
+              <a:t>forwarding</a:t>
+            </a:r>
+            <a:r>
+              <a:rPr lang="de-DE" sz="800" kern="0" dirty="0">
+                <a:solidFill>
+                  <a:prstClr val="black"/>
+                </a:solidFill>
+                <a:latin typeface="Calibri" panose="020F0502020204030204"/>
+              </a:rPr>
+              <a:t>-domain-name =management-plane-transport</a:t>
             </a:r>
           </a:p>
         </p:txBody>
@@ -7670,13 +8159,31 @@
               <a:defRPr/>
             </a:pPr>
             <a:r>
-              <a:rPr lang="de-DE" sz="800" kern="0">
+              <a:rPr lang="de-DE" sz="800" kern="0" dirty="0">
                 <a:solidFill>
                   <a:prstClr val="black"/>
                 </a:solidFill>
                 <a:latin typeface="Calibri" panose="020F0502020204030204"/>
               </a:rPr>
-              <a:t>local-id=[controllerName]</a:t>
+              <a:t>element-name=[</a:t>
+            </a:r>
+            <a:r>
+              <a:rPr lang="de-DE" sz="800" kern="0" dirty="0" err="1">
+                <a:solidFill>
+                  <a:prstClr val="black"/>
+                </a:solidFill>
+                <a:latin typeface="Calibri" panose="020F0502020204030204"/>
+              </a:rPr>
+              <a:t>controllerName</a:t>
+            </a:r>
+            <a:r>
+              <a:rPr lang="de-DE" sz="800" kern="0" dirty="0">
+                <a:solidFill>
+                  <a:prstClr val="black"/>
+                </a:solidFill>
+                <a:latin typeface="Calibri" panose="020F0502020204030204"/>
+              </a:rPr>
+              <a:t>]</a:t>
             </a:r>
           </a:p>
           <a:p>
@@ -7684,28 +8191,85 @@
               <a:defRPr/>
             </a:pPr>
             <a:r>
-              <a:rPr lang="de-DE" sz="800" kern="0">
+              <a:rPr lang="de-DE" sz="800" kern="0" dirty="0" err="1">
                 <a:solidFill>
                   <a:prstClr val="black"/>
                 </a:solidFill>
                 <a:latin typeface="Calibri" panose="020F0502020204030204"/>
               </a:rPr>
-              <a:t>category=controller</a:t>
-            </a:r>
+              <a:t>category</a:t>
+            </a:r>
+            <a:r>
+              <a:rPr lang="de-DE" sz="800" kern="0" dirty="0">
+                <a:solidFill>
+                  <a:prstClr val="black"/>
+                </a:solidFill>
+                <a:latin typeface="Calibri" panose="020F0502020204030204"/>
+              </a:rPr>
+              <a:t>=</a:t>
+            </a:r>
+            <a:r>
+              <a:rPr lang="de-DE" sz="800" kern="0" dirty="0" err="1">
+                <a:solidFill>
+                  <a:prstClr val="black"/>
+                </a:solidFill>
+                <a:latin typeface="Calibri" panose="020F0502020204030204"/>
+              </a:rPr>
+              <a:t>controller</a:t>
+            </a:r>
+            <a:endParaRPr lang="de-DE" sz="800" kern="0" dirty="0">
+              <a:solidFill>
+                <a:prstClr val="black"/>
+              </a:solidFill>
+              <a:latin typeface="Calibri" panose="020F0502020204030204"/>
+            </a:endParaRPr>
           </a:p>
           <a:p>
             <a:pPr defTabSz="914400">
               <a:defRPr/>
             </a:pPr>
             <a:r>
-              <a:rPr lang="de-DE" sz="800" kern="0">
+              <a:rPr lang="de-DE" sz="800" kern="0" dirty="0">
                 <a:solidFill>
                   <a:prstClr val="black"/>
                 </a:solidFill>
                 <a:latin typeface="Calibri" panose="020F0502020204030204"/>
               </a:rPr>
-              <a:t>_template=controllerTemplateName</a:t>
-            </a:r>
+              <a:t>_</a:t>
+            </a:r>
+            <a:r>
+              <a:rPr lang="de-DE" sz="800" kern="0" dirty="0" err="1">
+                <a:solidFill>
+                  <a:prstClr val="black"/>
+                </a:solidFill>
+                <a:latin typeface="Calibri" panose="020F0502020204030204"/>
+              </a:rPr>
+              <a:t>template</a:t>
+            </a:r>
+            <a:r>
+              <a:rPr lang="de-DE" sz="800" kern="0" dirty="0">
+                <a:solidFill>
+                  <a:prstClr val="black"/>
+                </a:solidFill>
+                <a:latin typeface="Calibri" panose="020F0502020204030204"/>
+              </a:rPr>
+              <a:t>=</a:t>
+            </a:r>
+            <a:r>
+              <a:rPr lang="de-DE" sz="800" kern="0" dirty="0" err="1">
+                <a:solidFill>
+                  <a:prstClr val="black"/>
+                </a:solidFill>
+                <a:latin typeface="Calibri" panose="020F0502020204030204"/>
+              </a:rPr>
+              <a:t>controllerTemplateName</a:t>
+            </a:r>
+            <a:endParaRPr lang="de-DE" sz="800" kern="0" dirty="0">
+              <a:solidFill>
+                <a:prstClr val="black"/>
+              </a:solidFill>
+              <a:latin typeface="Calibri" panose="020F0502020204030204"/>
+            </a:endParaRPr>
           </a:p>
         </p:txBody>
       </p:sp>
@@ -7747,13 +8311,40 @@
           <a:p>
             <a:pPr defTabSz="914400"/>
             <a:r>
-              <a:rPr lang="de-DE" sz="800" kern="0">
+              <a:rPr lang="de-DE" sz="800" kern="0" dirty="0" err="1">
                 <a:solidFill>
                   <a:prstClr val="black"/>
                 </a:solidFill>
                 <a:latin typeface="Calibri" panose="020F0502020204030204"/>
               </a:rPr>
-              <a:t>local-id =running,operational, …</a:t>
+              <a:t>storage</a:t>
+            </a:r>
+            <a:r>
+              <a:rPr lang="de-DE" sz="800" kern="0" dirty="0">
+                <a:solidFill>
+                  <a:prstClr val="black"/>
+                </a:solidFill>
+                <a:latin typeface="Calibri" panose="020F0502020204030204"/>
+              </a:rPr>
+              <a:t> =</a:t>
+            </a:r>
+            <a:r>
+              <a:rPr lang="de-DE" sz="800" kern="0" dirty="0" err="1">
+                <a:solidFill>
+                  <a:prstClr val="black"/>
+                </a:solidFill>
+                <a:latin typeface="Calibri" panose="020F0502020204030204"/>
+              </a:rPr>
+              <a:t>running,operational</a:t>
+            </a:r>
+            <a:r>
+              <a:rPr lang="de-DE" sz="800" kern="0" dirty="0">
+                <a:solidFill>
+                  <a:prstClr val="black"/>
+                </a:solidFill>
+                <a:latin typeface="Calibri" panose="020F0502020204030204"/>
+              </a:rPr>
+              <a:t>, …</a:t>
             </a:r>
           </a:p>
         </p:txBody>
@@ -10623,8 +11214,8 @@
         </p:nvSpPr>
         <p:spPr>
           <a:xfrm>
-            <a:off x="6991939" y="358770"/>
-            <a:ext cx="722507" cy="356322"/>
+            <a:off x="6851185" y="358770"/>
+            <a:ext cx="863261" cy="356322"/>
           </a:xfrm>
           <a:prstGeom prst="rect">
             <a:avLst/>
@@ -10647,19 +11238,28 @@
           <a:p>
             <a:pPr defTabSz="914400"/>
             <a:r>
-              <a:rPr lang="de-DE" sz="800" kern="0">
+              <a:rPr lang="de-DE" sz="800" kern="0" dirty="0" err="1">
                 <a:solidFill>
                   <a:prstClr val="black"/>
                 </a:solidFill>
                 <a:latin typeface="Calibri" panose="020F0502020204030204"/>
               </a:rPr>
-              <a:t>functionName</a:t>
+              <a:t>function</a:t>
+            </a:r>
+            <a:r>
+              <a:rPr lang="de-DE" sz="800" kern="0" dirty="0">
+                <a:solidFill>
+                  <a:prstClr val="black"/>
+                </a:solidFill>
+                <a:latin typeface="Calibri" panose="020F0502020204030204"/>
+              </a:rPr>
+              <a:t>-name</a:t>
             </a:r>
           </a:p>
           <a:p>
             <a:pPr defTabSz="914400"/>
             <a:r>
-              <a:rPr lang="de-DE" sz="800" kern="0">
+              <a:rPr lang="de-DE" sz="800" kern="0" dirty="0" err="1">
                 <a:solidFill>
                   <a:prstClr val="black"/>
                 </a:solidFill>
@@ -10667,6 +11267,12 @@
               </a:rPr>
               <a:t>parameter</a:t>
             </a:r>
+            <a:endParaRPr lang="de-DE" sz="800" kern="0" dirty="0">
+              <a:solidFill>
+                <a:prstClr val="black"/>
+              </a:solidFill>
+              <a:latin typeface="Calibri" panose="020F0502020204030204"/>
+            </a:endParaRPr>
           </a:p>
         </p:txBody>
       </p:sp>

--- a/spec/InformationStructure/diagrams/InformationStructure.pptx
+++ b/spec/InformationStructure/diagrams/InformationStructure.pptx
@@ -209,7 +209,7 @@
           <a:p>
             <a:fld id="{37CCF725-7468-4D3D-9E24-A16745BBBA77}" type="datetimeFigureOut">
               <a:rPr lang="de-DE" smtClean="0"/>
-              <a:t>16.05.2025</a:t>
+              <a:t>27.06.2025</a:t>
             </a:fld>
             <a:endParaRPr lang="de-DE"/>
           </a:p>
@@ -607,7 +607,7 @@
           <a:p>
             <a:fld id="{9A2764DB-E7DF-4EA7-A1AF-05A77C280FCA}" type="datetimeFigureOut">
               <a:rPr lang="de-DE" smtClean="0"/>
-              <a:t>16.05.2025</a:t>
+              <a:t>27.06.2025</a:t>
             </a:fld>
             <a:endParaRPr lang="de-DE"/>
           </a:p>
@@ -777,7 +777,7 @@
           <a:p>
             <a:fld id="{9A2764DB-E7DF-4EA7-A1AF-05A77C280FCA}" type="datetimeFigureOut">
               <a:rPr lang="de-DE" smtClean="0"/>
-              <a:t>16.05.2025</a:t>
+              <a:t>27.06.2025</a:t>
             </a:fld>
             <a:endParaRPr lang="de-DE"/>
           </a:p>
@@ -957,7 +957,7 @@
           <a:p>
             <a:fld id="{9A2764DB-E7DF-4EA7-A1AF-05A77C280FCA}" type="datetimeFigureOut">
               <a:rPr lang="de-DE" smtClean="0"/>
-              <a:t>16.05.2025</a:t>
+              <a:t>27.06.2025</a:t>
             </a:fld>
             <a:endParaRPr lang="de-DE"/>
           </a:p>
@@ -1127,7 +1127,7 @@
           <a:p>
             <a:fld id="{9A2764DB-E7DF-4EA7-A1AF-05A77C280FCA}" type="datetimeFigureOut">
               <a:rPr lang="de-DE" smtClean="0"/>
-              <a:t>16.05.2025</a:t>
+              <a:t>27.06.2025</a:t>
             </a:fld>
             <a:endParaRPr lang="de-DE"/>
           </a:p>
@@ -1373,7 +1373,7 @@
           <a:p>
             <a:fld id="{9A2764DB-E7DF-4EA7-A1AF-05A77C280FCA}" type="datetimeFigureOut">
               <a:rPr lang="de-DE" smtClean="0"/>
-              <a:t>16.05.2025</a:t>
+              <a:t>27.06.2025</a:t>
             </a:fld>
             <a:endParaRPr lang="de-DE"/>
           </a:p>
@@ -1605,7 +1605,7 @@
           <a:p>
             <a:fld id="{9A2764DB-E7DF-4EA7-A1AF-05A77C280FCA}" type="datetimeFigureOut">
               <a:rPr lang="de-DE" smtClean="0"/>
-              <a:t>16.05.2025</a:t>
+              <a:t>27.06.2025</a:t>
             </a:fld>
             <a:endParaRPr lang="de-DE"/>
           </a:p>
@@ -1972,7 +1972,7 @@
           <a:p>
             <a:fld id="{9A2764DB-E7DF-4EA7-A1AF-05A77C280FCA}" type="datetimeFigureOut">
               <a:rPr lang="de-DE" smtClean="0"/>
-              <a:t>16.05.2025</a:t>
+              <a:t>27.06.2025</a:t>
             </a:fld>
             <a:endParaRPr lang="de-DE"/>
           </a:p>
@@ -2090,7 +2090,7 @@
           <a:p>
             <a:fld id="{9A2764DB-E7DF-4EA7-A1AF-05A77C280FCA}" type="datetimeFigureOut">
               <a:rPr lang="de-DE" smtClean="0"/>
-              <a:t>16.05.2025</a:t>
+              <a:t>27.06.2025</a:t>
             </a:fld>
             <a:endParaRPr lang="de-DE"/>
           </a:p>
@@ -2185,7 +2185,7 @@
           <a:p>
             <a:fld id="{9A2764DB-E7DF-4EA7-A1AF-05A77C280FCA}" type="datetimeFigureOut">
               <a:rPr lang="de-DE" smtClean="0"/>
-              <a:t>16.05.2025</a:t>
+              <a:t>27.06.2025</a:t>
             </a:fld>
             <a:endParaRPr lang="de-DE"/>
           </a:p>
@@ -2462,7 +2462,7 @@
           <a:p>
             <a:fld id="{9A2764DB-E7DF-4EA7-A1AF-05A77C280FCA}" type="datetimeFigureOut">
               <a:rPr lang="de-DE" smtClean="0"/>
-              <a:t>16.05.2025</a:t>
+              <a:t>27.06.2025</a:t>
             </a:fld>
             <a:endParaRPr lang="de-DE"/>
           </a:p>
@@ -2719,7 +2719,7 @@
           <a:p>
             <a:fld id="{9A2764DB-E7DF-4EA7-A1AF-05A77C280FCA}" type="datetimeFigureOut">
               <a:rPr lang="de-DE" smtClean="0"/>
-              <a:t>16.05.2025</a:t>
+              <a:t>27.06.2025</a:t>
             </a:fld>
             <a:endParaRPr lang="de-DE"/>
           </a:p>
@@ -2932,7 +2932,7 @@
           <a:p>
             <a:fld id="{9A2764DB-E7DF-4EA7-A1AF-05A77C280FCA}" type="datetimeFigureOut">
               <a:rPr lang="de-DE" smtClean="0"/>
-              <a:t>16.05.2025</a:t>
+              <a:t>27.06.2025</a:t>
             </a:fld>
             <a:endParaRPr lang="de-DE"/>
           </a:p>
@@ -4825,8 +4825,8 @@
         </p:nvSpPr>
         <p:spPr>
           <a:xfrm>
-            <a:off x="13537391" y="12788610"/>
-            <a:ext cx="1682087" cy="487489"/>
+            <a:off x="13537391" y="12452350"/>
+            <a:ext cx="1682087" cy="823749"/>
           </a:xfrm>
           <a:prstGeom prst="rect">
             <a:avLst/>
@@ -4849,48 +4849,144 @@
           <a:p>
             <a:pPr defTabSz="914400"/>
             <a:r>
-              <a:rPr lang="de-DE" sz="800" kern="0">
+              <a:rPr lang="de-DE" sz="800" kern="0" dirty="0" err="1">
                 <a:solidFill>
                   <a:prstClr val="black"/>
                 </a:solidFill>
                 <a:latin typeface="Calibri" panose="020F0502020204030204"/>
               </a:rPr>
-              <a:t>local-id=snmpClient</a:t>
-            </a:r>
-          </a:p>
-          <a:p>
-            <a:pPr defTabSz="914400"/>
-            <a:r>
-              <a:rPr lang="de-DE" sz="800" kern="0">
+              <a:t>local-id</a:t>
+            </a:r>
+            <a:r>
+              <a:rPr lang="de-DE" sz="800" kern="0" dirty="0">
                 <a:solidFill>
                   <a:prstClr val="black"/>
                 </a:solidFill>
                 <a:latin typeface="Calibri" panose="020F0502020204030204"/>
               </a:rPr>
-              <a:t>mediatorUserName</a:t>
-            </a:r>
-          </a:p>
-          <a:p>
-            <a:pPr defTabSz="914400"/>
-            <a:r>
-              <a:rPr lang="de-DE" sz="800" kern="0">
+              <a:t>=</a:t>
+            </a:r>
+            <a:r>
+              <a:rPr lang="de-DE" sz="800" kern="0" dirty="0" err="1">
                 <a:solidFill>
                   <a:prstClr val="black"/>
                 </a:solidFill>
                 <a:latin typeface="Calibri" panose="020F0502020204030204"/>
               </a:rPr>
-              <a:t>mediatorUserPassword</a:t>
-            </a:r>
-          </a:p>
-          <a:p>
-            <a:pPr defTabSz="914400"/>
-            <a:endParaRPr lang="de-DE" sz="800" kern="0">
+              <a:t>snmpClient</a:t>
+            </a:r>
+            <a:endParaRPr lang="de-DE" sz="800" kern="0" dirty="0">
               <a:solidFill>
                 <a:prstClr val="black"/>
               </a:solidFill>
               <a:latin typeface="Calibri" panose="020F0502020204030204"/>
             </a:endParaRPr>
           </a:p>
+          <a:p>
+            <a:pPr defTabSz="914400"/>
+            <a:r>
+              <a:rPr lang="de-DE" sz="800" strike="sngStrike" kern="0" dirty="0" err="1">
+                <a:solidFill>
+                  <a:prstClr val="black"/>
+                </a:solidFill>
+                <a:highlight>
+                  <a:srgbClr val="FFFF00"/>
+                </a:highlight>
+                <a:latin typeface="Calibri" panose="020F0502020204030204"/>
+              </a:rPr>
+              <a:t>mediatorUserName</a:t>
+            </a:r>
+            <a:endParaRPr lang="de-DE" sz="800" strike="sngStrike" kern="0" dirty="0">
+              <a:solidFill>
+                <a:prstClr val="black"/>
+              </a:solidFill>
+              <a:highlight>
+                <a:srgbClr val="FFFF00"/>
+              </a:highlight>
+              <a:latin typeface="Calibri" panose="020F0502020204030204"/>
+            </a:endParaRPr>
+          </a:p>
+          <a:p>
+            <a:pPr defTabSz="914400"/>
+            <a:r>
+              <a:rPr lang="de-DE" sz="800" strike="sngStrike" kern="0" dirty="0" err="1">
+                <a:solidFill>
+                  <a:prstClr val="black"/>
+                </a:solidFill>
+                <a:highlight>
+                  <a:srgbClr val="FFFF00"/>
+                </a:highlight>
+                <a:latin typeface="Calibri" panose="020F0502020204030204"/>
+              </a:rPr>
+              <a:t>mediatorUserPassword</a:t>
+            </a:r>
+            <a:endParaRPr lang="de-DE" sz="800" strike="sngStrike" kern="0" dirty="0">
+              <a:solidFill>
+                <a:prstClr val="black"/>
+              </a:solidFill>
+              <a:highlight>
+                <a:srgbClr val="FFFF00"/>
+              </a:highlight>
+              <a:latin typeface="Calibri" panose="020F0502020204030204"/>
+            </a:endParaRPr>
+          </a:p>
+          <a:p>
+            <a:pPr defTabSz="914400"/>
+            <a:r>
+              <a:rPr lang="de-DE" sz="800" kern="0" dirty="0" err="1">
+                <a:solidFill>
+                  <a:prstClr val="black"/>
+                </a:solidFill>
+                <a:highlight>
+                  <a:srgbClr val="FFFF00"/>
+                </a:highlight>
+                <a:latin typeface="Calibri" panose="020F0502020204030204"/>
+              </a:rPr>
+              <a:t>snmpUserName</a:t>
+            </a:r>
+            <a:endParaRPr lang="de-DE" sz="800" kern="0" dirty="0">
+              <a:solidFill>
+                <a:prstClr val="black"/>
+              </a:solidFill>
+              <a:highlight>
+                <a:srgbClr val="FFFF00"/>
+              </a:highlight>
+              <a:latin typeface="Calibri" panose="020F0502020204030204"/>
+            </a:endParaRPr>
+          </a:p>
+          <a:p>
+            <a:pPr defTabSz="914400"/>
+            <a:r>
+              <a:rPr lang="de-DE" sz="800" kern="0" dirty="0" err="1">
+                <a:solidFill>
+                  <a:prstClr val="black"/>
+                </a:solidFill>
+                <a:highlight>
+                  <a:srgbClr val="FFFF00"/>
+                </a:highlight>
+                <a:latin typeface="Calibri" panose="020F0502020204030204"/>
+              </a:rPr>
+              <a:t>snmpUserPassword</a:t>
+            </a:r>
+            <a:endParaRPr lang="de-DE" sz="800" kern="0" dirty="0">
+              <a:solidFill>
+                <a:prstClr val="black"/>
+              </a:solidFill>
+              <a:highlight>
+                <a:srgbClr val="FFFF00"/>
+              </a:highlight>
+              <a:latin typeface="Calibri" panose="020F0502020204030204"/>
+            </a:endParaRPr>
+          </a:p>
+          <a:p>
+            <a:pPr defTabSz="914400"/>
+            <a:endParaRPr lang="de-DE" sz="800" kern="0" dirty="0">
+              <a:solidFill>
+                <a:prstClr val="black"/>
+              </a:solidFill>
+              <a:latin typeface="Calibri" panose="020F0502020204030204"/>
+            </a:endParaRPr>
+          </a:p>
         </p:txBody>
       </p:sp>
       <p:cxnSp>
@@ -4910,9 +5006,9 @@
           <p:nvPr/>
         </p:nvCxnSpPr>
         <p:spPr>
-          <a:xfrm>
-            <a:off x="13067183" y="12995178"/>
-            <a:ext cx="470208" cy="37177"/>
+          <a:xfrm flipV="1">
+            <a:off x="13067183" y="12864225"/>
+            <a:ext cx="470208" cy="130953"/>
           </a:xfrm>
           <a:prstGeom prst="straightConnector1">
             <a:avLst/>
@@ -5396,38 +5492,86 @@
           <a:p>
             <a:pPr defTabSz="914400"/>
             <a:r>
-              <a:rPr lang="de-DE" sz="800" kern="0">
+              <a:rPr lang="de-DE" sz="800" kern="0" dirty="0" err="1">
                 <a:solidFill>
                   <a:prstClr val="black"/>
                 </a:solidFill>
                 <a:latin typeface="Calibri" panose="020F0502020204030204"/>
               </a:rPr>
-              <a:t>local-id=mimHttpServer</a:t>
-            </a:r>
+              <a:t>local-id</a:t>
+            </a:r>
+            <a:r>
+              <a:rPr lang="de-DE" sz="800" kern="0" dirty="0">
+                <a:solidFill>
+                  <a:prstClr val="black"/>
+                </a:solidFill>
+                <a:latin typeface="Calibri" panose="020F0502020204030204"/>
+              </a:rPr>
+              <a:t>=</a:t>
+            </a:r>
+            <a:r>
+              <a:rPr lang="de-DE" sz="800" kern="0" dirty="0" err="1">
+                <a:solidFill>
+                  <a:prstClr val="black"/>
+                </a:solidFill>
+                <a:latin typeface="Calibri" panose="020F0502020204030204"/>
+              </a:rPr>
+              <a:t>mimHttpServer</a:t>
+            </a:r>
+            <a:endParaRPr lang="de-DE" sz="800" kern="0" dirty="0">
+              <a:solidFill>
+                <a:prstClr val="black"/>
+              </a:solidFill>
+              <a:latin typeface="Calibri" panose="020F0502020204030204"/>
+            </a:endParaRPr>
           </a:p>
           <a:p>
             <a:pPr defTabSz="914400"/>
             <a:r>
-              <a:rPr lang="de-DE" sz="800" kern="0">
+              <a:rPr lang="de-DE" sz="800" strike="sngStrike" kern="0" dirty="0" err="1">
                 <a:solidFill>
                   <a:prstClr val="black"/>
                 </a:solidFill>
+                <a:highlight>
+                  <a:srgbClr val="FFFF00"/>
+                </a:highlight>
                 <a:latin typeface="Calibri" panose="020F0502020204030204"/>
               </a:rPr>
               <a:t>mediatorUserName</a:t>
             </a:r>
+            <a:endParaRPr lang="de-DE" sz="800" strike="sngStrike" kern="0" dirty="0">
+              <a:solidFill>
+                <a:prstClr val="black"/>
+              </a:solidFill>
+              <a:highlight>
+                <a:srgbClr val="FFFF00"/>
+              </a:highlight>
+              <a:latin typeface="Calibri" panose="020F0502020204030204"/>
+            </a:endParaRPr>
           </a:p>
           <a:p>
             <a:pPr defTabSz="914400"/>
             <a:r>
-              <a:rPr lang="de-DE" sz="800" kern="0">
+              <a:rPr lang="de-DE" sz="800" strike="sngStrike" kern="0" dirty="0" err="1">
                 <a:solidFill>
                   <a:prstClr val="black"/>
                 </a:solidFill>
+                <a:highlight>
+                  <a:srgbClr val="FFFF00"/>
+                </a:highlight>
                 <a:latin typeface="Calibri" panose="020F0502020204030204"/>
               </a:rPr>
               <a:t>mediatorUserPassword</a:t>
             </a:r>
+            <a:endParaRPr lang="de-DE" sz="800" strike="sngStrike" kern="0" dirty="0">
+              <a:solidFill>
+                <a:prstClr val="black"/>
+              </a:solidFill>
+              <a:highlight>
+                <a:srgbClr val="FFFF00"/>
+              </a:highlight>
+              <a:latin typeface="Calibri" panose="020F0502020204030204"/>
+            </a:endParaRPr>
           </a:p>
         </p:txBody>
       </p:sp>
@@ -5517,8 +5661,8 @@
         </p:nvSpPr>
         <p:spPr>
           <a:xfrm>
-            <a:off x="8326115" y="7380577"/>
-            <a:ext cx="1815783" cy="512200"/>
+            <a:off x="8326115" y="7380576"/>
+            <a:ext cx="1815783" cy="725175"/>
           </a:xfrm>
           <a:prstGeom prst="rect">
             <a:avLst/>
@@ -5541,48 +5685,180 @@
           <a:p>
             <a:pPr defTabSz="914400"/>
             <a:r>
-              <a:rPr lang="de-DE" sz="800" kern="0">
+              <a:rPr lang="de-DE" sz="800" kern="0" dirty="0" err="1">
                 <a:solidFill>
                   <a:prstClr val="black"/>
                 </a:solidFill>
                 <a:latin typeface="Calibri" panose="020F0502020204030204"/>
               </a:rPr>
-              <a:t>local-id=[mediatorVmName]</a:t>
+              <a:t>local-id</a:t>
+            </a:r>
+            <a:r>
+              <a:rPr lang="de-DE" sz="800" kern="0" dirty="0">
+                <a:solidFill>
+                  <a:prstClr val="black"/>
+                </a:solidFill>
+                <a:latin typeface="Calibri" panose="020F0502020204030204"/>
+              </a:rPr>
+              <a:t>=[</a:t>
+            </a:r>
+            <a:r>
+              <a:rPr lang="de-DE" sz="800" kern="0" dirty="0" err="1">
+                <a:solidFill>
+                  <a:prstClr val="black"/>
+                </a:solidFill>
+                <a:latin typeface="Calibri" panose="020F0502020204030204"/>
+              </a:rPr>
+              <a:t>mediatorVmName</a:t>
+            </a:r>
+            <a:r>
+              <a:rPr lang="de-DE" sz="800" kern="0" dirty="0">
+                <a:solidFill>
+                  <a:prstClr val="black"/>
+                </a:solidFill>
+                <a:latin typeface="Calibri" panose="020F0502020204030204"/>
+              </a:rPr>
+              <a:t>]</a:t>
             </a:r>
           </a:p>
           <a:p>
             <a:pPr defTabSz="914400"/>
             <a:r>
-              <a:rPr lang="de-DE" sz="800" kern="0">
+              <a:rPr lang="de-DE" sz="800" kern="0" dirty="0" err="1">
                 <a:solidFill>
                   <a:prstClr val="black"/>
                 </a:solidFill>
                 <a:latin typeface="Calibri" panose="020F0502020204030204"/>
               </a:rPr>
-              <a:t>category=mediatorVm</a:t>
-            </a:r>
-          </a:p>
-          <a:p>
-            <a:pPr defTabSz="914400"/>
-            <a:r>
-              <a:rPr lang="de-DE" sz="800" kern="0">
+              <a:t>category</a:t>
+            </a:r>
+            <a:r>
+              <a:rPr lang="de-DE" sz="800" kern="0" dirty="0">
                 <a:solidFill>
                   <a:prstClr val="black"/>
                 </a:solidFill>
                 <a:latin typeface="Calibri" panose="020F0502020204030204"/>
               </a:rPr>
-              <a:t>_template= mediatorVmTemplateName</a:t>
-            </a:r>
-          </a:p>
-          <a:p>
-            <a:pPr defTabSz="914400"/>
-            <a:endParaRPr lang="de-DE" sz="800" kern="0">
+              <a:t>=</a:t>
+            </a:r>
+            <a:r>
+              <a:rPr lang="de-DE" sz="800" kern="0" dirty="0" err="1">
+                <a:solidFill>
+                  <a:prstClr val="black"/>
+                </a:solidFill>
+                <a:latin typeface="Calibri" panose="020F0502020204030204"/>
+              </a:rPr>
+              <a:t>mediatorVm</a:t>
+            </a:r>
+            <a:endParaRPr lang="de-DE" sz="800" kern="0" dirty="0">
               <a:solidFill>
                 <a:prstClr val="black"/>
               </a:solidFill>
               <a:latin typeface="Calibri" panose="020F0502020204030204"/>
             </a:endParaRPr>
           </a:p>
+          <a:p>
+            <a:pPr defTabSz="914400"/>
+            <a:r>
+              <a:rPr lang="de-DE" sz="800" kern="0" dirty="0">
+                <a:solidFill>
+                  <a:prstClr val="black"/>
+                </a:solidFill>
+                <a:latin typeface="Calibri" panose="020F0502020204030204"/>
+              </a:rPr>
+              <a:t>_</a:t>
+            </a:r>
+            <a:r>
+              <a:rPr lang="de-DE" sz="800" kern="0" dirty="0" err="1">
+                <a:solidFill>
+                  <a:prstClr val="black"/>
+                </a:solidFill>
+                <a:latin typeface="Calibri" panose="020F0502020204030204"/>
+              </a:rPr>
+              <a:t>template</a:t>
+            </a:r>
+            <a:r>
+              <a:rPr lang="de-DE" sz="800" kern="0" dirty="0">
+                <a:solidFill>
+                  <a:prstClr val="black"/>
+                </a:solidFill>
+                <a:latin typeface="Calibri" panose="020F0502020204030204"/>
+              </a:rPr>
+              <a:t>= </a:t>
+            </a:r>
+            <a:r>
+              <a:rPr lang="de-DE" sz="800" kern="0" dirty="0" err="1">
+                <a:solidFill>
+                  <a:prstClr val="black"/>
+                </a:solidFill>
+                <a:latin typeface="Calibri" panose="020F0502020204030204"/>
+              </a:rPr>
+              <a:t>mediatorVmTemplateName</a:t>
+            </a:r>
+            <a:endParaRPr lang="de-DE" sz="800" kern="0" dirty="0">
+              <a:solidFill>
+                <a:prstClr val="black"/>
+              </a:solidFill>
+              <a:latin typeface="Calibri" panose="020F0502020204030204"/>
+            </a:endParaRPr>
+          </a:p>
+          <a:p>
+            <a:pPr defTabSz="914400"/>
+            <a:r>
+              <a:rPr lang="de-DE" sz="800" kern="0" dirty="0" err="1">
+                <a:solidFill>
+                  <a:prstClr val="black"/>
+                </a:solidFill>
+                <a:highlight>
+                  <a:srgbClr val="FFFF00"/>
+                </a:highlight>
+                <a:latin typeface="Calibri" panose="020F0502020204030204"/>
+              </a:rPr>
+              <a:t>defaultSnmpUserName</a:t>
+            </a:r>
+            <a:endParaRPr lang="de-DE" sz="800" kern="0" dirty="0">
+              <a:solidFill>
+                <a:prstClr val="black"/>
+              </a:solidFill>
+              <a:highlight>
+                <a:srgbClr val="FFFF00"/>
+              </a:highlight>
+              <a:latin typeface="Calibri" panose="020F0502020204030204"/>
+            </a:endParaRPr>
+          </a:p>
+          <a:p>
+            <a:pPr defTabSz="914400"/>
+            <a:r>
+              <a:rPr lang="de-DE" sz="800" kern="0">
+                <a:solidFill>
+                  <a:prstClr val="black"/>
+                </a:solidFill>
+                <a:highlight>
+                  <a:srgbClr val="FFFF00"/>
+                </a:highlight>
+                <a:latin typeface="Calibri" panose="020F0502020204030204"/>
+              </a:rPr>
+              <a:t>defaultSnmpUserPassword</a:t>
+            </a:r>
+            <a:endParaRPr lang="de-DE" sz="800" kern="0" dirty="0">
+              <a:solidFill>
+                <a:prstClr val="black"/>
+              </a:solidFill>
+              <a:highlight>
+                <a:srgbClr val="FFFF00"/>
+              </a:highlight>
+              <a:latin typeface="Calibri" panose="020F0502020204030204"/>
+            </a:endParaRPr>
+          </a:p>
+          <a:p>
+            <a:pPr defTabSz="914400"/>
+            <a:endParaRPr lang="de-DE" sz="800" kern="0" dirty="0">
+              <a:solidFill>
+                <a:prstClr val="black"/>
+              </a:solidFill>
+              <a:latin typeface="Calibri" panose="020F0502020204030204"/>
+            </a:endParaRPr>
+          </a:p>
         </p:txBody>
       </p:sp>
       <p:cxnSp>
@@ -5604,7 +5880,7 @@
         <p:spPr>
           <a:xfrm flipH="1">
             <a:off x="10141898" y="7583786"/>
-            <a:ext cx="674365" cy="52891"/>
+            <a:ext cx="674365" cy="159378"/>
           </a:xfrm>
           <a:prstGeom prst="straightConnector1">
             <a:avLst/>
@@ -5971,8 +6247,8 @@
         </p:nvSpPr>
         <p:spPr>
           <a:xfrm>
-            <a:off x="17566269" y="12736077"/>
-            <a:ext cx="1425832" cy="479569"/>
+            <a:off x="17566269" y="12369801"/>
+            <a:ext cx="1425832" cy="845846"/>
           </a:xfrm>
           <a:prstGeom prst="rect">
             <a:avLst/>
@@ -5997,38 +6273,140 @@
               <a:defRPr/>
             </a:pPr>
             <a:r>
-              <a:rPr lang="de-DE" sz="800" kern="0">
+              <a:rPr lang="de-DE" sz="800" kern="0" dirty="0" err="1">
                 <a:solidFill>
                   <a:prstClr val="black"/>
                 </a:solidFill>
                 <a:latin typeface="Calibri" panose="020F0502020204030204"/>
               </a:rPr>
-              <a:t>local-id=[mediatorUserName]</a:t>
+              <a:t>local-id</a:t>
+            </a:r>
+            <a:r>
+              <a:rPr lang="de-DE" sz="800" kern="0" dirty="0">
+                <a:solidFill>
+                  <a:prstClr val="black"/>
+                </a:solidFill>
+                <a:latin typeface="Calibri" panose="020F0502020204030204"/>
+              </a:rPr>
+              <a:t>=[</a:t>
+            </a:r>
+            <a:r>
+              <a:rPr lang="de-DE" sz="800" kern="0" dirty="0" err="1">
+                <a:solidFill>
+                  <a:prstClr val="black"/>
+                </a:solidFill>
+                <a:latin typeface="Calibri" panose="020F0502020204030204"/>
+              </a:rPr>
+              <a:t>mediatorUserName</a:t>
+            </a:r>
+            <a:r>
+              <a:rPr lang="de-DE" sz="800" kern="0" dirty="0">
+                <a:solidFill>
+                  <a:prstClr val="black"/>
+                </a:solidFill>
+                <a:latin typeface="Calibri" panose="020F0502020204030204"/>
+              </a:rPr>
+              <a:t>]</a:t>
             </a:r>
           </a:p>
           <a:p>
             <a:pPr defTabSz="914400"/>
             <a:r>
-              <a:rPr lang="de-DE" sz="800" kern="0">
+              <a:rPr lang="de-DE" sz="800" strike="sngStrike" kern="0" dirty="0" err="1">
                 <a:solidFill>
                   <a:prstClr val="black"/>
                 </a:solidFill>
+                <a:highlight>
+                  <a:srgbClr val="FFFF00"/>
+                </a:highlight>
                 <a:latin typeface="Calibri" panose="020F0502020204030204"/>
               </a:rPr>
               <a:t>mediatorUserName</a:t>
             </a:r>
+            <a:endParaRPr lang="de-DE" sz="800" strike="sngStrike" kern="0" dirty="0">
+              <a:solidFill>
+                <a:prstClr val="black"/>
+              </a:solidFill>
+              <a:highlight>
+                <a:srgbClr val="FFFF00"/>
+              </a:highlight>
+              <a:latin typeface="Calibri" panose="020F0502020204030204"/>
+            </a:endParaRPr>
           </a:p>
           <a:p>
             <a:pPr defTabSz="914400"/>
             <a:r>
-              <a:rPr lang="de-DE" sz="800" kern="0">
+              <a:rPr lang="de-DE" sz="800" strike="sngStrike" kern="0" dirty="0" err="1">
                 <a:solidFill>
                   <a:prstClr val="black"/>
                 </a:solidFill>
+                <a:highlight>
+                  <a:srgbClr val="FFFF00"/>
+                </a:highlight>
                 <a:latin typeface="Calibri" panose="020F0502020204030204"/>
               </a:rPr>
               <a:t>mediatorUserPassword</a:t>
             </a:r>
+            <a:endParaRPr lang="de-DE" sz="800" strike="sngStrike" kern="0" dirty="0">
+              <a:solidFill>
+                <a:prstClr val="black"/>
+              </a:solidFill>
+              <a:highlight>
+                <a:srgbClr val="FFFF00"/>
+              </a:highlight>
+              <a:latin typeface="Calibri" panose="020F0502020204030204"/>
+            </a:endParaRPr>
+          </a:p>
+          <a:p>
+            <a:pPr defTabSz="914400"/>
+            <a:r>
+              <a:rPr lang="de-DE" sz="800" kern="0" dirty="0" err="1">
+                <a:solidFill>
+                  <a:prstClr val="black"/>
+                </a:solidFill>
+                <a:highlight>
+                  <a:srgbClr val="FFFF00"/>
+                </a:highlight>
+                <a:latin typeface="Calibri" panose="020F0502020204030204"/>
+              </a:rPr>
+              <a:t>snmpUserName</a:t>
+            </a:r>
+            <a:endParaRPr lang="de-DE" sz="800" kern="0" dirty="0">
+              <a:solidFill>
+                <a:prstClr val="black"/>
+              </a:solidFill>
+              <a:highlight>
+                <a:srgbClr val="FFFF00"/>
+              </a:highlight>
+              <a:latin typeface="Calibri" panose="020F0502020204030204"/>
+            </a:endParaRPr>
+          </a:p>
+          <a:p>
+            <a:pPr defTabSz="914400"/>
+            <a:r>
+              <a:rPr lang="de-DE" sz="800" kern="0" dirty="0" err="1">
+                <a:solidFill>
+                  <a:prstClr val="black"/>
+                </a:solidFill>
+                <a:highlight>
+                  <a:srgbClr val="FFFF00"/>
+                </a:highlight>
+                <a:latin typeface="Calibri" panose="020F0502020204030204"/>
+              </a:rPr>
+              <a:t>snmpUserPassword</a:t>
+            </a:r>
+            <a:endParaRPr lang="de-DE" sz="800" kern="0" dirty="0">
+              <a:solidFill>
+                <a:prstClr val="black"/>
+              </a:solidFill>
+              <a:highlight>
+                <a:srgbClr val="FFFF00"/>
+              </a:highlight>
+              <a:latin typeface="Calibri" panose="020F0502020204030204"/>
+            </a:endParaRPr>
+          </a:p>
+          <a:p>
+            <a:pPr defTabSz="914400"/>
             <a:endParaRPr lang="de-DE" sz="800" kern="0" dirty="0">
               <a:solidFill>
                 <a:prstClr val="black"/>
@@ -6056,8 +6434,8 @@
         </p:nvCxnSpPr>
         <p:spPr>
           <a:xfrm flipH="1" flipV="1">
-            <a:off x="18992101" y="12975862"/>
-            <a:ext cx="573605" cy="14867"/>
+            <a:off x="18992101" y="12792724"/>
+            <a:ext cx="573605" cy="198005"/>
           </a:xfrm>
           <a:prstGeom prst="straightConnector1">
             <a:avLst/>
@@ -11467,6 +11845,57 @@
           <a:effectLst/>
         </p:spPr>
       </p:cxnSp>
+      <p:sp>
+        <p:nvSpPr>
+          <p:cNvPr id="8" name="Textfeld 7">
+            <a:extLst>
+              <a:ext uri="{FF2B5EF4-FFF2-40B4-BE49-F238E27FC236}">
+                <a16:creationId xmlns:a16="http://schemas.microsoft.com/office/drawing/2014/main" id="{46A024A9-BC8E-99B6-6F1B-23046812678D}"/>
+              </a:ext>
+            </a:extLst>
+          </p:cNvPr>
+          <p:cNvSpPr txBox="1"/>
+          <p:nvPr/>
+        </p:nvSpPr>
+        <p:spPr>
+          <a:xfrm>
+            <a:off x="409482" y="322952"/>
+            <a:ext cx="1903085" cy="1015663"/>
+          </a:xfrm>
+          <a:prstGeom prst="rect">
+            <a:avLst/>
+          </a:prstGeom>
+          <a:noFill/>
+        </p:spPr>
+        <p:txBody>
+          <a:bodyPr wrap="none" rtlCol="0">
+            <a:spAutoFit/>
+          </a:bodyPr>
+          <a:lstStyle/>
+          <a:p>
+            <a:r>
+              <a:rPr lang="en-US" sz="6000" b="1" dirty="0">
+                <a:solidFill>
+                  <a:schemeClr val="accent4">
+                    <a:lumMod val="75000"/>
+                  </a:schemeClr>
+                </a:solidFill>
+              </a:rPr>
+              <a:t>D</a:t>
+            </a:r>
+            <a:r>
+              <a:rPr lang="en-US" sz="6000" b="1" noProof="0" dirty="0">
+                <a:solidFill>
+                  <a:schemeClr val="accent4">
+                    <a:lumMod val="75000"/>
+                  </a:schemeClr>
+                </a:solidFill>
+              </a:rPr>
+              <a:t>DM</a:t>
+            </a:r>
+          </a:p>
+        </p:txBody>
+      </p:sp>
     </p:spTree>
     <p:extLst>
       <p:ext uri="{BB962C8B-B14F-4D97-AF65-F5344CB8AC3E}">

--- a/spec/InformationStructure/diagrams/InformationStructure.pptx
+++ b/spec/InformationStructure/diagrams/InformationStructure.pptx
@@ -127,6 +127,171 @@
 </p:presentation>
 </file>
 
+<file path=ppt/revisionInfo.xml><?xml version="1.0" encoding="utf-8"?>
+<p1510:revInfo xmlns:a="http://schemas.openxmlformats.org/drawingml/2006/main" xmlns:r="http://schemas.openxmlformats.org/officeDocument/2006/relationships" xmlns:p1510="http://schemas.microsoft.com/office/powerpoint/2015/10/main">
+  <p1510:revLst>
+    <p1510:client id="{1C0654AB-2524-425A-85F6-5CF4B22CDFD2}" v="1" dt="2025-06-27T15:40:55.423"/>
+  </p1510:revLst>
+</p1510:revInfo>
+</file>
+
+<file path=ppt/changesInfos/changesInfo1.xml><?xml version="1.0" encoding="utf-8"?>
+<pc:chgInfo xmlns:a="http://schemas.openxmlformats.org/drawingml/2006/main" xmlns:r="http://schemas.openxmlformats.org/officeDocument/2006/relationships" xmlns:ac="http://schemas.microsoft.com/office/drawing/2013/main/command" xmlns:pc="http://schemas.microsoft.com/office/powerpoint/2013/main/command">
+  <pc:docChgLst>
+    <pc:chgData name="Thorsten Heinze" userId="8373ecd2-b5b9-4b48-849d-3bee853f6cc0" providerId="ADAL" clId="{1C0654AB-2524-425A-85F6-5CF4B22CDFD2}"/>
+    <pc:docChg chg="undo custSel modSld">
+      <pc:chgData name="Thorsten Heinze" userId="8373ecd2-b5b9-4b48-849d-3bee853f6cc0" providerId="ADAL" clId="{1C0654AB-2524-425A-85F6-5CF4B22CDFD2}" dt="2025-06-27T15:47:13.050" v="25"/>
+      <pc:docMkLst>
+        <pc:docMk/>
+      </pc:docMkLst>
+      <pc:sldChg chg="addSp modSp mod">
+        <pc:chgData name="Thorsten Heinze" userId="8373ecd2-b5b9-4b48-849d-3bee853f6cc0" providerId="ADAL" clId="{1C0654AB-2524-425A-85F6-5CF4B22CDFD2}" dt="2025-06-27T15:47:13.050" v="25"/>
+        <pc:sldMkLst>
+          <pc:docMk/>
+          <pc:sldMk cId="1618497423" sldId="302"/>
+        </pc:sldMkLst>
+        <pc:spChg chg="add mod">
+          <ac:chgData name="Thorsten Heinze" userId="8373ecd2-b5b9-4b48-849d-3bee853f6cc0" providerId="ADAL" clId="{1C0654AB-2524-425A-85F6-5CF4B22CDFD2}" dt="2025-06-27T15:40:55.414" v="8"/>
+          <ac:spMkLst>
+            <pc:docMk/>
+            <pc:sldMk cId="1618497423" sldId="302"/>
+            <ac:spMk id="19" creationId="{4356CF41-7A92-9DEA-F805-BE046ED8D18A}"/>
+          </ac:spMkLst>
+        </pc:spChg>
+        <pc:spChg chg="mod">
+          <ac:chgData name="Thorsten Heinze" userId="8373ecd2-b5b9-4b48-849d-3bee853f6cc0" providerId="ADAL" clId="{1C0654AB-2524-425A-85F6-5CF4B22CDFD2}" dt="2025-06-27T15:45:39.362" v="15" actId="14100"/>
+          <ac:spMkLst>
+            <pc:docMk/>
+            <pc:sldMk cId="1618497423" sldId="302"/>
+            <ac:spMk id="38" creationId="{D6180C09-80DE-B8FB-D98B-2D79204A965B}"/>
+          </ac:spMkLst>
+        </pc:spChg>
+        <pc:spChg chg="mod">
+          <ac:chgData name="Thorsten Heinze" userId="8373ecd2-b5b9-4b48-849d-3bee853f6cc0" providerId="ADAL" clId="{1C0654AB-2524-425A-85F6-5CF4B22CDFD2}" dt="2025-06-27T15:47:03.381" v="24" actId="20577"/>
+          <ac:spMkLst>
+            <pc:docMk/>
+            <pc:sldMk cId="1618497423" sldId="302"/>
+            <ac:spMk id="44" creationId="{DDD580D5-0B17-FEDA-A7D7-84BCAB8DD12F}"/>
+          </ac:spMkLst>
+        </pc:spChg>
+        <pc:spChg chg="mod">
+          <ac:chgData name="Thorsten Heinze" userId="8373ecd2-b5b9-4b48-849d-3bee853f6cc0" providerId="ADAL" clId="{1C0654AB-2524-425A-85F6-5CF4B22CDFD2}" dt="2025-06-27T15:45:23.424" v="12" actId="14100"/>
+          <ac:spMkLst>
+            <pc:docMk/>
+            <pc:sldMk cId="1618497423" sldId="302"/>
+            <ac:spMk id="90" creationId="{8E303147-0B25-3184-7D85-94E7D636036D}"/>
+          </ac:spMkLst>
+        </pc:spChg>
+        <pc:spChg chg="mod">
+          <ac:chgData name="Thorsten Heinze" userId="8373ecd2-b5b9-4b48-849d-3bee853f6cc0" providerId="ADAL" clId="{1C0654AB-2524-425A-85F6-5CF4B22CDFD2}" dt="2025-06-27T15:39:45.601" v="3" actId="14100"/>
+          <ac:spMkLst>
+            <pc:docMk/>
+            <pc:sldMk cId="1618497423" sldId="302"/>
+            <ac:spMk id="106" creationId="{F747143B-B3B4-B85A-5627-F9408617ABE2}"/>
+          </ac:spMkLst>
+        </pc:spChg>
+        <pc:spChg chg="mod">
+          <ac:chgData name="Thorsten Heinze" userId="8373ecd2-b5b9-4b48-849d-3bee853f6cc0" providerId="ADAL" clId="{1C0654AB-2524-425A-85F6-5CF4B22CDFD2}" dt="2025-06-27T15:40:03.876" v="7"/>
+          <ac:spMkLst>
+            <pc:docMk/>
+            <pc:sldMk cId="1618497423" sldId="302"/>
+            <ac:spMk id="107" creationId="{7A3FD0BE-3B75-BB64-F778-19F01E8B6CF0}"/>
+          </ac:spMkLst>
+        </pc:spChg>
+        <pc:spChg chg="mod">
+          <ac:chgData name="Thorsten Heinze" userId="8373ecd2-b5b9-4b48-849d-3bee853f6cc0" providerId="ADAL" clId="{1C0654AB-2524-425A-85F6-5CF4B22CDFD2}" dt="2025-06-27T15:44:58.012" v="9"/>
+          <ac:spMkLst>
+            <pc:docMk/>
+            <pc:sldMk cId="1618497423" sldId="302"/>
+            <ac:spMk id="111" creationId="{6DB0620F-1934-09FB-E04A-D999B2526230}"/>
+          </ac:spMkLst>
+        </pc:spChg>
+        <pc:spChg chg="mod">
+          <ac:chgData name="Thorsten Heinze" userId="8373ecd2-b5b9-4b48-849d-3bee853f6cc0" providerId="ADAL" clId="{1C0654AB-2524-425A-85F6-5CF4B22CDFD2}" dt="2025-06-27T15:46:03.358" v="18" actId="14100"/>
+          <ac:spMkLst>
+            <pc:docMk/>
+            <pc:sldMk cId="1618497423" sldId="302"/>
+            <ac:spMk id="156" creationId="{A2DD233B-D011-6931-E9B5-093D279C83E7}"/>
+          </ac:spMkLst>
+        </pc:spChg>
+        <pc:spChg chg="mod">
+          <ac:chgData name="Thorsten Heinze" userId="8373ecd2-b5b9-4b48-849d-3bee853f6cc0" providerId="ADAL" clId="{1C0654AB-2524-425A-85F6-5CF4B22CDFD2}" dt="2025-06-27T15:46:33.453" v="22" actId="14100"/>
+          <ac:spMkLst>
+            <pc:docMk/>
+            <pc:sldMk cId="1618497423" sldId="302"/>
+            <ac:spMk id="168" creationId="{CF8AC0D9-3EBA-3573-B442-A8577BA331CA}"/>
+          </ac:spMkLst>
+        </pc:spChg>
+        <pc:spChg chg="mod">
+          <ac:chgData name="Thorsten Heinze" userId="8373ecd2-b5b9-4b48-849d-3bee853f6cc0" providerId="ADAL" clId="{1C0654AB-2524-425A-85F6-5CF4B22CDFD2}" dt="2025-06-27T15:47:13.050" v="25"/>
+          <ac:spMkLst>
+            <pc:docMk/>
+            <pc:sldMk cId="1618497423" sldId="302"/>
+            <ac:spMk id="232" creationId="{D24AFCEE-3415-2633-C02F-42F690432881}"/>
+          </ac:spMkLst>
+        </pc:spChg>
+        <pc:cxnChg chg="mod">
+          <ac:chgData name="Thorsten Heinze" userId="8373ecd2-b5b9-4b48-849d-3bee853f6cc0" providerId="ADAL" clId="{1C0654AB-2524-425A-85F6-5CF4B22CDFD2}" dt="2025-06-27T15:45:39.362" v="15" actId="14100"/>
+          <ac:cxnSpMkLst>
+            <pc:docMk/>
+            <pc:sldMk cId="1618497423" sldId="302"/>
+            <ac:cxnSpMk id="41" creationId="{12D49DF6-85AB-4875-3211-DF09274DF36A}"/>
+          </ac:cxnSpMkLst>
+        </pc:cxnChg>
+        <pc:cxnChg chg="mod">
+          <ac:chgData name="Thorsten Heinze" userId="8373ecd2-b5b9-4b48-849d-3bee853f6cc0" providerId="ADAL" clId="{1C0654AB-2524-425A-85F6-5CF4B22CDFD2}" dt="2025-06-27T15:45:23.424" v="12" actId="14100"/>
+          <ac:cxnSpMkLst>
+            <pc:docMk/>
+            <pc:sldMk cId="1618497423" sldId="302"/>
+            <ac:cxnSpMk id="91" creationId="{3065BECA-C0D8-DABC-4838-03A9DADBC8E4}"/>
+          </ac:cxnSpMkLst>
+        </pc:cxnChg>
+        <pc:cxnChg chg="mod">
+          <ac:chgData name="Thorsten Heinze" userId="8373ecd2-b5b9-4b48-849d-3bee853f6cc0" providerId="ADAL" clId="{1C0654AB-2524-425A-85F6-5CF4B22CDFD2}" dt="2025-06-27T15:40:01.852" v="6" actId="14100"/>
+          <ac:cxnSpMkLst>
+            <pc:docMk/>
+            <pc:sldMk cId="1618497423" sldId="302"/>
+            <ac:cxnSpMk id="110" creationId="{67FF7427-9093-4E22-3C85-E5B709264C91}"/>
+          </ac:cxnSpMkLst>
+        </pc:cxnChg>
+        <pc:cxnChg chg="mod">
+          <ac:chgData name="Thorsten Heinze" userId="8373ecd2-b5b9-4b48-849d-3bee853f6cc0" providerId="ADAL" clId="{1C0654AB-2524-425A-85F6-5CF4B22CDFD2}" dt="2025-06-27T15:39:45.601" v="3" actId="14100"/>
+          <ac:cxnSpMkLst>
+            <pc:docMk/>
+            <pc:sldMk cId="1618497423" sldId="302"/>
+            <ac:cxnSpMk id="112" creationId="{F0EDDFFC-10F3-7D0E-6D6A-F2A10E9C76E4}"/>
+          </ac:cxnSpMkLst>
+        </pc:cxnChg>
+        <pc:cxnChg chg="mod">
+          <ac:chgData name="Thorsten Heinze" userId="8373ecd2-b5b9-4b48-849d-3bee853f6cc0" providerId="ADAL" clId="{1C0654AB-2524-425A-85F6-5CF4B22CDFD2}" dt="2025-06-27T15:39:55.616" v="5" actId="14100"/>
+          <ac:cxnSpMkLst>
+            <pc:docMk/>
+            <pc:sldMk cId="1618497423" sldId="302"/>
+            <ac:cxnSpMk id="113" creationId="{6EEB9E49-DE20-9A29-0EB6-0283382BCACA}"/>
+          </ac:cxnSpMkLst>
+        </pc:cxnChg>
+        <pc:cxnChg chg="mod">
+          <ac:chgData name="Thorsten Heinze" userId="8373ecd2-b5b9-4b48-849d-3bee853f6cc0" providerId="ADAL" clId="{1C0654AB-2524-425A-85F6-5CF4B22CDFD2}" dt="2025-06-27T15:46:03.358" v="18" actId="14100"/>
+          <ac:cxnSpMkLst>
+            <pc:docMk/>
+            <pc:sldMk cId="1618497423" sldId="302"/>
+            <ac:cxnSpMk id="159" creationId="{E0072063-E071-5BFA-07F7-75E642B28E77}"/>
+          </ac:cxnSpMkLst>
+        </pc:cxnChg>
+        <pc:cxnChg chg="mod">
+          <ac:chgData name="Thorsten Heinze" userId="8373ecd2-b5b9-4b48-849d-3bee853f6cc0" providerId="ADAL" clId="{1C0654AB-2524-425A-85F6-5CF4B22CDFD2}" dt="2025-06-27T15:46:33.453" v="22" actId="14100"/>
+          <ac:cxnSpMkLst>
+            <pc:docMk/>
+            <pc:sldMk cId="1618497423" sldId="302"/>
+            <ac:cxnSpMk id="169" creationId="{BA0DE7E0-3E00-4D1E-00E4-096475C7D555}"/>
+          </ac:cxnSpMkLst>
+        </pc:cxnChg>
+      </pc:sldChg>
+    </pc:docChg>
+  </pc:docChgLst>
+</pc:chgInfo>
+</file>
+
 <file path=ppt/notesMasters/notesMaster1.xml><?xml version="1.0" encoding="utf-8"?>
 <p:notesMaster xmlns:a="http://schemas.openxmlformats.org/drawingml/2006/main" xmlns:r="http://schemas.openxmlformats.org/officeDocument/2006/relationships" xmlns:p="http://schemas.openxmlformats.org/presentationml/2006/main">
   <p:cSld>
@@ -209,7 +374,7 @@
           <a:p>
             <a:fld id="{37CCF725-7468-4D3D-9E24-A16745BBBA77}" type="datetimeFigureOut">
               <a:rPr lang="de-DE" smtClean="0"/>
-              <a:t>26.06.2025</a:t>
+              <a:t>27.06.2025</a:t>
             </a:fld>
             <a:endParaRPr lang="de-DE"/>
           </a:p>
@@ -607,7 +772,7 @@
           <a:p>
             <a:fld id="{9A2764DB-E7DF-4EA7-A1AF-05A77C280FCA}" type="datetimeFigureOut">
               <a:rPr lang="de-DE" smtClean="0"/>
-              <a:t>26.06.2025</a:t>
+              <a:t>27.06.2025</a:t>
             </a:fld>
             <a:endParaRPr lang="de-DE"/>
           </a:p>
@@ -777,7 +942,7 @@
           <a:p>
             <a:fld id="{9A2764DB-E7DF-4EA7-A1AF-05A77C280FCA}" type="datetimeFigureOut">
               <a:rPr lang="de-DE" smtClean="0"/>
-              <a:t>26.06.2025</a:t>
+              <a:t>27.06.2025</a:t>
             </a:fld>
             <a:endParaRPr lang="de-DE"/>
           </a:p>
@@ -957,7 +1122,7 @@
           <a:p>
             <a:fld id="{9A2764DB-E7DF-4EA7-A1AF-05A77C280FCA}" type="datetimeFigureOut">
               <a:rPr lang="de-DE" smtClean="0"/>
-              <a:t>26.06.2025</a:t>
+              <a:t>27.06.2025</a:t>
             </a:fld>
             <a:endParaRPr lang="de-DE"/>
           </a:p>
@@ -1127,7 +1292,7 @@
           <a:p>
             <a:fld id="{9A2764DB-E7DF-4EA7-A1AF-05A77C280FCA}" type="datetimeFigureOut">
               <a:rPr lang="de-DE" smtClean="0"/>
-              <a:t>26.06.2025</a:t>
+              <a:t>27.06.2025</a:t>
             </a:fld>
             <a:endParaRPr lang="de-DE"/>
           </a:p>
@@ -1373,7 +1538,7 @@
           <a:p>
             <a:fld id="{9A2764DB-E7DF-4EA7-A1AF-05A77C280FCA}" type="datetimeFigureOut">
               <a:rPr lang="de-DE" smtClean="0"/>
-              <a:t>26.06.2025</a:t>
+              <a:t>27.06.2025</a:t>
             </a:fld>
             <a:endParaRPr lang="de-DE"/>
           </a:p>
@@ -1605,7 +1770,7 @@
           <a:p>
             <a:fld id="{9A2764DB-E7DF-4EA7-A1AF-05A77C280FCA}" type="datetimeFigureOut">
               <a:rPr lang="de-DE" smtClean="0"/>
-              <a:t>26.06.2025</a:t>
+              <a:t>27.06.2025</a:t>
             </a:fld>
             <a:endParaRPr lang="de-DE"/>
           </a:p>
@@ -1972,7 +2137,7 @@
           <a:p>
             <a:fld id="{9A2764DB-E7DF-4EA7-A1AF-05A77C280FCA}" type="datetimeFigureOut">
               <a:rPr lang="de-DE" smtClean="0"/>
-              <a:t>26.06.2025</a:t>
+              <a:t>27.06.2025</a:t>
             </a:fld>
             <a:endParaRPr lang="de-DE"/>
           </a:p>
@@ -2090,7 +2255,7 @@
           <a:p>
             <a:fld id="{9A2764DB-E7DF-4EA7-A1AF-05A77C280FCA}" type="datetimeFigureOut">
               <a:rPr lang="de-DE" smtClean="0"/>
-              <a:t>26.06.2025</a:t>
+              <a:t>27.06.2025</a:t>
             </a:fld>
             <a:endParaRPr lang="de-DE"/>
           </a:p>
@@ -2185,7 +2350,7 @@
           <a:p>
             <a:fld id="{9A2764DB-E7DF-4EA7-A1AF-05A77C280FCA}" type="datetimeFigureOut">
               <a:rPr lang="de-DE" smtClean="0"/>
-              <a:t>26.06.2025</a:t>
+              <a:t>27.06.2025</a:t>
             </a:fld>
             <a:endParaRPr lang="de-DE"/>
           </a:p>
@@ -2462,7 +2627,7 @@
           <a:p>
             <a:fld id="{9A2764DB-E7DF-4EA7-A1AF-05A77C280FCA}" type="datetimeFigureOut">
               <a:rPr lang="de-DE" smtClean="0"/>
-              <a:t>26.06.2025</a:t>
+              <a:t>27.06.2025</a:t>
             </a:fld>
             <a:endParaRPr lang="de-DE"/>
           </a:p>
@@ -2719,7 +2884,7 @@
           <a:p>
             <a:fld id="{9A2764DB-E7DF-4EA7-A1AF-05A77C280FCA}" type="datetimeFigureOut">
               <a:rPr lang="de-DE" smtClean="0"/>
-              <a:t>26.06.2025</a:t>
+              <a:t>27.06.2025</a:t>
             </a:fld>
             <a:endParaRPr lang="de-DE"/>
           </a:p>
@@ -2932,7 +3097,7 @@
           <a:p>
             <a:fld id="{9A2764DB-E7DF-4EA7-A1AF-05A77C280FCA}" type="datetimeFigureOut">
               <a:rPr lang="de-DE" smtClean="0"/>
-              <a:t>26.06.2025</a:t>
+              <a:t>27.06.2025</a:t>
             </a:fld>
             <a:endParaRPr lang="de-DE"/>
           </a:p>
@@ -4207,7 +4372,7 @@
         <p:spPr>
           <a:xfrm>
             <a:off x="3352800" y="12758111"/>
-            <a:ext cx="1158235" cy="274134"/>
+            <a:ext cx="1158235" cy="442114"/>
           </a:xfrm>
           <a:prstGeom prst="rect">
             <a:avLst/>
@@ -4267,6 +4432,65 @@
               </a:rPr>
               <a:t>-client</a:t>
             </a:r>
+          </a:p>
+          <a:p>
+            <a:pPr defTabSz="914400"/>
+            <a:r>
+              <a:rPr lang="de-DE" sz="800" kern="0" dirty="0" err="1">
+                <a:solidFill>
+                  <a:prstClr val="black"/>
+                </a:solidFill>
+                <a:highlight>
+                  <a:srgbClr val="FFFF00"/>
+                </a:highlight>
+                <a:latin typeface="Calibri" panose="020F0502020204030204"/>
+              </a:rPr>
+              <a:t>netconfUserName</a:t>
+            </a:r>
+            <a:endParaRPr lang="de-DE" sz="800" kern="0" dirty="0">
+              <a:solidFill>
+                <a:prstClr val="black"/>
+              </a:solidFill>
+              <a:highlight>
+                <a:srgbClr val="FFFF00"/>
+              </a:highlight>
+              <a:latin typeface="Calibri" panose="020F0502020204030204"/>
+            </a:endParaRPr>
+          </a:p>
+          <a:p>
+            <a:pPr defTabSz="914400"/>
+            <a:r>
+              <a:rPr lang="de-DE" sz="800" kern="0" dirty="0" err="1">
+                <a:solidFill>
+                  <a:prstClr val="black"/>
+                </a:solidFill>
+                <a:highlight>
+                  <a:srgbClr val="FFFF00"/>
+                </a:highlight>
+                <a:latin typeface="Calibri" panose="020F0502020204030204"/>
+              </a:rPr>
+              <a:t>netconfUserPassword</a:t>
+            </a:r>
+            <a:endParaRPr lang="de-DE" sz="800" kern="0" dirty="0">
+              <a:solidFill>
+                <a:prstClr val="black"/>
+              </a:solidFill>
+              <a:highlight>
+                <a:srgbClr val="FFFF00"/>
+              </a:highlight>
+              <a:latin typeface="Calibri" panose="020F0502020204030204"/>
+            </a:endParaRPr>
+          </a:p>
+          <a:p>
+            <a:pPr defTabSz="914400">
+              <a:defRPr/>
+            </a:pPr>
+            <a:endParaRPr lang="de-DE" sz="800" kern="0" dirty="0">
+              <a:solidFill>
+                <a:prstClr val="black"/>
+              </a:solidFill>
+              <a:latin typeface="Calibri" panose="020F0502020204030204"/>
+            </a:endParaRPr>
           </a:p>
         </p:txBody>
       </p:sp>
@@ -4288,8 +4512,8 @@
         </p:nvCxnSpPr>
         <p:spPr>
           <a:xfrm flipV="1">
-            <a:off x="2932855" y="12895178"/>
-            <a:ext cx="419945" cy="97682"/>
+            <a:off x="2932855" y="12979168"/>
+            <a:ext cx="419945" cy="13692"/>
           </a:xfrm>
           <a:prstGeom prst="straightConnector1">
             <a:avLst/>
@@ -4867,7 +5091,7 @@
         <p:spPr>
           <a:xfrm>
             <a:off x="6991939" y="12732458"/>
-            <a:ext cx="1537099" cy="258271"/>
+            <a:ext cx="1537099" cy="445572"/>
           </a:xfrm>
           <a:prstGeom prst="rect">
             <a:avLst/>
@@ -4926,79 +5150,6 @@
               <a:t>-server</a:t>
             </a:r>
           </a:p>
-        </p:txBody>
-      </p:sp>
-      <p:cxnSp>
-        <p:nvCxnSpPr>
-          <p:cNvPr id="41" name="Gerade Verbindung mit Pfeil 40">
-            <a:extLst>
-              <a:ext uri="{FF2B5EF4-FFF2-40B4-BE49-F238E27FC236}">
-                <a16:creationId xmlns:a16="http://schemas.microsoft.com/office/drawing/2014/main" id="{12D49DF6-85AB-4875-3211-DF09274DF36A}"/>
-              </a:ext>
-            </a:extLst>
-          </p:cNvPr>
-          <p:cNvCxnSpPr>
-            <a:cxnSpLocks/>
-            <a:stCxn id="29" idx="1"/>
-            <a:endCxn id="38" idx="3"/>
-          </p:cNvCxnSpPr>
-          <p:nvPr/>
-        </p:nvCxnSpPr>
-        <p:spPr>
-          <a:xfrm flipH="1" flipV="1">
-            <a:off x="8529038" y="12861594"/>
-            <a:ext cx="573606" cy="132806"/>
-          </a:xfrm>
-          <a:prstGeom prst="straightConnector1">
-            <a:avLst/>
-          </a:prstGeom>
-          <a:noFill/>
-          <a:ln w="6350" cap="flat" cmpd="sng" algn="ctr">
-            <a:solidFill>
-              <a:srgbClr val="5B9BD5"/>
-            </a:solidFill>
-            <a:prstDash val="solid"/>
-            <a:miter lim="800000"/>
-            <a:tailEnd type="triangle"/>
-          </a:ln>
-          <a:effectLst/>
-        </p:spPr>
-      </p:cxnSp>
-      <p:sp>
-        <p:nvSpPr>
-          <p:cNvPr id="44" name="Rechteck 43">
-            <a:extLst>
-              <a:ext uri="{FF2B5EF4-FFF2-40B4-BE49-F238E27FC236}">
-                <a16:creationId xmlns:a16="http://schemas.microsoft.com/office/drawing/2014/main" id="{DDD580D5-0B17-FEDA-A7D7-84BCAB8DD12F}"/>
-              </a:ext>
-            </a:extLst>
-          </p:cNvPr>
-          <p:cNvSpPr/>
-          <p:nvPr/>
-        </p:nvSpPr>
-        <p:spPr>
-          <a:xfrm>
-            <a:off x="13537391" y="12788610"/>
-            <a:ext cx="1682087" cy="487489"/>
-          </a:xfrm>
-          <a:prstGeom prst="rect">
-            <a:avLst/>
-          </a:prstGeom>
-          <a:solidFill>
-            <a:sysClr val="window" lastClr="FFFFFF"/>
-          </a:solidFill>
-          <a:ln w="12700" cap="flat" cmpd="sng" algn="ctr">
-            <a:solidFill>
-              <a:srgbClr val="A5A5A5"/>
-            </a:solidFill>
-            <a:prstDash val="solid"/>
-            <a:miter lim="800000"/>
-          </a:ln>
-          <a:effectLst/>
-        </p:spPr>
-        <p:txBody>
-          <a:bodyPr lIns="36000" tIns="36000" rIns="36000" bIns="36000" rtlCol="0" anchor="t"/>
-          <a:lstStyle/>
           <a:p>
             <a:pPr defTabSz="914400"/>
             <a:r>
@@ -5006,53 +5157,20 @@
                 <a:solidFill>
                   <a:prstClr val="black"/>
                 </a:solidFill>
+                <a:highlight>
+                  <a:srgbClr val="FFFF00"/>
+                </a:highlight>
                 <a:latin typeface="Calibri" panose="020F0502020204030204"/>
               </a:rPr>
-              <a:t>local-id</a:t>
-            </a:r>
-            <a:r>
-              <a:rPr lang="de-DE" sz="800" kern="0" dirty="0">
-                <a:solidFill>
-                  <a:prstClr val="black"/>
-                </a:solidFill>
-                <a:latin typeface="Calibri" panose="020F0502020204030204"/>
-              </a:rPr>
-              <a:t>=</a:t>
-            </a:r>
-            <a:r>
-              <a:rPr lang="de-DE" sz="800" kern="0" dirty="0" err="1">
-                <a:solidFill>
-                  <a:prstClr val="black"/>
-                </a:solidFill>
-                <a:latin typeface="Calibri" panose="020F0502020204030204"/>
-              </a:rPr>
-              <a:t>snmp</a:t>
-            </a:r>
-            <a:r>
-              <a:rPr lang="de-DE" sz="800" kern="0" dirty="0">
-                <a:solidFill>
-                  <a:prstClr val="black"/>
-                </a:solidFill>
-                <a:latin typeface="Calibri" panose="020F0502020204030204"/>
-              </a:rPr>
-              <a:t>-client</a:t>
-            </a:r>
-          </a:p>
-          <a:p>
-            <a:pPr defTabSz="914400"/>
-            <a:r>
-              <a:rPr lang="de-DE" sz="800" kern="0" dirty="0" err="1">
-                <a:solidFill>
-                  <a:prstClr val="black"/>
-                </a:solidFill>
-                <a:latin typeface="Calibri" panose="020F0502020204030204"/>
-              </a:rPr>
-              <a:t>mediatorUserName</a:t>
+              <a:t>netconfUserName</a:t>
             </a:r>
             <a:endParaRPr lang="de-DE" sz="800" kern="0" dirty="0">
               <a:solidFill>
                 <a:prstClr val="black"/>
               </a:solidFill>
+              <a:highlight>
+                <a:srgbClr val="FFFF00"/>
+              </a:highlight>
               <a:latin typeface="Calibri" panose="020F0502020204030204"/>
             </a:endParaRPr>
           </a:p>
@@ -5063,14 +5181,20 @@
                 <a:solidFill>
                   <a:prstClr val="black"/>
                 </a:solidFill>
+                <a:highlight>
+                  <a:srgbClr val="FFFF00"/>
+                </a:highlight>
                 <a:latin typeface="Calibri" panose="020F0502020204030204"/>
               </a:rPr>
-              <a:t>mediatorUserPassword</a:t>
+              <a:t>netconfUserPassword</a:t>
             </a:r>
             <a:endParaRPr lang="de-DE" sz="800" kern="0" dirty="0">
               <a:solidFill>
                 <a:prstClr val="black"/>
               </a:solidFill>
+              <a:highlight>
+                <a:srgbClr val="FFFF00"/>
+              </a:highlight>
               <a:latin typeface="Calibri" panose="020F0502020204030204"/>
             </a:endParaRPr>
           </a:p>
@@ -5087,6 +5211,214 @@
       </p:sp>
       <p:cxnSp>
         <p:nvCxnSpPr>
+          <p:cNvPr id="41" name="Gerade Verbindung mit Pfeil 40">
+            <a:extLst>
+              <a:ext uri="{FF2B5EF4-FFF2-40B4-BE49-F238E27FC236}">
+                <a16:creationId xmlns:a16="http://schemas.microsoft.com/office/drawing/2014/main" id="{12D49DF6-85AB-4875-3211-DF09274DF36A}"/>
+              </a:ext>
+            </a:extLst>
+          </p:cNvPr>
+          <p:cNvCxnSpPr>
+            <a:cxnSpLocks/>
+            <a:stCxn id="29" idx="1"/>
+            <a:endCxn id="38" idx="3"/>
+          </p:cNvCxnSpPr>
+          <p:nvPr/>
+        </p:nvCxnSpPr>
+        <p:spPr>
+          <a:xfrm flipH="1" flipV="1">
+            <a:off x="8529038" y="12955244"/>
+            <a:ext cx="573606" cy="39156"/>
+          </a:xfrm>
+          <a:prstGeom prst="straightConnector1">
+            <a:avLst/>
+          </a:prstGeom>
+          <a:noFill/>
+          <a:ln w="6350" cap="flat" cmpd="sng" algn="ctr">
+            <a:solidFill>
+              <a:srgbClr val="5B9BD5"/>
+            </a:solidFill>
+            <a:prstDash val="solid"/>
+            <a:miter lim="800000"/>
+            <a:tailEnd type="triangle"/>
+          </a:ln>
+          <a:effectLst/>
+        </p:spPr>
+      </p:cxnSp>
+      <p:sp>
+        <p:nvSpPr>
+          <p:cNvPr id="44" name="Rechteck 43">
+            <a:extLst>
+              <a:ext uri="{FF2B5EF4-FFF2-40B4-BE49-F238E27FC236}">
+                <a16:creationId xmlns:a16="http://schemas.microsoft.com/office/drawing/2014/main" id="{DDD580D5-0B17-FEDA-A7D7-84BCAB8DD12F}"/>
+              </a:ext>
+            </a:extLst>
+          </p:cNvPr>
+          <p:cNvSpPr/>
+          <p:nvPr/>
+        </p:nvSpPr>
+        <p:spPr>
+          <a:xfrm>
+            <a:off x="13537391" y="12788610"/>
+            <a:ext cx="1682087" cy="487489"/>
+          </a:xfrm>
+          <a:prstGeom prst="rect">
+            <a:avLst/>
+          </a:prstGeom>
+          <a:solidFill>
+            <a:sysClr val="window" lastClr="FFFFFF"/>
+          </a:solidFill>
+          <a:ln w="12700" cap="flat" cmpd="sng" algn="ctr">
+            <a:solidFill>
+              <a:srgbClr val="A5A5A5"/>
+            </a:solidFill>
+            <a:prstDash val="solid"/>
+            <a:miter lim="800000"/>
+          </a:ln>
+          <a:effectLst/>
+        </p:spPr>
+        <p:txBody>
+          <a:bodyPr lIns="36000" tIns="36000" rIns="36000" bIns="36000" rtlCol="0" anchor="t"/>
+          <a:lstStyle/>
+          <a:p>
+            <a:pPr defTabSz="914400"/>
+            <a:r>
+              <a:rPr lang="de-DE" sz="800" kern="0" dirty="0" err="1">
+                <a:solidFill>
+                  <a:prstClr val="black"/>
+                </a:solidFill>
+                <a:latin typeface="Calibri" panose="020F0502020204030204"/>
+              </a:rPr>
+              <a:t>local-id</a:t>
+            </a:r>
+            <a:r>
+              <a:rPr lang="de-DE" sz="800" kern="0" dirty="0">
+                <a:solidFill>
+                  <a:prstClr val="black"/>
+                </a:solidFill>
+                <a:latin typeface="Calibri" panose="020F0502020204030204"/>
+              </a:rPr>
+              <a:t>=</a:t>
+            </a:r>
+            <a:r>
+              <a:rPr lang="de-DE" sz="800" kern="0" dirty="0" err="1">
+                <a:solidFill>
+                  <a:prstClr val="black"/>
+                </a:solidFill>
+                <a:latin typeface="Calibri" panose="020F0502020204030204"/>
+              </a:rPr>
+              <a:t>snmp</a:t>
+            </a:r>
+            <a:r>
+              <a:rPr lang="de-DE" sz="800" kern="0" dirty="0">
+                <a:solidFill>
+                  <a:prstClr val="black"/>
+                </a:solidFill>
+                <a:latin typeface="Calibri" panose="020F0502020204030204"/>
+              </a:rPr>
+              <a:t>-client</a:t>
+            </a:r>
+          </a:p>
+          <a:p>
+            <a:pPr defTabSz="914400"/>
+            <a:r>
+              <a:rPr lang="de-DE" sz="800" strike="sngStrike" kern="0" dirty="0" err="1">
+                <a:solidFill>
+                  <a:prstClr val="black"/>
+                </a:solidFill>
+                <a:highlight>
+                  <a:srgbClr val="FFFF00"/>
+                </a:highlight>
+                <a:latin typeface="Calibri" panose="020F0502020204030204"/>
+              </a:rPr>
+              <a:t>mediatorUserName</a:t>
+            </a:r>
+            <a:endParaRPr lang="de-DE" sz="800" strike="sngStrike" kern="0" dirty="0">
+              <a:solidFill>
+                <a:prstClr val="black"/>
+              </a:solidFill>
+              <a:highlight>
+                <a:srgbClr val="FFFF00"/>
+              </a:highlight>
+              <a:latin typeface="Calibri" panose="020F0502020204030204"/>
+            </a:endParaRPr>
+          </a:p>
+          <a:p>
+            <a:pPr defTabSz="914400"/>
+            <a:r>
+              <a:rPr lang="de-DE" sz="800" strike="sngStrike" kern="0" dirty="0" err="1">
+                <a:solidFill>
+                  <a:prstClr val="black"/>
+                </a:solidFill>
+                <a:highlight>
+                  <a:srgbClr val="FFFF00"/>
+                </a:highlight>
+                <a:latin typeface="Calibri" panose="020F0502020204030204"/>
+              </a:rPr>
+              <a:t>mediatorUserPassword</a:t>
+            </a:r>
+            <a:endParaRPr lang="de-DE" sz="800" strike="sngStrike" kern="0" dirty="0">
+              <a:solidFill>
+                <a:prstClr val="black"/>
+              </a:solidFill>
+              <a:highlight>
+                <a:srgbClr val="FFFF00"/>
+              </a:highlight>
+              <a:latin typeface="Calibri" panose="020F0502020204030204"/>
+            </a:endParaRPr>
+          </a:p>
+          <a:p>
+            <a:pPr defTabSz="914400"/>
+            <a:r>
+              <a:rPr lang="de-DE" sz="800" kern="0" dirty="0" err="1">
+                <a:solidFill>
+                  <a:prstClr val="black"/>
+                </a:solidFill>
+                <a:highlight>
+                  <a:srgbClr val="FFFF00"/>
+                </a:highlight>
+                <a:latin typeface="Calibri" panose="020F0502020204030204"/>
+              </a:rPr>
+              <a:t>snmpUserName</a:t>
+            </a:r>
+            <a:endParaRPr lang="de-DE" sz="800" kern="0" dirty="0">
+              <a:solidFill>
+                <a:prstClr val="black"/>
+              </a:solidFill>
+              <a:highlight>
+                <a:srgbClr val="FFFF00"/>
+              </a:highlight>
+              <a:latin typeface="Calibri" panose="020F0502020204030204"/>
+            </a:endParaRPr>
+          </a:p>
+          <a:p>
+            <a:pPr defTabSz="914400"/>
+            <a:r>
+              <a:rPr lang="de-DE" sz="800" kern="0" dirty="0" err="1">
+                <a:solidFill>
+                  <a:prstClr val="black"/>
+                </a:solidFill>
+                <a:highlight>
+                  <a:srgbClr val="FFFF00"/>
+                </a:highlight>
+                <a:latin typeface="Calibri" panose="020F0502020204030204"/>
+              </a:rPr>
+              <a:t>snmpUserPassword</a:t>
+            </a:r>
+            <a:endParaRPr lang="de-DE" sz="800" kern="0" dirty="0">
+              <a:solidFill>
+                <a:prstClr val="black"/>
+              </a:solidFill>
+              <a:highlight>
+                <a:srgbClr val="FFFF00"/>
+              </a:highlight>
+              <a:latin typeface="Calibri" panose="020F0502020204030204"/>
+            </a:endParaRPr>
+          </a:p>
+        </p:txBody>
+      </p:sp>
+      <p:cxnSp>
+        <p:nvCxnSpPr>
           <p:cNvPr id="45" name="Gerade Verbindung mit Pfeil 44">
             <a:extLst>
               <a:ext uri="{FF2B5EF4-FFF2-40B4-BE49-F238E27FC236}">
@@ -5603,8 +5935,8 @@
         </p:nvSpPr>
         <p:spPr>
           <a:xfrm>
-            <a:off x="6851185" y="9659933"/>
-            <a:ext cx="1815783" cy="606622"/>
+            <a:off x="6851185" y="9659932"/>
+            <a:ext cx="1815783" cy="456959"/>
           </a:xfrm>
           <a:prstGeom prst="rect">
             <a:avLst/>
@@ -5648,13 +5980,218 @@
           <a:p>
             <a:pPr defTabSz="914400"/>
             <a:r>
+              <a:rPr lang="de-DE" sz="800" strike="sngStrike" kern="0" dirty="0" err="1">
+                <a:solidFill>
+                  <a:prstClr val="black"/>
+                </a:solidFill>
+                <a:highlight>
+                  <a:srgbClr val="FFFF00"/>
+                </a:highlight>
+                <a:latin typeface="Calibri" panose="020F0502020204030204"/>
+              </a:rPr>
+              <a:t>mediatorUserName</a:t>
+            </a:r>
+            <a:endParaRPr lang="de-DE" sz="800" strike="sngStrike" kern="0" dirty="0">
+              <a:solidFill>
+                <a:prstClr val="black"/>
+              </a:solidFill>
+              <a:highlight>
+                <a:srgbClr val="FFFF00"/>
+              </a:highlight>
+              <a:latin typeface="Calibri" panose="020F0502020204030204"/>
+            </a:endParaRPr>
+          </a:p>
+          <a:p>
+            <a:pPr defTabSz="914400"/>
+            <a:r>
+              <a:rPr lang="de-DE" sz="800" strike="sngStrike" kern="0" dirty="0" err="1">
+                <a:solidFill>
+                  <a:prstClr val="black"/>
+                </a:solidFill>
+                <a:highlight>
+                  <a:srgbClr val="FFFF00"/>
+                </a:highlight>
+                <a:latin typeface="Calibri" panose="020F0502020204030204"/>
+              </a:rPr>
+              <a:t>mediatorUserPassword</a:t>
+            </a:r>
+            <a:endParaRPr lang="de-DE" sz="800" strike="sngStrike" kern="0" dirty="0">
+              <a:solidFill>
+                <a:prstClr val="black"/>
+              </a:solidFill>
+              <a:highlight>
+                <a:srgbClr val="FFFF00"/>
+              </a:highlight>
+              <a:latin typeface="Calibri" panose="020F0502020204030204"/>
+            </a:endParaRPr>
+          </a:p>
+        </p:txBody>
+      </p:sp>
+      <p:cxnSp>
+        <p:nvCxnSpPr>
+          <p:cNvPr id="158" name="Gerade Verbindung mit Pfeil 157">
+            <a:extLst>
+              <a:ext uri="{FF2B5EF4-FFF2-40B4-BE49-F238E27FC236}">
+                <a16:creationId xmlns:a16="http://schemas.microsoft.com/office/drawing/2014/main" id="{7F8AF69D-63A6-BB6A-B020-F4C20183069E}"/>
+              </a:ext>
+            </a:extLst>
+          </p:cNvPr>
+          <p:cNvCxnSpPr>
+            <a:cxnSpLocks/>
+            <a:stCxn id="145" idx="1"/>
+            <a:endCxn id="152" idx="3"/>
+          </p:cNvCxnSpPr>
+          <p:nvPr/>
+        </p:nvCxnSpPr>
+        <p:spPr>
+          <a:xfrm flipH="1">
+            <a:off x="8666968" y="9371287"/>
+            <a:ext cx="435675" cy="9488"/>
+          </a:xfrm>
+          <a:prstGeom prst="straightConnector1">
+            <a:avLst/>
+          </a:prstGeom>
+          <a:noFill/>
+          <a:ln w="6350" cap="flat" cmpd="sng" algn="ctr">
+            <a:solidFill>
+              <a:srgbClr val="5B9BD5"/>
+            </a:solidFill>
+            <a:prstDash val="solid"/>
+            <a:miter lim="800000"/>
+            <a:tailEnd type="triangle"/>
+          </a:ln>
+          <a:effectLst/>
+        </p:spPr>
+      </p:cxnSp>
+      <p:cxnSp>
+        <p:nvCxnSpPr>
+          <p:cNvPr id="159" name="Gerade Verbindung mit Pfeil 158">
+            <a:extLst>
+              <a:ext uri="{FF2B5EF4-FFF2-40B4-BE49-F238E27FC236}">
+                <a16:creationId xmlns:a16="http://schemas.microsoft.com/office/drawing/2014/main" id="{E0072063-E071-5BFA-07F7-75E642B28E77}"/>
+              </a:ext>
+            </a:extLst>
+          </p:cNvPr>
+          <p:cNvCxnSpPr>
+            <a:cxnSpLocks/>
+            <a:stCxn id="148" idx="1"/>
+            <a:endCxn id="156" idx="3"/>
+          </p:cNvCxnSpPr>
+          <p:nvPr/>
+        </p:nvCxnSpPr>
+        <p:spPr>
+          <a:xfrm flipH="1" flipV="1">
+            <a:off x="8666968" y="9888412"/>
+            <a:ext cx="435675" cy="203892"/>
+          </a:xfrm>
+          <a:prstGeom prst="straightConnector1">
+            <a:avLst/>
+          </a:prstGeom>
+          <a:noFill/>
+          <a:ln w="6350" cap="flat" cmpd="sng" algn="ctr">
+            <a:solidFill>
+              <a:srgbClr val="5B9BD5"/>
+            </a:solidFill>
+            <a:prstDash val="solid"/>
+            <a:miter lim="800000"/>
+            <a:tailEnd type="triangle"/>
+          </a:ln>
+          <a:effectLst/>
+        </p:spPr>
+      </p:cxnSp>
+      <p:sp>
+        <p:nvSpPr>
+          <p:cNvPr id="168" name="Rechteck 167">
+            <a:extLst>
+              <a:ext uri="{FF2B5EF4-FFF2-40B4-BE49-F238E27FC236}">
+                <a16:creationId xmlns:a16="http://schemas.microsoft.com/office/drawing/2014/main" id="{CF8AC0D9-3EBA-3573-B442-A8577BA331CA}"/>
+              </a:ext>
+            </a:extLst>
+          </p:cNvPr>
+          <p:cNvSpPr/>
+          <p:nvPr/>
+        </p:nvSpPr>
+        <p:spPr>
+          <a:xfrm>
+            <a:off x="8326115" y="7380577"/>
+            <a:ext cx="1815783" cy="935801"/>
+          </a:xfrm>
+          <a:prstGeom prst="rect">
+            <a:avLst/>
+          </a:prstGeom>
+          <a:solidFill>
+            <a:sysClr val="window" lastClr="FFFFFF"/>
+          </a:solidFill>
+          <a:ln w="12700" cap="flat" cmpd="sng" algn="ctr">
+            <a:solidFill>
+              <a:srgbClr val="A5A5A5"/>
+            </a:solidFill>
+            <a:prstDash val="solid"/>
+            <a:miter lim="800000"/>
+          </a:ln>
+          <a:effectLst/>
+        </p:spPr>
+        <p:txBody>
+          <a:bodyPr lIns="36000" tIns="36000" rIns="36000" bIns="36000" rtlCol="0" anchor="t"/>
+          <a:lstStyle/>
+          <a:p>
+            <a:pPr defTabSz="914400"/>
+            <a:r>
+              <a:rPr lang="de-DE" sz="800" kern="0" dirty="0">
+                <a:solidFill>
+                  <a:prstClr val="black"/>
+                </a:solidFill>
+                <a:latin typeface="Calibri" panose="020F0502020204030204"/>
+              </a:rPr>
+              <a:t>element-name=[</a:t>
+            </a:r>
+            <a:r>
               <a:rPr lang="de-DE" sz="800" kern="0" dirty="0" err="1">
                 <a:solidFill>
                   <a:prstClr val="black"/>
                 </a:solidFill>
                 <a:latin typeface="Calibri" panose="020F0502020204030204"/>
               </a:rPr>
-              <a:t>mediatorUserName</a:t>
+              <a:t>mediatorVmName</a:t>
+            </a:r>
+            <a:r>
+              <a:rPr lang="de-DE" sz="800" kern="0" dirty="0">
+                <a:solidFill>
+                  <a:prstClr val="black"/>
+                </a:solidFill>
+                <a:latin typeface="Calibri" panose="020F0502020204030204"/>
+              </a:rPr>
+              <a:t>]</a:t>
+            </a:r>
+          </a:p>
+          <a:p>
+            <a:pPr defTabSz="914400"/>
+            <a:r>
+              <a:rPr lang="de-DE" sz="800" kern="0" dirty="0" err="1">
+                <a:solidFill>
+                  <a:prstClr val="black"/>
+                </a:solidFill>
+                <a:latin typeface="Calibri" panose="020F0502020204030204"/>
+              </a:rPr>
+              <a:t>category</a:t>
+            </a:r>
+            <a:r>
+              <a:rPr lang="de-DE" sz="800" kern="0" dirty="0">
+                <a:solidFill>
+                  <a:prstClr val="black"/>
+                </a:solidFill>
+                <a:latin typeface="Calibri" panose="020F0502020204030204"/>
+              </a:rPr>
+              <a:t>=</a:t>
+            </a:r>
+            <a:r>
+              <a:rPr lang="de-DE" sz="800" kern="0" dirty="0" err="1">
+                <a:solidFill>
+                  <a:prstClr val="black"/>
+                </a:solidFill>
+                <a:latin typeface="Calibri" panose="020F0502020204030204"/>
+              </a:rPr>
+              <a:t>mediatorVm</a:t>
             </a:r>
             <a:endParaRPr lang="de-DE" sz="800" kern="0" dirty="0">
               <a:solidFill>
@@ -5666,13 +6203,40 @@
           <a:p>
             <a:pPr defTabSz="914400"/>
             <a:r>
+              <a:rPr lang="de-DE" sz="800" kern="0" dirty="0">
+                <a:solidFill>
+                  <a:prstClr val="black"/>
+                </a:solidFill>
+                <a:latin typeface="Calibri" panose="020F0502020204030204"/>
+              </a:rPr>
+              <a:t>_</a:t>
+            </a:r>
+            <a:r>
               <a:rPr lang="de-DE" sz="800" kern="0" dirty="0" err="1">
                 <a:solidFill>
                   <a:prstClr val="black"/>
                 </a:solidFill>
                 <a:latin typeface="Calibri" panose="020F0502020204030204"/>
               </a:rPr>
-              <a:t>mediatorUserPassword</a:t>
+              <a:t>template</a:t>
+            </a:r>
+            <a:r>
+              <a:rPr lang="de-DE" sz="800" kern="0" dirty="0">
+                <a:solidFill>
+                  <a:prstClr val="black"/>
+                </a:solidFill>
+                <a:latin typeface="Calibri" panose="020F0502020204030204"/>
+              </a:rPr>
+              <a:t>= </a:t>
+            </a:r>
+            <a:r>
+              <a:rPr lang="de-DE" sz="800" kern="0" dirty="0" err="1">
+                <a:solidFill>
+                  <a:prstClr val="black"/>
+                </a:solidFill>
+                <a:latin typeface="Calibri" panose="020F0502020204030204"/>
+              </a:rPr>
+              <a:t>mediatorVmTemplateName</a:t>
             </a:r>
             <a:endParaRPr lang="de-DE" sz="800" kern="0" dirty="0">
               <a:solidFill>
@@ -5681,223 +6245,99 @@
               <a:latin typeface="Calibri" panose="020F0502020204030204"/>
             </a:endParaRPr>
           </a:p>
-        </p:txBody>
-      </p:sp>
-      <p:cxnSp>
-        <p:nvCxnSpPr>
-          <p:cNvPr id="158" name="Gerade Verbindung mit Pfeil 157">
-            <a:extLst>
-              <a:ext uri="{FF2B5EF4-FFF2-40B4-BE49-F238E27FC236}">
-                <a16:creationId xmlns:a16="http://schemas.microsoft.com/office/drawing/2014/main" id="{7F8AF69D-63A6-BB6A-B020-F4C20183069E}"/>
-              </a:ext>
-            </a:extLst>
-          </p:cNvPr>
-          <p:cNvCxnSpPr>
-            <a:cxnSpLocks/>
-            <a:stCxn id="145" idx="1"/>
-            <a:endCxn id="152" idx="3"/>
-          </p:cNvCxnSpPr>
-          <p:nvPr/>
-        </p:nvCxnSpPr>
-        <p:spPr>
-          <a:xfrm flipH="1">
-            <a:off x="8666968" y="9371287"/>
-            <a:ext cx="435675" cy="9488"/>
-          </a:xfrm>
-          <a:prstGeom prst="straightConnector1">
-            <a:avLst/>
-          </a:prstGeom>
-          <a:noFill/>
-          <a:ln w="6350" cap="flat" cmpd="sng" algn="ctr">
-            <a:solidFill>
-              <a:srgbClr val="5B9BD5"/>
-            </a:solidFill>
-            <a:prstDash val="solid"/>
-            <a:miter lim="800000"/>
-            <a:tailEnd type="triangle"/>
-          </a:ln>
-          <a:effectLst/>
-        </p:spPr>
-      </p:cxnSp>
-      <p:cxnSp>
-        <p:nvCxnSpPr>
-          <p:cNvPr id="159" name="Gerade Verbindung mit Pfeil 158">
-            <a:extLst>
-              <a:ext uri="{FF2B5EF4-FFF2-40B4-BE49-F238E27FC236}">
-                <a16:creationId xmlns:a16="http://schemas.microsoft.com/office/drawing/2014/main" id="{E0072063-E071-5BFA-07F7-75E642B28E77}"/>
-              </a:ext>
-            </a:extLst>
-          </p:cNvPr>
-          <p:cNvCxnSpPr>
-            <a:cxnSpLocks/>
-            <a:stCxn id="148" idx="1"/>
-            <a:endCxn id="156" idx="3"/>
-          </p:cNvCxnSpPr>
-          <p:nvPr/>
-        </p:nvCxnSpPr>
-        <p:spPr>
-          <a:xfrm flipH="1" flipV="1">
-            <a:off x="8666968" y="9963244"/>
-            <a:ext cx="435675" cy="129060"/>
-          </a:xfrm>
-          <a:prstGeom prst="straightConnector1">
-            <a:avLst/>
-          </a:prstGeom>
-          <a:noFill/>
-          <a:ln w="6350" cap="flat" cmpd="sng" algn="ctr">
-            <a:solidFill>
-              <a:srgbClr val="5B9BD5"/>
-            </a:solidFill>
-            <a:prstDash val="solid"/>
-            <a:miter lim="800000"/>
-            <a:tailEnd type="triangle"/>
-          </a:ln>
-          <a:effectLst/>
-        </p:spPr>
-      </p:cxnSp>
-      <p:sp>
-        <p:nvSpPr>
-          <p:cNvPr id="168" name="Rechteck 167">
-            <a:extLst>
-              <a:ext uri="{FF2B5EF4-FFF2-40B4-BE49-F238E27FC236}">
-                <a16:creationId xmlns:a16="http://schemas.microsoft.com/office/drawing/2014/main" id="{CF8AC0D9-3EBA-3573-B442-A8577BA331CA}"/>
-              </a:ext>
-            </a:extLst>
-          </p:cNvPr>
-          <p:cNvSpPr/>
-          <p:nvPr/>
-        </p:nvSpPr>
-        <p:spPr>
-          <a:xfrm>
-            <a:off x="8326115" y="7380577"/>
-            <a:ext cx="1815783" cy="512200"/>
-          </a:xfrm>
-          <a:prstGeom prst="rect">
-            <a:avLst/>
-          </a:prstGeom>
-          <a:solidFill>
-            <a:sysClr val="window" lastClr="FFFFFF"/>
-          </a:solidFill>
-          <a:ln w="12700" cap="flat" cmpd="sng" algn="ctr">
-            <a:solidFill>
-              <a:srgbClr val="A5A5A5"/>
-            </a:solidFill>
-            <a:prstDash val="solid"/>
-            <a:miter lim="800000"/>
-          </a:ln>
-          <a:effectLst/>
-        </p:spPr>
-        <p:txBody>
-          <a:bodyPr lIns="36000" tIns="36000" rIns="36000" bIns="36000" rtlCol="0" anchor="t"/>
-          <a:lstStyle/>
           <a:p>
             <a:pPr defTabSz="914400"/>
             <a:r>
-              <a:rPr lang="de-DE" sz="800" kern="0" dirty="0">
+              <a:rPr lang="de-DE" sz="800" kern="0" dirty="0" err="1">
                 <a:solidFill>
                   <a:prstClr val="black"/>
                 </a:solidFill>
+                <a:highlight>
+                  <a:srgbClr val="FFFF00"/>
+                </a:highlight>
                 <a:latin typeface="Calibri" panose="020F0502020204030204"/>
               </a:rPr>
-              <a:t>element-name=[</a:t>
-            </a:r>
-            <a:r>
-              <a:rPr lang="de-DE" sz="800" kern="0" dirty="0" err="1">
-                <a:solidFill>
-                  <a:prstClr val="black"/>
-                </a:solidFill>
-                <a:latin typeface="Calibri" panose="020F0502020204030204"/>
-              </a:rPr>
-              <a:t>mediatorVmName</a:t>
-            </a:r>
-            <a:r>
-              <a:rPr lang="de-DE" sz="800" kern="0" dirty="0">
-                <a:solidFill>
-                  <a:prstClr val="black"/>
-                </a:solidFill>
-                <a:latin typeface="Calibri" panose="020F0502020204030204"/>
-              </a:rPr>
-              <a:t>]</a:t>
-            </a:r>
-          </a:p>
-          <a:p>
-            <a:pPr defTabSz="914400"/>
-            <a:r>
-              <a:rPr lang="de-DE" sz="800" kern="0" dirty="0" err="1">
-                <a:solidFill>
-                  <a:prstClr val="black"/>
-                </a:solidFill>
-                <a:latin typeface="Calibri" panose="020F0502020204030204"/>
-              </a:rPr>
-              <a:t>category</a:t>
-            </a:r>
-            <a:r>
-              <a:rPr lang="de-DE" sz="800" kern="0" dirty="0">
-                <a:solidFill>
-                  <a:prstClr val="black"/>
-                </a:solidFill>
-                <a:latin typeface="Calibri" panose="020F0502020204030204"/>
-              </a:rPr>
-              <a:t>=</a:t>
-            </a:r>
-            <a:r>
-              <a:rPr lang="de-DE" sz="800" kern="0" dirty="0" err="1">
-                <a:solidFill>
-                  <a:prstClr val="black"/>
-                </a:solidFill>
-                <a:latin typeface="Calibri" panose="020F0502020204030204"/>
-              </a:rPr>
-              <a:t>mediatorVm</a:t>
+              <a:t>defaultSnmpUserName</a:t>
             </a:r>
             <a:endParaRPr lang="de-DE" sz="800" kern="0" dirty="0">
               <a:solidFill>
                 <a:prstClr val="black"/>
               </a:solidFill>
+              <a:highlight>
+                <a:srgbClr val="FFFF00"/>
+              </a:highlight>
               <a:latin typeface="Calibri" panose="020F0502020204030204"/>
             </a:endParaRPr>
           </a:p>
           <a:p>
             <a:pPr defTabSz="914400"/>
             <a:r>
-              <a:rPr lang="de-DE" sz="800" kern="0" dirty="0">
+              <a:rPr lang="de-DE" sz="800" kern="0" dirty="0" err="1">
                 <a:solidFill>
                   <a:prstClr val="black"/>
                 </a:solidFill>
+                <a:highlight>
+                  <a:srgbClr val="FFFF00"/>
+                </a:highlight>
                 <a:latin typeface="Calibri" panose="020F0502020204030204"/>
               </a:rPr>
-              <a:t>_</a:t>
-            </a:r>
-            <a:r>
-              <a:rPr lang="de-DE" sz="800" kern="0" dirty="0" err="1">
-                <a:solidFill>
-                  <a:prstClr val="black"/>
-                </a:solidFill>
-                <a:latin typeface="Calibri" panose="020F0502020204030204"/>
-              </a:rPr>
-              <a:t>template</a:t>
-            </a:r>
-            <a:r>
-              <a:rPr lang="de-DE" sz="800" kern="0" dirty="0">
-                <a:solidFill>
-                  <a:prstClr val="black"/>
-                </a:solidFill>
-                <a:latin typeface="Calibri" panose="020F0502020204030204"/>
-              </a:rPr>
-              <a:t>= </a:t>
-            </a:r>
-            <a:r>
-              <a:rPr lang="de-DE" sz="800" kern="0" dirty="0" err="1">
-                <a:solidFill>
-                  <a:prstClr val="black"/>
-                </a:solidFill>
-                <a:latin typeface="Calibri" panose="020F0502020204030204"/>
-              </a:rPr>
-              <a:t>mediatorVmTemplateName</a:t>
+              <a:t>defaultSnmpUserPassword</a:t>
             </a:r>
             <a:endParaRPr lang="de-DE" sz="800" kern="0" dirty="0">
               <a:solidFill>
                 <a:prstClr val="black"/>
               </a:solidFill>
+              <a:highlight>
+                <a:srgbClr val="FFFF00"/>
+              </a:highlight>
+              <a:latin typeface="Calibri" panose="020F0502020204030204"/>
+            </a:endParaRPr>
+          </a:p>
+          <a:p>
+            <a:pPr defTabSz="914400"/>
+            <a:r>
+              <a:rPr lang="de-DE" sz="800" kern="0" dirty="0" err="1">
+                <a:solidFill>
+                  <a:prstClr val="black"/>
+                </a:solidFill>
+                <a:highlight>
+                  <a:srgbClr val="FFFF00"/>
+                </a:highlight>
+                <a:latin typeface="Calibri" panose="020F0502020204030204"/>
+              </a:rPr>
+              <a:t>defaultNetconfUserName</a:t>
+            </a:r>
+            <a:endParaRPr lang="de-DE" sz="800" kern="0" dirty="0">
+              <a:solidFill>
+                <a:prstClr val="black"/>
+              </a:solidFill>
+              <a:highlight>
+                <a:srgbClr val="FFFF00"/>
+              </a:highlight>
+              <a:latin typeface="Calibri" panose="020F0502020204030204"/>
+            </a:endParaRPr>
+          </a:p>
+          <a:p>
+            <a:pPr defTabSz="914400"/>
+            <a:r>
+              <a:rPr lang="de-DE" sz="800" kern="0" dirty="0" err="1">
+                <a:solidFill>
+                  <a:prstClr val="black"/>
+                </a:solidFill>
+                <a:highlight>
+                  <a:srgbClr val="FFFF00"/>
+                </a:highlight>
+                <a:latin typeface="Calibri" panose="020F0502020204030204"/>
+              </a:rPr>
+              <a:t>defaultNetconfUserPassword</a:t>
+            </a:r>
+            <a:endParaRPr lang="de-DE" sz="800" kern="0" dirty="0">
+              <a:solidFill>
+                <a:prstClr val="black"/>
+              </a:solidFill>
+              <a:highlight>
+                <a:srgbClr val="FFFF00"/>
+              </a:highlight>
               <a:latin typeface="Calibri" panose="020F0502020204030204"/>
             </a:endParaRPr>
           </a:p>
@@ -5910,6 +6350,15 @@
               <a:latin typeface="Calibri" panose="020F0502020204030204"/>
             </a:endParaRPr>
           </a:p>
+          <a:p>
+            <a:pPr defTabSz="914400"/>
+            <a:endParaRPr lang="de-DE" sz="800" kern="0" dirty="0">
+              <a:solidFill>
+                <a:prstClr val="black"/>
+              </a:solidFill>
+              <a:latin typeface="Calibri" panose="020F0502020204030204"/>
+            </a:endParaRPr>
+          </a:p>
         </p:txBody>
       </p:sp>
       <p:cxnSp>
@@ -5931,7 +6380,7 @@
         <p:spPr>
           <a:xfrm flipH="1">
             <a:off x="10141898" y="7583786"/>
-            <a:ext cx="674365" cy="52891"/>
+            <a:ext cx="674365" cy="264692"/>
           </a:xfrm>
           <a:prstGeom prst="straightConnector1">
             <a:avLst/>
@@ -6357,42 +6806,135 @@
               <a:defRPr/>
             </a:pPr>
             <a:r>
-              <a:rPr lang="de-DE" sz="800" kern="0">
+              <a:rPr lang="de-DE" sz="800" kern="0" dirty="0" err="1">
                 <a:solidFill>
                   <a:prstClr val="black"/>
                 </a:solidFill>
                 <a:latin typeface="Calibri" panose="020F0502020204030204"/>
               </a:rPr>
-              <a:t>local-id=[mediatorUserName]</a:t>
+              <a:t>local-id</a:t>
+            </a:r>
+            <a:r>
+              <a:rPr lang="de-DE" sz="800" kern="0" dirty="0">
+                <a:solidFill>
+                  <a:prstClr val="black"/>
+                </a:solidFill>
+                <a:latin typeface="Calibri" panose="020F0502020204030204"/>
+              </a:rPr>
+              <a:t>=[</a:t>
+            </a:r>
+            <a:r>
+              <a:rPr lang="de-DE" sz="800" kern="0" dirty="0" err="1">
+                <a:solidFill>
+                  <a:prstClr val="black"/>
+                </a:solidFill>
+                <a:latin typeface="Calibri" panose="020F0502020204030204"/>
+              </a:rPr>
+              <a:t>mediatorUserName</a:t>
+            </a:r>
+            <a:r>
+              <a:rPr lang="de-DE" sz="800" kern="0" dirty="0">
+                <a:solidFill>
+                  <a:prstClr val="black"/>
+                </a:solidFill>
+                <a:latin typeface="Calibri" panose="020F0502020204030204"/>
+              </a:rPr>
+              <a:t>]</a:t>
             </a:r>
           </a:p>
           <a:p>
             <a:pPr defTabSz="914400"/>
             <a:r>
-              <a:rPr lang="de-DE" sz="800" kern="0">
+              <a:rPr lang="de-DE" sz="800" strike="sngStrike" kern="0" dirty="0" err="1">
                 <a:solidFill>
                   <a:prstClr val="black"/>
                 </a:solidFill>
+                <a:highlight>
+                  <a:srgbClr val="FFFF00"/>
+                </a:highlight>
                 <a:latin typeface="Calibri" panose="020F0502020204030204"/>
               </a:rPr>
               <a:t>mediatorUserName</a:t>
             </a:r>
+            <a:endParaRPr lang="de-DE" sz="800" strike="sngStrike" kern="0" dirty="0">
+              <a:solidFill>
+                <a:prstClr val="black"/>
+              </a:solidFill>
+              <a:highlight>
+                <a:srgbClr val="FFFF00"/>
+              </a:highlight>
+              <a:latin typeface="Calibri" panose="020F0502020204030204"/>
+            </a:endParaRPr>
           </a:p>
           <a:p>
             <a:pPr defTabSz="914400"/>
             <a:r>
-              <a:rPr lang="de-DE" sz="800" kern="0">
+              <a:rPr lang="de-DE" sz="800" strike="sngStrike" kern="0" dirty="0" err="1">
                 <a:solidFill>
                   <a:prstClr val="black"/>
                 </a:solidFill>
+                <a:highlight>
+                  <a:srgbClr val="FFFF00"/>
+                </a:highlight>
                 <a:latin typeface="Calibri" panose="020F0502020204030204"/>
               </a:rPr>
               <a:t>mediatorUserPassword</a:t>
+            </a:r>
+            <a:endParaRPr lang="de-DE" sz="800" strike="sngStrike" kern="0" dirty="0">
+              <a:solidFill>
+                <a:prstClr val="black"/>
+              </a:solidFill>
+              <a:highlight>
+                <a:srgbClr val="FFFF00"/>
+              </a:highlight>
+              <a:latin typeface="Calibri" panose="020F0502020204030204"/>
+            </a:endParaRPr>
+          </a:p>
+          <a:p>
+            <a:pPr defTabSz="914400"/>
+            <a:r>
+              <a:rPr lang="de-DE" sz="800" kern="0" dirty="0" err="1">
+                <a:solidFill>
+                  <a:prstClr val="black"/>
+                </a:solidFill>
+                <a:highlight>
+                  <a:srgbClr val="FFFF00"/>
+                </a:highlight>
+                <a:latin typeface="Calibri" panose="020F0502020204030204"/>
+              </a:rPr>
+              <a:t>snmpUserName</a:t>
             </a:r>
             <a:endParaRPr lang="de-DE" sz="800" kern="0" dirty="0">
               <a:solidFill>
                 <a:prstClr val="black"/>
               </a:solidFill>
+              <a:highlight>
+                <a:srgbClr val="FFFF00"/>
+              </a:highlight>
+              <a:latin typeface="Calibri" panose="020F0502020204030204"/>
+            </a:endParaRPr>
+          </a:p>
+          <a:p>
+            <a:pPr defTabSz="914400"/>
+            <a:r>
+              <a:rPr lang="de-DE" sz="800" kern="0" dirty="0" err="1">
+                <a:solidFill>
+                  <a:prstClr val="black"/>
+                </a:solidFill>
+                <a:highlight>
+                  <a:srgbClr val="FFFF00"/>
+                </a:highlight>
+                <a:latin typeface="Calibri" panose="020F0502020204030204"/>
+              </a:rPr>
+              <a:t>snmpUserPassword</a:t>
+            </a:r>
+            <a:endParaRPr lang="de-DE" sz="800" kern="0" dirty="0">
+              <a:solidFill>
+                <a:prstClr val="black"/>
+              </a:solidFill>
+              <a:highlight>
+                <a:srgbClr val="FFFF00"/>
+              </a:highlight>
               <a:latin typeface="Calibri" panose="020F0502020204030204"/>
             </a:endParaRPr>
           </a:p>
@@ -10808,8 +11350,8 @@
         </p:nvSpPr>
         <p:spPr>
           <a:xfrm>
-            <a:off x="4127035" y="3042938"/>
-            <a:ext cx="1815783" cy="329527"/>
+            <a:off x="3931921" y="3042938"/>
+            <a:ext cx="2010898" cy="329527"/>
           </a:xfrm>
           <a:prstGeom prst="rect">
             <a:avLst/>
@@ -10832,26 +11374,77 @@
           <a:p>
             <a:pPr defTabSz="914400"/>
             <a:r>
-              <a:rPr lang="de-DE" sz="800" kern="0">
+              <a:rPr lang="de-DE" sz="800" kern="0" dirty="0" err="1">
                 <a:solidFill>
                   <a:prstClr val="black"/>
                 </a:solidFill>
                 <a:latin typeface="Calibri" panose="020F0502020204030204"/>
               </a:rPr>
-              <a:t>local-id=[controllerTemplateName]</a:t>
+              <a:t>template</a:t>
+            </a:r>
+            <a:r>
+              <a:rPr lang="de-DE" sz="800" kern="0" dirty="0">
+                <a:solidFill>
+                  <a:prstClr val="black"/>
+                </a:solidFill>
+                <a:latin typeface="Calibri" panose="020F0502020204030204"/>
+              </a:rPr>
+              <a:t>-name=[</a:t>
+            </a:r>
+            <a:r>
+              <a:rPr lang="de-DE" sz="800" kern="0" dirty="0" err="1">
+                <a:solidFill>
+                  <a:prstClr val="black"/>
+                </a:solidFill>
+                <a:latin typeface="Calibri" panose="020F0502020204030204"/>
+              </a:rPr>
+              <a:t>controllerTemplateName</a:t>
+            </a:r>
+            <a:r>
+              <a:rPr lang="de-DE" sz="800" kern="0" dirty="0">
+                <a:solidFill>
+                  <a:prstClr val="black"/>
+                </a:solidFill>
+                <a:latin typeface="Calibri" panose="020F0502020204030204"/>
+              </a:rPr>
+              <a:t>]</a:t>
             </a:r>
           </a:p>
           <a:p>
             <a:pPr defTabSz="914400"/>
             <a:r>
-              <a:rPr lang="de-DE" sz="800" kern="0">
+              <a:rPr lang="de-DE" sz="800" kern="0" dirty="0" err="1">
                 <a:solidFill>
                   <a:prstClr val="black"/>
                 </a:solidFill>
                 <a:latin typeface="Calibri" panose="020F0502020204030204"/>
               </a:rPr>
-              <a:t>category=controller</a:t>
-            </a:r>
+              <a:t>category</a:t>
+            </a:r>
+            <a:r>
+              <a:rPr lang="de-DE" sz="800" kern="0" dirty="0">
+                <a:solidFill>
+                  <a:prstClr val="black"/>
+                </a:solidFill>
+                <a:latin typeface="Calibri" panose="020F0502020204030204"/>
+              </a:rPr>
+              <a:t>=</a:t>
+            </a:r>
+            <a:r>
+              <a:rPr lang="de-DE" sz="800" kern="0" dirty="0" err="1">
+                <a:solidFill>
+                  <a:prstClr val="black"/>
+                </a:solidFill>
+                <a:latin typeface="Calibri" panose="020F0502020204030204"/>
+              </a:rPr>
+              <a:t>controller</a:t>
+            </a:r>
+            <a:endParaRPr lang="de-DE" sz="800" kern="0" dirty="0">
+              <a:solidFill>
+                <a:prstClr val="black"/>
+              </a:solidFill>
+              <a:latin typeface="Calibri" panose="020F0502020204030204"/>
+            </a:endParaRPr>
           </a:p>
         </p:txBody>
       </p:sp>
@@ -10869,8 +11462,8 @@
         </p:nvSpPr>
         <p:spPr>
           <a:xfrm>
-            <a:off x="4127035" y="4417461"/>
-            <a:ext cx="1815783" cy="594652"/>
+            <a:off x="3924301" y="4417461"/>
+            <a:ext cx="2018518" cy="594652"/>
           </a:xfrm>
           <a:prstGeom prst="rect">
             <a:avLst/>
@@ -10893,49 +11486,127 @@
           <a:p>
             <a:pPr defTabSz="914400"/>
             <a:r>
-              <a:rPr lang="de-DE" sz="800" kern="0">
+              <a:rPr lang="de-DE" sz="800" kern="0" dirty="0" err="1">
                 <a:solidFill>
                   <a:prstClr val="black"/>
                 </a:solidFill>
                 <a:latin typeface="Calibri" panose="020F0502020204030204"/>
               </a:rPr>
-              <a:t>local-id=[deviceTemplateName]</a:t>
+              <a:t>template</a:t>
+            </a:r>
+            <a:r>
+              <a:rPr lang="de-DE" sz="800" kern="0" dirty="0">
+                <a:solidFill>
+                  <a:prstClr val="black"/>
+                </a:solidFill>
+                <a:latin typeface="Calibri" panose="020F0502020204030204"/>
+              </a:rPr>
+              <a:t>-name =[</a:t>
+            </a:r>
+            <a:r>
+              <a:rPr lang="de-DE" sz="800" kern="0" dirty="0" err="1">
+                <a:solidFill>
+                  <a:prstClr val="black"/>
+                </a:solidFill>
+                <a:latin typeface="Calibri" panose="020F0502020204030204"/>
+              </a:rPr>
+              <a:t>deviceTemplateName</a:t>
+            </a:r>
+            <a:r>
+              <a:rPr lang="de-DE" sz="800" kern="0" dirty="0">
+                <a:solidFill>
+                  <a:prstClr val="black"/>
+                </a:solidFill>
+                <a:latin typeface="Calibri" panose="020F0502020204030204"/>
+              </a:rPr>
+              <a:t>]</a:t>
             </a:r>
           </a:p>
           <a:p>
             <a:pPr defTabSz="914400"/>
             <a:r>
-              <a:rPr lang="de-DE" sz="800" kern="0">
+              <a:rPr lang="de-DE" sz="800" kern="0" dirty="0" err="1">
                 <a:solidFill>
                   <a:prstClr val="black"/>
                 </a:solidFill>
                 <a:latin typeface="Calibri" panose="020F0502020204030204"/>
               </a:rPr>
-              <a:t>category=device</a:t>
-            </a:r>
+              <a:t>category</a:t>
+            </a:r>
+            <a:r>
+              <a:rPr lang="de-DE" sz="800" kern="0" dirty="0">
+                <a:solidFill>
+                  <a:prstClr val="black"/>
+                </a:solidFill>
+                <a:latin typeface="Calibri" panose="020F0502020204030204"/>
+              </a:rPr>
+              <a:t>=</a:t>
+            </a:r>
+            <a:r>
+              <a:rPr lang="de-DE" sz="800" kern="0" dirty="0" err="1">
+                <a:solidFill>
+                  <a:prstClr val="black"/>
+                </a:solidFill>
+                <a:latin typeface="Calibri" panose="020F0502020204030204"/>
+              </a:rPr>
+              <a:t>device</a:t>
+            </a:r>
+            <a:endParaRPr lang="de-DE" sz="800" kern="0" dirty="0">
+              <a:solidFill>
+                <a:prstClr val="black"/>
+              </a:solidFill>
+              <a:latin typeface="Calibri" panose="020F0502020204030204"/>
+            </a:endParaRPr>
           </a:p>
           <a:p>
             <a:pPr defTabSz="914400"/>
             <a:r>
-              <a:rPr lang="de-DE" sz="800" kern="0">
+              <a:rPr lang="de-DE" sz="800" kern="0" dirty="0">
                 <a:solidFill>
                   <a:prstClr val="black"/>
                 </a:solidFill>
                 <a:latin typeface="Calibri" panose="020F0502020204030204"/>
               </a:rPr>
-              <a:t>[{defaultMediatorUserName,</a:t>
+              <a:t>[{</a:t>
+            </a:r>
+            <a:r>
+              <a:rPr lang="de-DE" sz="800" kern="0" dirty="0" err="1">
+                <a:solidFill>
+                  <a:prstClr val="black"/>
+                </a:solidFill>
+                <a:latin typeface="Calibri" panose="020F0502020204030204"/>
+              </a:rPr>
+              <a:t>defaultMediatorUserName</a:t>
+            </a:r>
+            <a:r>
+              <a:rPr lang="de-DE" sz="800" kern="0" dirty="0">
+                <a:solidFill>
+                  <a:prstClr val="black"/>
+                </a:solidFill>
+                <a:latin typeface="Calibri" panose="020F0502020204030204"/>
+              </a:rPr>
+              <a:t>,</a:t>
             </a:r>
           </a:p>
           <a:p>
             <a:pPr defTabSz="914400"/>
             <a:r>
-              <a:rPr lang="de-DE" sz="800" kern="0">
+              <a:rPr lang="de-DE" sz="800" kern="0" dirty="0" err="1">
                 <a:solidFill>
                   <a:prstClr val="black"/>
                 </a:solidFill>
                 <a:latin typeface="Calibri" panose="020F0502020204030204"/>
               </a:rPr>
-              <a:t>defaultMediatorUserPassword}]</a:t>
+              <a:t>defaultMediatorUserPassword</a:t>
+            </a:r>
+            <a:r>
+              <a:rPr lang="de-DE" sz="800" kern="0" dirty="0">
+                <a:solidFill>
+                  <a:prstClr val="black"/>
+                </a:solidFill>
+                <a:latin typeface="Calibri" panose="020F0502020204030204"/>
+              </a:rPr>
+              <a:t>}]</a:t>
             </a:r>
           </a:p>
         </p:txBody>
@@ -10958,8 +11629,8 @@
         </p:nvCxnSpPr>
         <p:spPr>
           <a:xfrm flipH="1">
-            <a:off x="5942818" y="4695822"/>
-            <a:ext cx="468394" cy="18965"/>
+            <a:off x="5942819" y="4695822"/>
+            <a:ext cx="468393" cy="18965"/>
           </a:xfrm>
           <a:prstGeom prst="straightConnector1">
             <a:avLst/>
@@ -10990,8 +11661,8 @@
         </p:nvSpPr>
         <p:spPr>
           <a:xfrm>
-            <a:off x="4127035" y="3486860"/>
-            <a:ext cx="1815783" cy="606622"/>
+            <a:off x="3931921" y="3486860"/>
+            <a:ext cx="2010898" cy="606622"/>
           </a:xfrm>
           <a:prstGeom prst="rect">
             <a:avLst/>
@@ -11014,49 +11685,208 @@
           <a:p>
             <a:pPr defTabSz="914400"/>
             <a:r>
-              <a:rPr lang="de-DE" sz="800" kern="0">
+              <a:rPr lang="de-DE" sz="800" kern="0" dirty="0" err="1">
                 <a:solidFill>
                   <a:prstClr val="black"/>
                 </a:solidFill>
                 <a:latin typeface="Calibri" panose="020F0502020204030204"/>
               </a:rPr>
-              <a:t>local-id=[mediatorVmTemplateName]</a:t>
+              <a:t>template</a:t>
+            </a:r>
+            <a:r>
+              <a:rPr lang="de-DE" sz="800" kern="0" dirty="0">
+                <a:solidFill>
+                  <a:prstClr val="black"/>
+                </a:solidFill>
+                <a:latin typeface="Calibri" panose="020F0502020204030204"/>
+              </a:rPr>
+              <a:t>-name =[</a:t>
+            </a:r>
+            <a:r>
+              <a:rPr lang="de-DE" sz="800" kern="0" dirty="0" err="1">
+                <a:solidFill>
+                  <a:prstClr val="black"/>
+                </a:solidFill>
+                <a:latin typeface="Calibri" panose="020F0502020204030204"/>
+              </a:rPr>
+              <a:t>mediatorVmTemplateName</a:t>
+            </a:r>
+            <a:r>
+              <a:rPr lang="de-DE" sz="800" kern="0" dirty="0">
+                <a:solidFill>
+                  <a:prstClr val="black"/>
+                </a:solidFill>
+                <a:latin typeface="Calibri" panose="020F0502020204030204"/>
+              </a:rPr>
+              <a:t>]</a:t>
             </a:r>
           </a:p>
           <a:p>
             <a:pPr defTabSz="914400"/>
             <a:r>
-              <a:rPr lang="de-DE" sz="800" kern="0">
+              <a:rPr lang="de-DE" sz="800" kern="0" dirty="0" err="1">
                 <a:solidFill>
                   <a:prstClr val="black"/>
                 </a:solidFill>
                 <a:latin typeface="Calibri" panose="020F0502020204030204"/>
               </a:rPr>
-              <a:t>category=mediatorVm</a:t>
-            </a:r>
+              <a:t>category</a:t>
+            </a:r>
+            <a:r>
+              <a:rPr lang="de-DE" sz="800" kern="0" dirty="0">
+                <a:solidFill>
+                  <a:prstClr val="black"/>
+                </a:solidFill>
+                <a:latin typeface="Calibri" panose="020F0502020204030204"/>
+              </a:rPr>
+              <a:t>=</a:t>
+            </a:r>
+            <a:r>
+              <a:rPr lang="de-DE" sz="800" kern="0" dirty="0" err="1">
+                <a:solidFill>
+                  <a:prstClr val="black"/>
+                </a:solidFill>
+                <a:latin typeface="Calibri" panose="020F0502020204030204"/>
+              </a:rPr>
+              <a:t>mediatorVm</a:t>
+            </a:r>
+            <a:endParaRPr lang="de-DE" sz="800" kern="0" dirty="0">
+              <a:solidFill>
+                <a:prstClr val="black"/>
+              </a:solidFill>
+              <a:latin typeface="Calibri" panose="020F0502020204030204"/>
+            </a:endParaRPr>
           </a:p>
           <a:p>
             <a:pPr defTabSz="914400"/>
             <a:r>
-              <a:rPr lang="de-DE" sz="800" kern="0">
+              <a:rPr lang="de-DE" sz="800" strike="sngStrike" kern="0" dirty="0">
                 <a:solidFill>
                   <a:prstClr val="black"/>
                 </a:solidFill>
+                <a:highlight>
+                  <a:srgbClr val="FFFF00"/>
+                </a:highlight>
                 <a:latin typeface="Calibri" panose="020F0502020204030204"/>
               </a:rPr>
-              <a:t>[{defaultMediatorUserName,</a:t>
+              <a:t>[{</a:t>
+            </a:r>
+            <a:r>
+              <a:rPr lang="de-DE" sz="800" strike="sngStrike" kern="0" dirty="0" err="1">
+                <a:solidFill>
+                  <a:prstClr val="black"/>
+                </a:solidFill>
+                <a:highlight>
+                  <a:srgbClr val="FFFF00"/>
+                </a:highlight>
+                <a:latin typeface="Calibri" panose="020F0502020204030204"/>
+              </a:rPr>
+              <a:t>defaultMediatorUserName</a:t>
+            </a:r>
+            <a:r>
+              <a:rPr lang="de-DE" sz="800" strike="sngStrike" kern="0" dirty="0">
+                <a:solidFill>
+                  <a:prstClr val="black"/>
+                </a:solidFill>
+                <a:highlight>
+                  <a:srgbClr val="FFFF00"/>
+                </a:highlight>
+                <a:latin typeface="Calibri" panose="020F0502020204030204"/>
+              </a:rPr>
+              <a:t>,</a:t>
             </a:r>
           </a:p>
           <a:p>
             <a:pPr defTabSz="914400"/>
             <a:r>
-              <a:rPr lang="de-DE" sz="800" kern="0">
+              <a:rPr lang="de-DE" sz="800" strike="sngStrike" kern="0" dirty="0" err="1">
                 <a:solidFill>
                   <a:prstClr val="black"/>
                 </a:solidFill>
+                <a:highlight>
+                  <a:srgbClr val="FFFF00"/>
+                </a:highlight>
                 <a:latin typeface="Calibri" panose="020F0502020204030204"/>
               </a:rPr>
-              <a:t>defaultMediatorUserPassword}]</a:t>
+              <a:t>defaultMediatorUserPassword</a:t>
+            </a:r>
+            <a:r>
+              <a:rPr lang="de-DE" sz="800" strike="sngStrike" kern="0" dirty="0">
+                <a:solidFill>
+                  <a:prstClr val="black"/>
+                </a:solidFill>
+                <a:highlight>
+                  <a:srgbClr val="FFFF00"/>
+                </a:highlight>
+                <a:latin typeface="Calibri" panose="020F0502020204030204"/>
+              </a:rPr>
+              <a:t>}]</a:t>
+            </a:r>
+          </a:p>
+          <a:p>
+            <a:pPr defTabSz="914400"/>
+            <a:r>
+              <a:rPr lang="de-DE" sz="800" kern="0" dirty="0">
+                <a:solidFill>
+                  <a:prstClr val="black"/>
+                </a:solidFill>
+                <a:highlight>
+                  <a:srgbClr val="FFFF00"/>
+                </a:highlight>
+                <a:latin typeface="Calibri" panose="020F0502020204030204"/>
+              </a:rPr>
+              <a:t>[{</a:t>
+            </a:r>
+            <a:r>
+              <a:rPr lang="de-DE" sz="800" kern="0" dirty="0" err="1">
+                <a:solidFill>
+                  <a:prstClr val="black"/>
+                </a:solidFill>
+                <a:highlight>
+                  <a:srgbClr val="FFFF00"/>
+                </a:highlight>
+                <a:latin typeface="Calibri" panose="020F0502020204030204"/>
+              </a:rPr>
+              <a:t>defaultSnmpUserName</a:t>
+            </a:r>
+            <a:r>
+              <a:rPr lang="de-DE" sz="800" kern="0" dirty="0">
+                <a:solidFill>
+                  <a:prstClr val="black"/>
+                </a:solidFill>
+                <a:highlight>
+                  <a:srgbClr val="FFFF00"/>
+                </a:highlight>
+                <a:latin typeface="Calibri" panose="020F0502020204030204"/>
+              </a:rPr>
+              <a:t>,</a:t>
+            </a:r>
+          </a:p>
+          <a:p>
+            <a:pPr defTabSz="914400"/>
+            <a:r>
+              <a:rPr lang="de-DE" sz="800" kern="0" dirty="0" err="1">
+                <a:solidFill>
+                  <a:prstClr val="black"/>
+                </a:solidFill>
+                <a:highlight>
+                  <a:srgbClr val="FFFF00"/>
+                </a:highlight>
+                <a:latin typeface="Calibri" panose="020F0502020204030204"/>
+              </a:rPr>
+              <a:t>defaultSnmpUserPassword</a:t>
+            </a:r>
+            <a:r>
+              <a:rPr lang="de-DE" sz="800" kern="0" dirty="0">
+                <a:solidFill>
+                  <a:prstClr val="black"/>
+                </a:solidFill>
+                <a:highlight>
+                  <a:srgbClr val="FFFF00"/>
+                </a:highlight>
+                <a:latin typeface="Calibri" panose="020F0502020204030204"/>
+              </a:rPr>
+              <a:t>}]</a:t>
             </a:r>
           </a:p>
         </p:txBody>
@@ -11079,8 +11909,8 @@
         </p:nvCxnSpPr>
         <p:spPr>
           <a:xfrm flipH="1" flipV="1">
-            <a:off x="5942818" y="3207702"/>
-            <a:ext cx="468394" cy="29715"/>
+            <a:off x="5942819" y="3207702"/>
+            <a:ext cx="468393" cy="29715"/>
           </a:xfrm>
           <a:prstGeom prst="straightConnector1">
             <a:avLst/>
@@ -11115,8 +11945,8 @@
         </p:nvCxnSpPr>
         <p:spPr>
           <a:xfrm flipH="1" flipV="1">
-            <a:off x="5942818" y="3790171"/>
-            <a:ext cx="468394" cy="174616"/>
+            <a:off x="5942819" y="3790171"/>
+            <a:ext cx="468393" cy="174616"/>
           </a:xfrm>
           <a:prstGeom prst="straightConnector1">
             <a:avLst/>
@@ -12073,6 +12903,45 @@
           <a:effectLst/>
         </p:spPr>
       </p:cxnSp>
+      <p:sp>
+        <p:nvSpPr>
+          <p:cNvPr id="19" name="Textfeld 18">
+            <a:extLst>
+              <a:ext uri="{FF2B5EF4-FFF2-40B4-BE49-F238E27FC236}">
+                <a16:creationId xmlns:a16="http://schemas.microsoft.com/office/drawing/2014/main" id="{4356CF41-7A92-9DEA-F805-BE046ED8D18A}"/>
+              </a:ext>
+            </a:extLst>
+          </p:cNvPr>
+          <p:cNvSpPr txBox="1"/>
+          <p:nvPr/>
+        </p:nvSpPr>
+        <p:spPr>
+          <a:xfrm>
+            <a:off x="361950" y="419497"/>
+            <a:ext cx="1903085" cy="1015663"/>
+          </a:xfrm>
+          <a:prstGeom prst="rect">
+            <a:avLst/>
+          </a:prstGeom>
+          <a:noFill/>
+        </p:spPr>
+        <p:txBody>
+          <a:bodyPr wrap="none" rtlCol="0">
+            <a:spAutoFit/>
+          </a:bodyPr>
+          <a:lstStyle/>
+          <a:p>
+            <a:r>
+              <a:rPr lang="de-DE" sz="6000" b="1" dirty="0">
+                <a:solidFill>
+                  <a:srgbClr val="0070C0"/>
+                </a:solidFill>
+              </a:rPr>
+              <a:t>DDM</a:t>
+            </a:r>
+          </a:p>
+        </p:txBody>
+      </p:sp>
     </p:spTree>
     <p:extLst>
       <p:ext uri="{BB962C8B-B14F-4D97-AF65-F5344CB8AC3E}">
